--- a/docs/INES Digital library.pptx
+++ b/docs/INES Digital library.pptx
@@ -2,27 +2,27 @@
 <file path=ppt/presentation.xml><?xml version="1.0" encoding="utf-8"?>
 <p:presentation xmlns:p="http://schemas.openxmlformats.org/presentationml/2006/main">
   <p:sldMasterIdLst>
-    <p:sldMasterId xmlns:r="http://schemas.openxmlformats.org/officeDocument/2006/relationships" id="2147483648" r:id="Rd09f35aaef5f45e2"/>
+    <p:sldMasterId xmlns:r="http://schemas.openxmlformats.org/officeDocument/2006/relationships" id="2147483648" r:id="R0428fae9c81c4f81"/>
   </p:sldMasterIdLst>
   <p:notesMasterIdLst>
-    <p:notesMasterId xmlns:r="http://schemas.openxmlformats.org/officeDocument/2006/relationships" r:id="R6f202ac0fe2444b7"/>
+    <p:notesMasterId xmlns:r="http://schemas.openxmlformats.org/officeDocument/2006/relationships" r:id="Rba5a998160624231"/>
   </p:notesMasterIdLst>
   <p:sldIdLst>
-    <p:sldId xmlns:r="http://schemas.openxmlformats.org/officeDocument/2006/relationships" id="256" r:id="Rd4276448cb354b7e"/>
-    <p:sldId xmlns:r="http://schemas.openxmlformats.org/officeDocument/2006/relationships" id="257" r:id="Rd4d61c74ca174bd9"/>
-    <p:sldId xmlns:r="http://schemas.openxmlformats.org/officeDocument/2006/relationships" id="258" r:id="R9e00ecca80b5441d"/>
-    <p:sldId xmlns:r="http://schemas.openxmlformats.org/officeDocument/2006/relationships" id="259" r:id="Ra6e7887b4eb44e3c"/>
-    <p:sldId xmlns:r="http://schemas.openxmlformats.org/officeDocument/2006/relationships" id="260" r:id="R4be829c35a95402f"/>
-    <p:sldId xmlns:r="http://schemas.openxmlformats.org/officeDocument/2006/relationships" id="261" r:id="Rb3104d65d3dc4832"/>
-    <p:sldId xmlns:r="http://schemas.openxmlformats.org/officeDocument/2006/relationships" id="262" r:id="R6ac9f360065d40f6"/>
-    <p:sldId xmlns:r="http://schemas.openxmlformats.org/officeDocument/2006/relationships" id="263" r:id="R822b5d768d614654"/>
-    <p:sldId xmlns:r="http://schemas.openxmlformats.org/officeDocument/2006/relationships" id="264" r:id="R248bcebb368c41f6"/>
-    <p:sldId xmlns:r="http://schemas.openxmlformats.org/officeDocument/2006/relationships" id="265" r:id="Rbf52aceb3adb4703"/>
-    <p:sldId xmlns:r="http://schemas.openxmlformats.org/officeDocument/2006/relationships" id="266" r:id="Rf5eb04356489438c"/>
-    <p:sldId xmlns:r="http://schemas.openxmlformats.org/officeDocument/2006/relationships" id="267" r:id="Rd34c298d33104ab8"/>
-    <p:sldId xmlns:r="http://schemas.openxmlformats.org/officeDocument/2006/relationships" id="268" r:id="R58d6fbb522fa4b27"/>
-    <p:sldId xmlns:r="http://schemas.openxmlformats.org/officeDocument/2006/relationships" id="269" r:id="R372e5aec059e4a88"/>
-    <p:sldId xmlns:r="http://schemas.openxmlformats.org/officeDocument/2006/relationships" id="270" r:id="Rd320f84ebfb34b67"/>
+    <p:sldId xmlns:r="http://schemas.openxmlformats.org/officeDocument/2006/relationships" id="256" r:id="R6dffaa0d5a804b7e"/>
+    <p:sldId xmlns:r="http://schemas.openxmlformats.org/officeDocument/2006/relationships" id="257" r:id="R1491ec9b6dde47cb"/>
+    <p:sldId xmlns:r="http://schemas.openxmlformats.org/officeDocument/2006/relationships" id="258" r:id="R6805c8246665485a"/>
+    <p:sldId xmlns:r="http://schemas.openxmlformats.org/officeDocument/2006/relationships" id="259" r:id="Re3528dd86e5b475a"/>
+    <p:sldId xmlns:r="http://schemas.openxmlformats.org/officeDocument/2006/relationships" id="260" r:id="R6eb4afbe32904af8"/>
+    <p:sldId xmlns:r="http://schemas.openxmlformats.org/officeDocument/2006/relationships" id="261" r:id="R3794df90f19b4024"/>
+    <p:sldId xmlns:r="http://schemas.openxmlformats.org/officeDocument/2006/relationships" id="262" r:id="Rd0104d3934894ae6"/>
+    <p:sldId xmlns:r="http://schemas.openxmlformats.org/officeDocument/2006/relationships" id="263" r:id="Rc5bfc2193f394e66"/>
+    <p:sldId xmlns:r="http://schemas.openxmlformats.org/officeDocument/2006/relationships" id="264" r:id="Rb4a08e6d5dcb4be7"/>
+    <p:sldId xmlns:r="http://schemas.openxmlformats.org/officeDocument/2006/relationships" id="265" r:id="Ra957812c6b6b4e7c"/>
+    <p:sldId xmlns:r="http://schemas.openxmlformats.org/officeDocument/2006/relationships" id="266" r:id="Rebf0869cccc14a2f"/>
+    <p:sldId xmlns:r="http://schemas.openxmlformats.org/officeDocument/2006/relationships" id="267" r:id="R0ab41cd279514617"/>
+    <p:sldId xmlns:r="http://schemas.openxmlformats.org/officeDocument/2006/relationships" id="268" r:id="Rebfdccf66f0d477c"/>
+    <p:sldId xmlns:r="http://schemas.openxmlformats.org/officeDocument/2006/relationships" id="269" r:id="R321e00f15e294630"/>
+    <p:sldId xmlns:r="http://schemas.openxmlformats.org/officeDocument/2006/relationships" id="270" r:id="R0d2fb580368942a6"/>
   </p:sldIdLst>
   <p:sldSz cx="12192000" cy="6858000"/>
   <p:notesSz cx="6858000" cy="9144000"/>
@@ -1041,7 +1041,7 @@
           <a:lstStyle xmlns:a="http://schemas.openxmlformats.org/drawingml/2006/main"/>
           <a:p xmlns:a="http://schemas.openxmlformats.org/drawingml/2006/main">
             <a:r>
-              <a:t>Use the screenshot to explain the current/manual web catalogue experience and its limitations.</a:t>
+              <a:t>Problem statement comes before objectives, as in the dissertation. Use the image to explain the main challenges with few extra words.</a:t>
             </a:r>
           </a:p>
         </p:txBody>
@@ -1111,7 +1111,7 @@
           <a:lstStyle xmlns:a="http://schemas.openxmlformats.org/drawingml/2006/main"/>
           <a:p xmlns:a="http://schemas.openxmlformats.org/drawingml/2006/main">
             <a:r>
-              <a:t>Problem statement: users can struggle to find, access, and consume books efficiently. Link each challenge to the proposed voice-interactive solution.</a:t>
+              <a:t>Use the screenshot to explain the current/manual web catalogue experience and its limitations.</a:t>
             </a:r>
           </a:p>
         </p:txBody>
@@ -1181,7 +1181,7 @@
           <a:lstStyle xmlns:a="http://schemas.openxmlformats.org/drawingml/2006/main"/>
           <a:p xmlns:a="http://schemas.openxmlformats.org/drawingml/2006/main">
             <a:r>
-              <a:t>This mirrors the reference deck section break. Use it to transition from problem to solution.</a:t>
+              <a:t>These objectives match the final dissertation book wording in concise slide form.</a:t>
             </a:r>
           </a:p>
         </p:txBody>
@@ -1321,7 +1321,7 @@
           <a:lstStyle xmlns:a="http://schemas.openxmlformats.org/drawingml/2006/main"/>
           <a:p xmlns:a="http://schemas.openxmlformats.org/drawingml/2006/main">
             <a:r>
-              <a:t>These objectives match the final dissertation book wording in concise slide form.</a:t>
+              <a:t>Use this short break to transition from objectives to the implemented solution.</a:t>
             </a:r>
           </a:p>
         </p:txBody>
@@ -1391,7 +1391,7 @@
           <a:lstStyle xmlns:a="http://schemas.openxmlformats.org/drawingml/2006/main"/>
           <a:p xmlns:a="http://schemas.openxmlformats.org/drawingml/2006/main">
             <a:r>
-              <a:t>Explain that data collection is part of methodology for understanding the problem and requirements. Chapter 4 should show implementation and testing results, not invented survey results.</a:t>
+              <a:t>Keep this simple during presentation: problem, needs, design, build, and test.</a:t>
             </a:r>
           </a:p>
         </p:txBody>
@@ -1599,7 +1599,7 @@
   </p:cSld>
   <p:clrMap bg1="lt1" tx1="dk1" bg2="lt2" tx2="dk2" accent1="accent1" accent2="accent2" accent3="accent3" accent4="accent4" accent5="accent5" accent6="accent6" hlink="hlink" folHlink="folHlink"/>
   <p:sldLayoutIdLst>
-    <p:sldLayoutId xmlns:r="http://schemas.openxmlformats.org/officeDocument/2006/relationships" id="2147483649" r:id="R17c624a4638c4c2a"/>
+    <p:sldLayoutId xmlns:r="http://schemas.openxmlformats.org/officeDocument/2006/relationships" id="2147483649" r:id="R623a17b2835f4ee3"/>
   </p:sldLayoutIdLst>
   <p:txStyles>
     <p:titleStyle>
@@ -2150,7 +2150,7 @@
           <p:cNvPr id="1" name="">
             <a:extLst xmlns:a="http://schemas.openxmlformats.org/drawingml/2006/main">
               <a:ext uri="{FF2B5EF4-FFF2-40B4-BE49-F238E27FC236}">
-                <a16:creationId xmlns:a16="http://schemas.microsoft.com/office/drawing/2014/main" id="{7AC94502-3265-4C45-A67D-C070D13231EA}"/>
+                <a16:creationId xmlns:a16="http://schemas.microsoft.com/office/drawing/2014/main" id="{1CB69D29-38E8-4614-B0E1-9E6DE0C75CBF}"/>
               </a:ext>
             </a:extLst>
           </p:cNvPr>
@@ -2187,7 +2187,7 @@
           <p:nvPr/>
         </p:nvPicPr>
         <p:blipFill>
-          <a:blip xmlns:r="http://schemas.openxmlformats.org/officeDocument/2006/relationships" xmlns:a="http://schemas.openxmlformats.org/drawingml/2006/main" r:embed="Rd78cd775aa784f69"/>
+          <a:blip xmlns:r="http://schemas.openxmlformats.org/officeDocument/2006/relationships" xmlns:a="http://schemas.openxmlformats.org/drawingml/2006/main" r:embed="R96de018203c94232"/>
           <a:stretch xmlns:a="http://schemas.openxmlformats.org/drawingml/2006/main"/>
         </p:blipFill>
         <p:spPr>
@@ -2205,7 +2205,7 @@
           <p:cNvPr id="3" name="">
             <a:extLst xmlns:a="http://schemas.openxmlformats.org/drawingml/2006/main">
               <a:ext uri="{FF2B5EF4-FFF2-40B4-BE49-F238E27FC236}">
-                <a16:creationId xmlns:a16="http://schemas.microsoft.com/office/drawing/2014/main" id="{9BA0A8EA-9365-4E22-AF4C-2D9B5D036821}"/>
+                <a16:creationId xmlns:a16="http://schemas.microsoft.com/office/drawing/2014/main" id="{A3CA7E50-0DF8-4386-B0F7-11B49D3A9734}"/>
               </a:ext>
             </a:extLst>
           </p:cNvPr>
@@ -2261,7 +2261,7 @@
           <p:cNvPr id="4" name="">
             <a:extLst xmlns:a="http://schemas.openxmlformats.org/drawingml/2006/main">
               <a:ext uri="{FF2B5EF4-FFF2-40B4-BE49-F238E27FC236}">
-                <a16:creationId xmlns:a16="http://schemas.microsoft.com/office/drawing/2014/main" id="{896606E8-D6F3-41A4-98D0-150BDA0F5AE5}"/>
+                <a16:creationId xmlns:a16="http://schemas.microsoft.com/office/drawing/2014/main" id="{8393BBA3-62E8-429B-8076-92BD705EE1F4}"/>
               </a:ext>
             </a:extLst>
           </p:cNvPr>
@@ -2317,7 +2317,7 @@
           <p:cNvPr id="5" name="">
             <a:extLst xmlns:a="http://schemas.openxmlformats.org/drawingml/2006/main">
               <a:ext uri="{FF2B5EF4-FFF2-40B4-BE49-F238E27FC236}">
-                <a16:creationId xmlns:a16="http://schemas.microsoft.com/office/drawing/2014/main" id="{A8185609-3399-49E5-BB13-4CE557B298B9}"/>
+                <a16:creationId xmlns:a16="http://schemas.microsoft.com/office/drawing/2014/main" id="{63CC4071-01D4-47F5-80B5-8F179B7B77E6}"/>
               </a:ext>
             </a:extLst>
           </p:cNvPr>
@@ -2352,7 +2352,7 @@
           <p:cNvPr id="6" name="">
             <a:extLst xmlns:a="http://schemas.openxmlformats.org/drawingml/2006/main">
               <a:ext uri="{FF2B5EF4-FFF2-40B4-BE49-F238E27FC236}">
-                <a16:creationId xmlns:a16="http://schemas.microsoft.com/office/drawing/2014/main" id="{D3A93B62-EA8F-4A77-A748-1E277DF194E6}"/>
+                <a16:creationId xmlns:a16="http://schemas.microsoft.com/office/drawing/2014/main" id="{759A121E-544A-496A-9EF6-6CACBC5F3A6E}"/>
               </a:ext>
             </a:extLst>
           </p:cNvPr>
@@ -2408,7 +2408,7 @@
           <p:cNvPr id="7" name="">
             <a:extLst xmlns:a="http://schemas.openxmlformats.org/drawingml/2006/main">
               <a:ext uri="{FF2B5EF4-FFF2-40B4-BE49-F238E27FC236}">
-                <a16:creationId xmlns:a16="http://schemas.microsoft.com/office/drawing/2014/main" id="{2203EFDE-3AD5-4E99-9086-4F6240BD3196}"/>
+                <a16:creationId xmlns:a16="http://schemas.microsoft.com/office/drawing/2014/main" id="{6D897F0C-52FC-493F-AA79-41D8A3364464}"/>
               </a:ext>
             </a:extLst>
           </p:cNvPr>
@@ -2464,7 +2464,7 @@
           <p:cNvPr id="8" name="">
             <a:extLst xmlns:a="http://schemas.openxmlformats.org/drawingml/2006/main">
               <a:ext uri="{FF2B5EF4-FFF2-40B4-BE49-F238E27FC236}">
-                <a16:creationId xmlns:a16="http://schemas.microsoft.com/office/drawing/2014/main" id="{FA058D07-EA55-48D4-BB9F-564B5952351B}"/>
+                <a16:creationId xmlns:a16="http://schemas.microsoft.com/office/drawing/2014/main" id="{6CC7BFE9-FF0A-482A-93E6-8D3D84FED17F}"/>
               </a:ext>
             </a:extLst>
           </p:cNvPr>
@@ -2541,7 +2541,7 @@
     </p:spTree>
     <p:extLst>
       <p:ext uri="{BB962C8B-B14F-4D97-AF65-F5344CB8AC3E}">
-        <p14:creationId xmlns:p14="http://schemas.microsoft.com/office/powerpoint/2010/main" val="628911602"/>
+        <p14:creationId xmlns:p14="http://schemas.microsoft.com/office/powerpoint/2010/main" val="873481939"/>
       </p:ext>
     </p:extLst>
   </p:cSld>
@@ -2572,7 +2572,7 @@
           <p:cNvPr id="1" name="">
             <a:extLst xmlns:a="http://schemas.openxmlformats.org/drawingml/2006/main">
               <a:ext uri="{FF2B5EF4-FFF2-40B4-BE49-F238E27FC236}">
-                <a16:creationId xmlns:a16="http://schemas.microsoft.com/office/drawing/2014/main" id="{C079D827-1566-47DC-8EF2-9F6963BE91D0}"/>
+                <a16:creationId xmlns:a16="http://schemas.microsoft.com/office/drawing/2014/main" id="{E1212EFA-392C-4290-BFB6-5651B73E4D95}"/>
               </a:ext>
             </a:extLst>
           </p:cNvPr>
@@ -2605,7 +2605,7 @@
           <p:cNvPr id="2" name="">
             <a:extLst xmlns:a="http://schemas.openxmlformats.org/drawingml/2006/main">
               <a:ext uri="{FF2B5EF4-FFF2-40B4-BE49-F238E27FC236}">
-                <a16:creationId xmlns:a16="http://schemas.microsoft.com/office/drawing/2014/main" id="{8EECCEAA-D980-4253-919B-759435D7956D}"/>
+                <a16:creationId xmlns:a16="http://schemas.microsoft.com/office/drawing/2014/main" id="{EBCAA12A-A4AE-406D-B487-259CE63E4E1F}"/>
               </a:ext>
             </a:extLst>
           </p:cNvPr>
@@ -2638,7 +2638,7 @@
           <p:cNvPr id="3" name="">
             <a:extLst xmlns:a="http://schemas.openxmlformats.org/drawingml/2006/main">
               <a:ext uri="{FF2B5EF4-FFF2-40B4-BE49-F238E27FC236}">
-                <a16:creationId xmlns:a16="http://schemas.microsoft.com/office/drawing/2014/main" id="{F170843D-9563-4AD4-BD79-1AB91A76D3B0}"/>
+                <a16:creationId xmlns:a16="http://schemas.microsoft.com/office/drawing/2014/main" id="{498192A6-127D-407D-A82A-405AAAD6C8AA}"/>
               </a:ext>
             </a:extLst>
           </p:cNvPr>
@@ -2694,7 +2694,7 @@
           <p:cNvPr id="4" name="">
             <a:extLst xmlns:a="http://schemas.openxmlformats.org/drawingml/2006/main">
               <a:ext uri="{FF2B5EF4-FFF2-40B4-BE49-F238E27FC236}">
-                <a16:creationId xmlns:a16="http://schemas.microsoft.com/office/drawing/2014/main" id="{6339D67C-341D-487C-9182-53FD27BDE52B}"/>
+                <a16:creationId xmlns:a16="http://schemas.microsoft.com/office/drawing/2014/main" id="{444C7E86-9429-45F7-8EDA-4721D2609B8D}"/>
               </a:ext>
             </a:extLst>
           </p:cNvPr>
@@ -2750,7 +2750,7 @@
           <p:cNvPr id="5" name="">
             <a:extLst xmlns:a="http://schemas.openxmlformats.org/drawingml/2006/main">
               <a:ext uri="{FF2B5EF4-FFF2-40B4-BE49-F238E27FC236}">
-                <a16:creationId xmlns:a16="http://schemas.microsoft.com/office/drawing/2014/main" id="{CD1A0D4F-A1C6-47DC-B2D1-BBE0EAEAC855}"/>
+                <a16:creationId xmlns:a16="http://schemas.microsoft.com/office/drawing/2014/main" id="{899EE879-C27F-4BBA-A65F-306564B63BBE}"/>
               </a:ext>
             </a:extLst>
           </p:cNvPr>
@@ -2785,7 +2785,7 @@
           <p:nvPr/>
         </p:nvPicPr>
         <p:blipFill>
-          <a:blip xmlns:r="http://schemas.openxmlformats.org/officeDocument/2006/relationships" xmlns:a="http://schemas.openxmlformats.org/drawingml/2006/main" r:embed="Rb1577407d5074c8a"/>
+          <a:blip xmlns:r="http://schemas.openxmlformats.org/officeDocument/2006/relationships" xmlns:a="http://schemas.openxmlformats.org/drawingml/2006/main" r:embed="R2fe3834efaad42f0"/>
           <a:stretch xmlns:a="http://schemas.openxmlformats.org/drawingml/2006/main"/>
         </p:blipFill>
         <p:spPr>
@@ -2803,7 +2803,7 @@
           <p:cNvPr id="7" name="">
             <a:extLst xmlns:a="http://schemas.openxmlformats.org/drawingml/2006/main">
               <a:ext uri="{FF2B5EF4-FFF2-40B4-BE49-F238E27FC236}">
-                <a16:creationId xmlns:a16="http://schemas.microsoft.com/office/drawing/2014/main" id="{D41F98B3-DF2A-4BAB-B4B6-9DE0E716306D}"/>
+                <a16:creationId xmlns:a16="http://schemas.microsoft.com/office/drawing/2014/main" id="{9F540BD8-FAF7-481D-B1BB-70B754EF53D9}"/>
               </a:ext>
             </a:extLst>
           </p:cNvPr>
@@ -2838,7 +2838,7 @@
           <p:cNvPr id="8" name="">
             <a:extLst xmlns:a="http://schemas.openxmlformats.org/drawingml/2006/main">
               <a:ext uri="{FF2B5EF4-FFF2-40B4-BE49-F238E27FC236}">
-                <a16:creationId xmlns:a16="http://schemas.microsoft.com/office/drawing/2014/main" id="{C8706178-ECB8-4042-A107-2C91AD042CEE}"/>
+                <a16:creationId xmlns:a16="http://schemas.microsoft.com/office/drawing/2014/main" id="{06D86CC4-89AA-4DE8-A902-0EB03942A8B7}"/>
               </a:ext>
             </a:extLst>
           </p:cNvPr>
@@ -2894,7 +2894,7 @@
           <p:cNvPr id="9" name="">
             <a:extLst xmlns:a="http://schemas.openxmlformats.org/drawingml/2006/main">
               <a:ext uri="{FF2B5EF4-FFF2-40B4-BE49-F238E27FC236}">
-                <a16:creationId xmlns:a16="http://schemas.microsoft.com/office/drawing/2014/main" id="{8C5C87EE-7143-44F0-A34E-98173106E413}"/>
+                <a16:creationId xmlns:a16="http://schemas.microsoft.com/office/drawing/2014/main" id="{804E3A37-D3B1-426E-BBCC-DD9F39EA6F73}"/>
               </a:ext>
             </a:extLst>
           </p:cNvPr>
@@ -2950,7 +2950,7 @@
           <p:cNvPr id="10" name="">
             <a:extLst xmlns:a="http://schemas.openxmlformats.org/drawingml/2006/main">
               <a:ext uri="{FF2B5EF4-FFF2-40B4-BE49-F238E27FC236}">
-                <a16:creationId xmlns:a16="http://schemas.microsoft.com/office/drawing/2014/main" id="{01CAA5F3-A709-40A3-AA71-9191F09C362A}"/>
+                <a16:creationId xmlns:a16="http://schemas.microsoft.com/office/drawing/2014/main" id="{B0738400-6CA2-41BA-A65F-85A4814D5C1E}"/>
               </a:ext>
             </a:extLst>
           </p:cNvPr>
@@ -2985,7 +2985,7 @@
           <p:cNvPr id="11" name="">
             <a:extLst xmlns:a="http://schemas.openxmlformats.org/drawingml/2006/main">
               <a:ext uri="{FF2B5EF4-FFF2-40B4-BE49-F238E27FC236}">
-                <a16:creationId xmlns:a16="http://schemas.microsoft.com/office/drawing/2014/main" id="{C23964CD-4BCA-4C00-BC42-BB720EDEFEFC}"/>
+                <a16:creationId xmlns:a16="http://schemas.microsoft.com/office/drawing/2014/main" id="{A1CF56D4-ECC4-4868-99E0-A7D4F043BCD9}"/>
               </a:ext>
             </a:extLst>
           </p:cNvPr>
@@ -3041,7 +3041,7 @@
           <p:cNvPr id="12" name="">
             <a:extLst xmlns:a="http://schemas.openxmlformats.org/drawingml/2006/main">
               <a:ext uri="{FF2B5EF4-FFF2-40B4-BE49-F238E27FC236}">
-                <a16:creationId xmlns:a16="http://schemas.microsoft.com/office/drawing/2014/main" id="{F9E17E12-1E9C-4679-BA9C-D9411E7D0D44}"/>
+                <a16:creationId xmlns:a16="http://schemas.microsoft.com/office/drawing/2014/main" id="{7D97BA0D-4EE9-4783-9581-01C86396885F}"/>
               </a:ext>
             </a:extLst>
           </p:cNvPr>
@@ -3097,7 +3097,7 @@
           <p:cNvPr id="13" name="">
             <a:extLst xmlns:a="http://schemas.openxmlformats.org/drawingml/2006/main">
               <a:ext uri="{FF2B5EF4-FFF2-40B4-BE49-F238E27FC236}">
-                <a16:creationId xmlns:a16="http://schemas.microsoft.com/office/drawing/2014/main" id="{6A5B80A9-627C-44BD-A8A1-F37526365D01}"/>
+                <a16:creationId xmlns:a16="http://schemas.microsoft.com/office/drawing/2014/main" id="{271380F7-9F32-4501-9F60-4B073F57DDD7}"/>
               </a:ext>
             </a:extLst>
           </p:cNvPr>
@@ -3132,7 +3132,7 @@
           <p:cNvPr id="14" name="">
             <a:extLst xmlns:a="http://schemas.openxmlformats.org/drawingml/2006/main">
               <a:ext uri="{FF2B5EF4-FFF2-40B4-BE49-F238E27FC236}">
-                <a16:creationId xmlns:a16="http://schemas.microsoft.com/office/drawing/2014/main" id="{35E1F4D1-C6F6-426C-85F5-8B9E98D74C2C}"/>
+                <a16:creationId xmlns:a16="http://schemas.microsoft.com/office/drawing/2014/main" id="{F2130A8F-A04B-4F49-9DD1-17D090DA681C}"/>
               </a:ext>
             </a:extLst>
           </p:cNvPr>
@@ -3188,7 +3188,7 @@
           <p:cNvPr id="15" name="">
             <a:extLst xmlns:a="http://schemas.openxmlformats.org/drawingml/2006/main">
               <a:ext uri="{FF2B5EF4-FFF2-40B4-BE49-F238E27FC236}">
-                <a16:creationId xmlns:a16="http://schemas.microsoft.com/office/drawing/2014/main" id="{A460957A-82F8-46D9-844D-ACB2ED1103A5}"/>
+                <a16:creationId xmlns:a16="http://schemas.microsoft.com/office/drawing/2014/main" id="{C508A12C-855D-462B-AD2A-F6255C5CBC66}"/>
               </a:ext>
             </a:extLst>
           </p:cNvPr>
@@ -3244,7 +3244,7 @@
           <p:cNvPr id="16" name="">
             <a:extLst xmlns:a="http://schemas.openxmlformats.org/drawingml/2006/main">
               <a:ext uri="{FF2B5EF4-FFF2-40B4-BE49-F238E27FC236}">
-                <a16:creationId xmlns:a16="http://schemas.microsoft.com/office/drawing/2014/main" id="{D776A5D9-250F-4222-984E-FCE40E70DECF}"/>
+                <a16:creationId xmlns:a16="http://schemas.microsoft.com/office/drawing/2014/main" id="{81FD6BC2-74E6-47E0-821D-70A05AC4337B}"/>
               </a:ext>
             </a:extLst>
           </p:cNvPr>
@@ -3279,7 +3279,7 @@
           <p:cNvPr id="17" name="">
             <a:extLst xmlns:a="http://schemas.openxmlformats.org/drawingml/2006/main">
               <a:ext uri="{FF2B5EF4-FFF2-40B4-BE49-F238E27FC236}">
-                <a16:creationId xmlns:a16="http://schemas.microsoft.com/office/drawing/2014/main" id="{E33ACBA9-6813-4DF7-BC43-408264471819}"/>
+                <a16:creationId xmlns:a16="http://schemas.microsoft.com/office/drawing/2014/main" id="{8BAA03FB-CC96-425D-9984-4A80325C0855}"/>
               </a:ext>
             </a:extLst>
           </p:cNvPr>
@@ -3335,7 +3335,7 @@
           <p:cNvPr id="18" name="">
             <a:extLst xmlns:a="http://schemas.openxmlformats.org/drawingml/2006/main">
               <a:ext uri="{FF2B5EF4-FFF2-40B4-BE49-F238E27FC236}">
-                <a16:creationId xmlns:a16="http://schemas.microsoft.com/office/drawing/2014/main" id="{A8E339B8-5683-49D3-8E4C-A7C00C1C0AFA}"/>
+                <a16:creationId xmlns:a16="http://schemas.microsoft.com/office/drawing/2014/main" id="{5DCDAFA4-B53D-48D7-8C18-6E846708F871}"/>
               </a:ext>
             </a:extLst>
           </p:cNvPr>
@@ -3391,7 +3391,7 @@
           <p:cNvPr id="19" name="">
             <a:extLst xmlns:a="http://schemas.openxmlformats.org/drawingml/2006/main">
               <a:ext uri="{FF2B5EF4-FFF2-40B4-BE49-F238E27FC236}">
-                <a16:creationId xmlns:a16="http://schemas.microsoft.com/office/drawing/2014/main" id="{DC0ECA14-B2AB-42D4-BA41-3C7F8BC9E636}"/>
+                <a16:creationId xmlns:a16="http://schemas.microsoft.com/office/drawing/2014/main" id="{6F27CD63-8BE0-470A-A73F-DDF25B98DC60}"/>
               </a:ext>
             </a:extLst>
           </p:cNvPr>
@@ -3426,7 +3426,7 @@
           <p:cNvPr id="20" name="">
             <a:extLst xmlns:a="http://schemas.openxmlformats.org/drawingml/2006/main">
               <a:ext uri="{FF2B5EF4-FFF2-40B4-BE49-F238E27FC236}">
-                <a16:creationId xmlns:a16="http://schemas.microsoft.com/office/drawing/2014/main" id="{5A27D3C4-CBC8-4696-9358-D7ACD74218CB}"/>
+                <a16:creationId xmlns:a16="http://schemas.microsoft.com/office/drawing/2014/main" id="{8B786784-B8C3-49DB-B89E-9E1861D46402}"/>
               </a:ext>
             </a:extLst>
           </p:cNvPr>
@@ -3482,7 +3482,7 @@
           <p:cNvPr id="21" name="">
             <a:extLst xmlns:a="http://schemas.openxmlformats.org/drawingml/2006/main">
               <a:ext uri="{FF2B5EF4-FFF2-40B4-BE49-F238E27FC236}">
-                <a16:creationId xmlns:a16="http://schemas.microsoft.com/office/drawing/2014/main" id="{DCF24D30-0F24-47DA-AD6A-9B8769BDE037}"/>
+                <a16:creationId xmlns:a16="http://schemas.microsoft.com/office/drawing/2014/main" id="{4940AF95-1895-4415-A279-57D0E5C97828}"/>
               </a:ext>
             </a:extLst>
           </p:cNvPr>
@@ -3536,7 +3536,7 @@
     </p:spTree>
     <p:extLst>
       <p:ext uri="{BB962C8B-B14F-4D97-AF65-F5344CB8AC3E}">
-        <p14:creationId xmlns:p14="http://schemas.microsoft.com/office/powerpoint/2010/main" val="847638990"/>
+        <p14:creationId xmlns:p14="http://schemas.microsoft.com/office/powerpoint/2010/main" val="427906205"/>
       </p:ext>
     </p:extLst>
   </p:cSld>
@@ -3567,7 +3567,7 @@
           <p:cNvPr id="1" name="">
             <a:extLst xmlns:a="http://schemas.openxmlformats.org/drawingml/2006/main">
               <a:ext uri="{FF2B5EF4-FFF2-40B4-BE49-F238E27FC236}">
-                <a16:creationId xmlns:a16="http://schemas.microsoft.com/office/drawing/2014/main" id="{79CEBD69-93F0-4E54-BF28-316BDDB82044}"/>
+                <a16:creationId xmlns:a16="http://schemas.microsoft.com/office/drawing/2014/main" id="{69A64949-84B3-422D-89B1-86096419D309}"/>
               </a:ext>
             </a:extLst>
           </p:cNvPr>
@@ -3600,7 +3600,7 @@
           <p:cNvPr id="2" name="">
             <a:extLst xmlns:a="http://schemas.openxmlformats.org/drawingml/2006/main">
               <a:ext uri="{FF2B5EF4-FFF2-40B4-BE49-F238E27FC236}">
-                <a16:creationId xmlns:a16="http://schemas.microsoft.com/office/drawing/2014/main" id="{46E99AF0-E01B-4514-A4A1-FF3A8BDBE4DD}"/>
+                <a16:creationId xmlns:a16="http://schemas.microsoft.com/office/drawing/2014/main" id="{80F2E4F1-95B1-4FE0-9C83-28EDAB6DCF5A}"/>
               </a:ext>
             </a:extLst>
           </p:cNvPr>
@@ -3633,7 +3633,7 @@
           <p:cNvPr id="3" name="">
             <a:extLst xmlns:a="http://schemas.openxmlformats.org/drawingml/2006/main">
               <a:ext uri="{FF2B5EF4-FFF2-40B4-BE49-F238E27FC236}">
-                <a16:creationId xmlns:a16="http://schemas.microsoft.com/office/drawing/2014/main" id="{3A90FB37-1917-4347-A14B-18B9AE955AE1}"/>
+                <a16:creationId xmlns:a16="http://schemas.microsoft.com/office/drawing/2014/main" id="{6DE521D8-56F0-491A-B6C4-3FD7A1391BEE}"/>
               </a:ext>
             </a:extLst>
           </p:cNvPr>
@@ -3689,7 +3689,7 @@
           <p:cNvPr id="4" name="">
             <a:extLst xmlns:a="http://schemas.openxmlformats.org/drawingml/2006/main">
               <a:ext uri="{FF2B5EF4-FFF2-40B4-BE49-F238E27FC236}">
-                <a16:creationId xmlns:a16="http://schemas.microsoft.com/office/drawing/2014/main" id="{37C0A1DD-77CA-4362-9F00-83E827B24944}"/>
+                <a16:creationId xmlns:a16="http://schemas.microsoft.com/office/drawing/2014/main" id="{99C8329C-A13C-48F7-8978-C495BAF52EF2}"/>
               </a:ext>
             </a:extLst>
           </p:cNvPr>
@@ -3745,7 +3745,7 @@
           <p:cNvPr id="5" name="">
             <a:extLst xmlns:a="http://schemas.openxmlformats.org/drawingml/2006/main">
               <a:ext uri="{FF2B5EF4-FFF2-40B4-BE49-F238E27FC236}">
-                <a16:creationId xmlns:a16="http://schemas.microsoft.com/office/drawing/2014/main" id="{B1EC8F94-6059-4921-B4E9-66D3CED0CC69}"/>
+                <a16:creationId xmlns:a16="http://schemas.microsoft.com/office/drawing/2014/main" id="{DF46DDF5-8691-479C-870A-F35DBE5DA98F}"/>
               </a:ext>
             </a:extLst>
           </p:cNvPr>
@@ -3780,7 +3780,7 @@
           <p:nvPr/>
         </p:nvPicPr>
         <p:blipFill>
-          <a:blip xmlns:r="http://schemas.openxmlformats.org/officeDocument/2006/relationships" xmlns:a="http://schemas.openxmlformats.org/drawingml/2006/main" r:embed="Rf3f9c49903314016"/>
+          <a:blip xmlns:r="http://schemas.openxmlformats.org/officeDocument/2006/relationships" xmlns:a="http://schemas.openxmlformats.org/drawingml/2006/main" r:embed="R5091c8e3a95f4245"/>
           <a:stretch xmlns:a="http://schemas.openxmlformats.org/drawingml/2006/main"/>
         </p:blipFill>
         <p:spPr>
@@ -3798,7 +3798,7 @@
           <p:cNvPr id="7" name="">
             <a:extLst xmlns:a="http://schemas.openxmlformats.org/drawingml/2006/main">
               <a:ext uri="{FF2B5EF4-FFF2-40B4-BE49-F238E27FC236}">
-                <a16:creationId xmlns:a16="http://schemas.microsoft.com/office/drawing/2014/main" id="{899BAC03-F752-4FC5-8715-D32FB758FE77}"/>
+                <a16:creationId xmlns:a16="http://schemas.microsoft.com/office/drawing/2014/main" id="{B33A90A8-0037-4A65-807D-5308922BBC04}"/>
               </a:ext>
             </a:extLst>
           </p:cNvPr>
@@ -3833,7 +3833,7 @@
           <p:cNvPr id="8" name="">
             <a:extLst xmlns:a="http://schemas.openxmlformats.org/drawingml/2006/main">
               <a:ext uri="{FF2B5EF4-FFF2-40B4-BE49-F238E27FC236}">
-                <a16:creationId xmlns:a16="http://schemas.microsoft.com/office/drawing/2014/main" id="{53A85E8D-5BCD-41EF-A008-B9F5E5BE6DC7}"/>
+                <a16:creationId xmlns:a16="http://schemas.microsoft.com/office/drawing/2014/main" id="{249F1161-DC9D-4C60-8EC6-08D501C5429B}"/>
               </a:ext>
             </a:extLst>
           </p:cNvPr>
@@ -3889,7 +3889,7 @@
           <p:cNvPr id="9" name="">
             <a:extLst xmlns:a="http://schemas.openxmlformats.org/drawingml/2006/main">
               <a:ext uri="{FF2B5EF4-FFF2-40B4-BE49-F238E27FC236}">
-                <a16:creationId xmlns:a16="http://schemas.microsoft.com/office/drawing/2014/main" id="{97FECF9B-AC5D-4C6A-9A48-FB6CE1E56E69}"/>
+                <a16:creationId xmlns:a16="http://schemas.microsoft.com/office/drawing/2014/main" id="{552F8E19-0231-4E1E-9BF7-81B7394BAB60}"/>
               </a:ext>
             </a:extLst>
           </p:cNvPr>
@@ -3945,7 +3945,7 @@
           <p:cNvPr id="10" name="">
             <a:extLst xmlns:a="http://schemas.openxmlformats.org/drawingml/2006/main">
               <a:ext uri="{FF2B5EF4-FFF2-40B4-BE49-F238E27FC236}">
-                <a16:creationId xmlns:a16="http://schemas.microsoft.com/office/drawing/2014/main" id="{F6AF3688-8CB9-4925-AA85-2A086F27C2AF}"/>
+                <a16:creationId xmlns:a16="http://schemas.microsoft.com/office/drawing/2014/main" id="{0120DDFE-7F58-4023-AB6D-0E0B7A6E4A29}"/>
               </a:ext>
             </a:extLst>
           </p:cNvPr>
@@ -3980,7 +3980,7 @@
           <p:cNvPr id="11" name="">
             <a:extLst xmlns:a="http://schemas.openxmlformats.org/drawingml/2006/main">
               <a:ext uri="{FF2B5EF4-FFF2-40B4-BE49-F238E27FC236}">
-                <a16:creationId xmlns:a16="http://schemas.microsoft.com/office/drawing/2014/main" id="{2650757E-A528-40D2-BB52-E4FC4D433B70}"/>
+                <a16:creationId xmlns:a16="http://schemas.microsoft.com/office/drawing/2014/main" id="{C3BA7916-258A-4936-AD03-805BCFE3529A}"/>
               </a:ext>
             </a:extLst>
           </p:cNvPr>
@@ -4036,7 +4036,7 @@
           <p:cNvPr id="12" name="">
             <a:extLst xmlns:a="http://schemas.openxmlformats.org/drawingml/2006/main">
               <a:ext uri="{FF2B5EF4-FFF2-40B4-BE49-F238E27FC236}">
-                <a16:creationId xmlns:a16="http://schemas.microsoft.com/office/drawing/2014/main" id="{E2D3DE21-79D9-4E0A-9047-8F8A4F718F12}"/>
+                <a16:creationId xmlns:a16="http://schemas.microsoft.com/office/drawing/2014/main" id="{80C4EBBC-14E6-43A3-A67B-D91E0BC2B1BE}"/>
               </a:ext>
             </a:extLst>
           </p:cNvPr>
@@ -4092,7 +4092,7 @@
           <p:cNvPr id="13" name="">
             <a:extLst xmlns:a="http://schemas.openxmlformats.org/drawingml/2006/main">
               <a:ext uri="{FF2B5EF4-FFF2-40B4-BE49-F238E27FC236}">
-                <a16:creationId xmlns:a16="http://schemas.microsoft.com/office/drawing/2014/main" id="{3E92E211-2025-410B-A458-CE950BACE6F3}"/>
+                <a16:creationId xmlns:a16="http://schemas.microsoft.com/office/drawing/2014/main" id="{022E46A5-B66D-4B4D-AA15-DC86EE595157}"/>
               </a:ext>
             </a:extLst>
           </p:cNvPr>
@@ -4127,7 +4127,7 @@
           <p:cNvPr id="14" name="">
             <a:extLst xmlns:a="http://schemas.openxmlformats.org/drawingml/2006/main">
               <a:ext uri="{FF2B5EF4-FFF2-40B4-BE49-F238E27FC236}">
-                <a16:creationId xmlns:a16="http://schemas.microsoft.com/office/drawing/2014/main" id="{968648CF-CFCC-4BB1-9208-9CD43CECDFD1}"/>
+                <a16:creationId xmlns:a16="http://schemas.microsoft.com/office/drawing/2014/main" id="{7715B15F-C137-4B92-BAD3-F2C815B87269}"/>
               </a:ext>
             </a:extLst>
           </p:cNvPr>
@@ -4183,7 +4183,7 @@
           <p:cNvPr id="15" name="">
             <a:extLst xmlns:a="http://schemas.openxmlformats.org/drawingml/2006/main">
               <a:ext uri="{FF2B5EF4-FFF2-40B4-BE49-F238E27FC236}">
-                <a16:creationId xmlns:a16="http://schemas.microsoft.com/office/drawing/2014/main" id="{5920017A-A98E-4B1A-B52F-5B1E44F87BEC}"/>
+                <a16:creationId xmlns:a16="http://schemas.microsoft.com/office/drawing/2014/main" id="{C9D2906A-41D0-4812-A87B-671C8E1AA31C}"/>
               </a:ext>
             </a:extLst>
           </p:cNvPr>
@@ -4239,7 +4239,7 @@
           <p:cNvPr id="16" name="">
             <a:extLst xmlns:a="http://schemas.openxmlformats.org/drawingml/2006/main">
               <a:ext uri="{FF2B5EF4-FFF2-40B4-BE49-F238E27FC236}">
-                <a16:creationId xmlns:a16="http://schemas.microsoft.com/office/drawing/2014/main" id="{4659526F-CB89-4B43-A83D-1E99DDEAEC88}"/>
+                <a16:creationId xmlns:a16="http://schemas.microsoft.com/office/drawing/2014/main" id="{75912A6C-8D59-4E0E-9F6C-08CCA8858252}"/>
               </a:ext>
             </a:extLst>
           </p:cNvPr>
@@ -4274,7 +4274,7 @@
           <p:cNvPr id="17" name="">
             <a:extLst xmlns:a="http://schemas.openxmlformats.org/drawingml/2006/main">
               <a:ext uri="{FF2B5EF4-FFF2-40B4-BE49-F238E27FC236}">
-                <a16:creationId xmlns:a16="http://schemas.microsoft.com/office/drawing/2014/main" id="{7F19D942-9CB7-49E8-934C-2A2C0686AD69}"/>
+                <a16:creationId xmlns:a16="http://schemas.microsoft.com/office/drawing/2014/main" id="{ACF5D4E2-6CFE-4C82-BFD3-277AE447381C}"/>
               </a:ext>
             </a:extLst>
           </p:cNvPr>
@@ -4330,7 +4330,7 @@
           <p:cNvPr id="18" name="">
             <a:extLst xmlns:a="http://schemas.openxmlformats.org/drawingml/2006/main">
               <a:ext uri="{FF2B5EF4-FFF2-40B4-BE49-F238E27FC236}">
-                <a16:creationId xmlns:a16="http://schemas.microsoft.com/office/drawing/2014/main" id="{58CC7267-0CE7-496A-998C-870BEB2E84E9}"/>
+                <a16:creationId xmlns:a16="http://schemas.microsoft.com/office/drawing/2014/main" id="{E5FE898B-6ADF-4B7F-93E5-527F911D3E8E}"/>
               </a:ext>
             </a:extLst>
           </p:cNvPr>
@@ -4386,7 +4386,7 @@
           <p:cNvPr id="19" name="">
             <a:extLst xmlns:a="http://schemas.openxmlformats.org/drawingml/2006/main">
               <a:ext uri="{FF2B5EF4-FFF2-40B4-BE49-F238E27FC236}">
-                <a16:creationId xmlns:a16="http://schemas.microsoft.com/office/drawing/2014/main" id="{0A990668-DF53-4B67-8E6D-B84E333C4383}"/>
+                <a16:creationId xmlns:a16="http://schemas.microsoft.com/office/drawing/2014/main" id="{C46E38D5-C8ED-4EB1-863E-6B84C1E3315F}"/>
               </a:ext>
             </a:extLst>
           </p:cNvPr>
@@ -4421,7 +4421,7 @@
           <p:cNvPr id="20" name="">
             <a:extLst xmlns:a="http://schemas.openxmlformats.org/drawingml/2006/main">
               <a:ext uri="{FF2B5EF4-FFF2-40B4-BE49-F238E27FC236}">
-                <a16:creationId xmlns:a16="http://schemas.microsoft.com/office/drawing/2014/main" id="{6EA27458-D6A7-4D42-90C6-AE17AC2B6EF2}"/>
+                <a16:creationId xmlns:a16="http://schemas.microsoft.com/office/drawing/2014/main" id="{FD06211E-3F28-423F-8D30-F05C5C387B21}"/>
               </a:ext>
             </a:extLst>
           </p:cNvPr>
@@ -4477,7 +4477,7 @@
           <p:cNvPr id="21" name="">
             <a:extLst xmlns:a="http://schemas.openxmlformats.org/drawingml/2006/main">
               <a:ext uri="{FF2B5EF4-FFF2-40B4-BE49-F238E27FC236}">
-                <a16:creationId xmlns:a16="http://schemas.microsoft.com/office/drawing/2014/main" id="{1084FDCE-79A6-4F8C-BD5B-FFFE37C6B7B3}"/>
+                <a16:creationId xmlns:a16="http://schemas.microsoft.com/office/drawing/2014/main" id="{D6EF0AD4-472A-492E-894A-EEDABB953371}"/>
               </a:ext>
             </a:extLst>
           </p:cNvPr>
@@ -4533,7 +4533,7 @@
           <p:cNvPr id="22" name="">
             <a:extLst xmlns:a="http://schemas.openxmlformats.org/drawingml/2006/main">
               <a:ext uri="{FF2B5EF4-FFF2-40B4-BE49-F238E27FC236}">
-                <a16:creationId xmlns:a16="http://schemas.microsoft.com/office/drawing/2014/main" id="{F46DDE8C-C869-41E4-BE34-89137F51B98D}"/>
+                <a16:creationId xmlns:a16="http://schemas.microsoft.com/office/drawing/2014/main" id="{29A5A0DA-D0A0-4294-9038-D8E52B9AB252}"/>
               </a:ext>
             </a:extLst>
           </p:cNvPr>
@@ -4568,7 +4568,7 @@
           <p:cNvPr id="23" name="">
             <a:extLst xmlns:a="http://schemas.openxmlformats.org/drawingml/2006/main">
               <a:ext uri="{FF2B5EF4-FFF2-40B4-BE49-F238E27FC236}">
-                <a16:creationId xmlns:a16="http://schemas.microsoft.com/office/drawing/2014/main" id="{EAA18C6A-07B9-4C84-86D1-75ED6025C3C6}"/>
+                <a16:creationId xmlns:a16="http://schemas.microsoft.com/office/drawing/2014/main" id="{9DD1ED7D-8EE2-49E1-924A-4D8A18C8E142}"/>
               </a:ext>
             </a:extLst>
           </p:cNvPr>
@@ -4624,7 +4624,7 @@
           <p:cNvPr id="24" name="">
             <a:extLst xmlns:a="http://schemas.openxmlformats.org/drawingml/2006/main">
               <a:ext uri="{FF2B5EF4-FFF2-40B4-BE49-F238E27FC236}">
-                <a16:creationId xmlns:a16="http://schemas.microsoft.com/office/drawing/2014/main" id="{F77B82E7-0E53-4A3C-A56B-24D40983360B}"/>
+                <a16:creationId xmlns:a16="http://schemas.microsoft.com/office/drawing/2014/main" id="{3B3C4D2A-B8FC-4F49-BCF8-0A05F93CAA37}"/>
               </a:ext>
             </a:extLst>
           </p:cNvPr>
@@ -4678,7 +4678,7 @@
     </p:spTree>
     <p:extLst>
       <p:ext uri="{BB962C8B-B14F-4D97-AF65-F5344CB8AC3E}">
-        <p14:creationId xmlns:p14="http://schemas.microsoft.com/office/powerpoint/2010/main" val="1567631893"/>
+        <p14:creationId xmlns:p14="http://schemas.microsoft.com/office/powerpoint/2010/main" val="1432537188"/>
       </p:ext>
     </p:extLst>
   </p:cSld>
@@ -4709,7 +4709,7 @@
           <p:cNvPr id="1" name="">
             <a:extLst xmlns:a="http://schemas.openxmlformats.org/drawingml/2006/main">
               <a:ext uri="{FF2B5EF4-FFF2-40B4-BE49-F238E27FC236}">
-                <a16:creationId xmlns:a16="http://schemas.microsoft.com/office/drawing/2014/main" id="{4D709C2C-C066-430A-9EBB-D140F9C45B16}"/>
+                <a16:creationId xmlns:a16="http://schemas.microsoft.com/office/drawing/2014/main" id="{53BE8FAD-12DA-41B9-BF05-6424AB455374}"/>
               </a:ext>
             </a:extLst>
           </p:cNvPr>
@@ -4742,7 +4742,7 @@
           <p:cNvPr id="2" name="">
             <a:extLst xmlns:a="http://schemas.openxmlformats.org/drawingml/2006/main">
               <a:ext uri="{FF2B5EF4-FFF2-40B4-BE49-F238E27FC236}">
-                <a16:creationId xmlns:a16="http://schemas.microsoft.com/office/drawing/2014/main" id="{92FAA04B-05BA-484D-BADD-0586B8AA03BE}"/>
+                <a16:creationId xmlns:a16="http://schemas.microsoft.com/office/drawing/2014/main" id="{D38AD9D7-93FB-4E16-AC15-C0EFEB2D32D6}"/>
               </a:ext>
             </a:extLst>
           </p:cNvPr>
@@ -4775,7 +4775,7 @@
           <p:cNvPr id="3" name="">
             <a:extLst xmlns:a="http://schemas.openxmlformats.org/drawingml/2006/main">
               <a:ext uri="{FF2B5EF4-FFF2-40B4-BE49-F238E27FC236}">
-                <a16:creationId xmlns:a16="http://schemas.microsoft.com/office/drawing/2014/main" id="{7C0D1DC7-9F81-4DA4-B221-FA3AF3080ED1}"/>
+                <a16:creationId xmlns:a16="http://schemas.microsoft.com/office/drawing/2014/main" id="{FEBC9ABE-3EAE-4272-8781-53475BD52B1D}"/>
               </a:ext>
             </a:extLst>
           </p:cNvPr>
@@ -4831,7 +4831,7 @@
           <p:cNvPr id="4" name="">
             <a:extLst xmlns:a="http://schemas.openxmlformats.org/drawingml/2006/main">
               <a:ext uri="{FF2B5EF4-FFF2-40B4-BE49-F238E27FC236}">
-                <a16:creationId xmlns:a16="http://schemas.microsoft.com/office/drawing/2014/main" id="{BBDFC60A-8D2A-4C7C-9E4C-7FB5BA50189A}"/>
+                <a16:creationId xmlns:a16="http://schemas.microsoft.com/office/drawing/2014/main" id="{942ADD0C-5893-4F82-853E-23F83F89EDFC}"/>
               </a:ext>
             </a:extLst>
           </p:cNvPr>
@@ -4887,7 +4887,7 @@
           <p:cNvPr id="5" name="">
             <a:extLst xmlns:a="http://schemas.openxmlformats.org/drawingml/2006/main">
               <a:ext uri="{FF2B5EF4-FFF2-40B4-BE49-F238E27FC236}">
-                <a16:creationId xmlns:a16="http://schemas.microsoft.com/office/drawing/2014/main" id="{AF054713-0158-48E2-8BCB-7C66E31702B6}"/>
+                <a16:creationId xmlns:a16="http://schemas.microsoft.com/office/drawing/2014/main" id="{A50CBF00-6F3A-460C-A5C4-07723F4D4968}"/>
               </a:ext>
             </a:extLst>
           </p:cNvPr>
@@ -4922,7 +4922,7 @@
           <p:nvPr/>
         </p:nvPicPr>
         <p:blipFill>
-          <a:blip xmlns:r="http://schemas.openxmlformats.org/officeDocument/2006/relationships" xmlns:a="http://schemas.openxmlformats.org/drawingml/2006/main" r:embed="R9e43e3f8bedc4117"/>
+          <a:blip xmlns:r="http://schemas.openxmlformats.org/officeDocument/2006/relationships" xmlns:a="http://schemas.openxmlformats.org/drawingml/2006/main" r:embed="R55586c55d88a4cfe"/>
           <a:stretch xmlns:a="http://schemas.openxmlformats.org/drawingml/2006/main"/>
         </p:blipFill>
         <p:spPr>
@@ -4940,7 +4940,7 @@
           <p:cNvPr id="7" name="">
             <a:extLst xmlns:a="http://schemas.openxmlformats.org/drawingml/2006/main">
               <a:ext uri="{FF2B5EF4-FFF2-40B4-BE49-F238E27FC236}">
-                <a16:creationId xmlns:a16="http://schemas.microsoft.com/office/drawing/2014/main" id="{377A17A7-B30D-436A-8584-3F024391D597}"/>
+                <a16:creationId xmlns:a16="http://schemas.microsoft.com/office/drawing/2014/main" id="{812F5E76-DA12-4A40-9B2E-675A4570A5A8}"/>
               </a:ext>
             </a:extLst>
           </p:cNvPr>
@@ -4975,7 +4975,7 @@
           <p:cNvPr id="8" name="">
             <a:extLst xmlns:a="http://schemas.openxmlformats.org/drawingml/2006/main">
               <a:ext uri="{FF2B5EF4-FFF2-40B4-BE49-F238E27FC236}">
-                <a16:creationId xmlns:a16="http://schemas.microsoft.com/office/drawing/2014/main" id="{79BF7E25-2D8C-4C16-82A3-D3F6D8C2FE3C}"/>
+                <a16:creationId xmlns:a16="http://schemas.microsoft.com/office/drawing/2014/main" id="{BE9E0F4B-3024-4C6D-B390-8C8D90686804}"/>
               </a:ext>
             </a:extLst>
           </p:cNvPr>
@@ -5031,7 +5031,7 @@
           <p:cNvPr id="9" name="">
             <a:extLst xmlns:a="http://schemas.openxmlformats.org/drawingml/2006/main">
               <a:ext uri="{FF2B5EF4-FFF2-40B4-BE49-F238E27FC236}">
-                <a16:creationId xmlns:a16="http://schemas.microsoft.com/office/drawing/2014/main" id="{B1F4931B-16B1-40FB-B283-88CBF9FB9310}"/>
+                <a16:creationId xmlns:a16="http://schemas.microsoft.com/office/drawing/2014/main" id="{801866A4-9AD9-41A8-8C35-F3859F267EC4}"/>
               </a:ext>
             </a:extLst>
           </p:cNvPr>
@@ -5087,7 +5087,7 @@
           <p:cNvPr id="10" name="">
             <a:extLst xmlns:a="http://schemas.openxmlformats.org/drawingml/2006/main">
               <a:ext uri="{FF2B5EF4-FFF2-40B4-BE49-F238E27FC236}">
-                <a16:creationId xmlns:a16="http://schemas.microsoft.com/office/drawing/2014/main" id="{8073D6B0-E433-4626-9164-63721A382FB2}"/>
+                <a16:creationId xmlns:a16="http://schemas.microsoft.com/office/drawing/2014/main" id="{365BC44D-DB27-4C81-818A-5E034B42D023}"/>
               </a:ext>
             </a:extLst>
           </p:cNvPr>
@@ -5122,7 +5122,7 @@
           <p:cNvPr id="11" name="">
             <a:extLst xmlns:a="http://schemas.openxmlformats.org/drawingml/2006/main">
               <a:ext uri="{FF2B5EF4-FFF2-40B4-BE49-F238E27FC236}">
-                <a16:creationId xmlns:a16="http://schemas.microsoft.com/office/drawing/2014/main" id="{FC091A26-3882-460A-8362-448D7D140D82}"/>
+                <a16:creationId xmlns:a16="http://schemas.microsoft.com/office/drawing/2014/main" id="{3EC30A62-9EE3-493C-9F56-06C672CF14B6}"/>
               </a:ext>
             </a:extLst>
           </p:cNvPr>
@@ -5178,7 +5178,7 @@
           <p:cNvPr id="12" name="">
             <a:extLst xmlns:a="http://schemas.openxmlformats.org/drawingml/2006/main">
               <a:ext uri="{FF2B5EF4-FFF2-40B4-BE49-F238E27FC236}">
-                <a16:creationId xmlns:a16="http://schemas.microsoft.com/office/drawing/2014/main" id="{AAD37034-1912-4EDA-BEF7-4B487E818FD0}"/>
+                <a16:creationId xmlns:a16="http://schemas.microsoft.com/office/drawing/2014/main" id="{4ABA31C1-2450-4E7A-88F9-76CFB5C71E6E}"/>
               </a:ext>
             </a:extLst>
           </p:cNvPr>
@@ -5234,7 +5234,7 @@
           <p:cNvPr id="13" name="">
             <a:extLst xmlns:a="http://schemas.openxmlformats.org/drawingml/2006/main">
               <a:ext uri="{FF2B5EF4-FFF2-40B4-BE49-F238E27FC236}">
-                <a16:creationId xmlns:a16="http://schemas.microsoft.com/office/drawing/2014/main" id="{565587D8-A350-4336-8357-343BF2E3A024}"/>
+                <a16:creationId xmlns:a16="http://schemas.microsoft.com/office/drawing/2014/main" id="{CC35AF37-474E-4EBF-8363-A309634D0810}"/>
               </a:ext>
             </a:extLst>
           </p:cNvPr>
@@ -5269,7 +5269,7 @@
           <p:cNvPr id="14" name="">
             <a:extLst xmlns:a="http://schemas.openxmlformats.org/drawingml/2006/main">
               <a:ext uri="{FF2B5EF4-FFF2-40B4-BE49-F238E27FC236}">
-                <a16:creationId xmlns:a16="http://schemas.microsoft.com/office/drawing/2014/main" id="{3E6296B4-EAFE-4564-880C-8120BB3089D3}"/>
+                <a16:creationId xmlns:a16="http://schemas.microsoft.com/office/drawing/2014/main" id="{9B641349-9CAE-4219-9592-2643468E0127}"/>
               </a:ext>
             </a:extLst>
           </p:cNvPr>
@@ -5325,7 +5325,7 @@
           <p:cNvPr id="15" name="">
             <a:extLst xmlns:a="http://schemas.openxmlformats.org/drawingml/2006/main">
               <a:ext uri="{FF2B5EF4-FFF2-40B4-BE49-F238E27FC236}">
-                <a16:creationId xmlns:a16="http://schemas.microsoft.com/office/drawing/2014/main" id="{9B92501F-E78A-4484-B96C-5619236D8142}"/>
+                <a16:creationId xmlns:a16="http://schemas.microsoft.com/office/drawing/2014/main" id="{E34DDD1C-D67D-4D9F-A3BC-1D4856D48759}"/>
               </a:ext>
             </a:extLst>
           </p:cNvPr>
@@ -5381,7 +5381,7 @@
           <p:cNvPr id="16" name="">
             <a:extLst xmlns:a="http://schemas.openxmlformats.org/drawingml/2006/main">
               <a:ext uri="{FF2B5EF4-FFF2-40B4-BE49-F238E27FC236}">
-                <a16:creationId xmlns:a16="http://schemas.microsoft.com/office/drawing/2014/main" id="{EBD3FA94-0FE3-4AD3-8E27-DA8584BD3B25}"/>
+                <a16:creationId xmlns:a16="http://schemas.microsoft.com/office/drawing/2014/main" id="{54E1958F-57E5-489C-A4B1-F37CE6EA1770}"/>
               </a:ext>
             </a:extLst>
           </p:cNvPr>
@@ -5416,7 +5416,7 @@
           <p:cNvPr id="17" name="">
             <a:extLst xmlns:a="http://schemas.openxmlformats.org/drawingml/2006/main">
               <a:ext uri="{FF2B5EF4-FFF2-40B4-BE49-F238E27FC236}">
-                <a16:creationId xmlns:a16="http://schemas.microsoft.com/office/drawing/2014/main" id="{9611C5AD-AA30-4910-B430-B968037BDE12}"/>
+                <a16:creationId xmlns:a16="http://schemas.microsoft.com/office/drawing/2014/main" id="{1E93A22F-BAC9-45DE-B444-2C40CA3BF9CF}"/>
               </a:ext>
             </a:extLst>
           </p:cNvPr>
@@ -5472,7 +5472,7 @@
           <p:cNvPr id="18" name="">
             <a:extLst xmlns:a="http://schemas.openxmlformats.org/drawingml/2006/main">
               <a:ext uri="{FF2B5EF4-FFF2-40B4-BE49-F238E27FC236}">
-                <a16:creationId xmlns:a16="http://schemas.microsoft.com/office/drawing/2014/main" id="{A361928B-0E97-47FB-995D-9F776D2941D4}"/>
+                <a16:creationId xmlns:a16="http://schemas.microsoft.com/office/drawing/2014/main" id="{7A5CA61D-0326-40B1-9C88-E45202C329D1}"/>
               </a:ext>
             </a:extLst>
           </p:cNvPr>
@@ -5528,7 +5528,7 @@
           <p:cNvPr id="19" name="">
             <a:extLst xmlns:a="http://schemas.openxmlformats.org/drawingml/2006/main">
               <a:ext uri="{FF2B5EF4-FFF2-40B4-BE49-F238E27FC236}">
-                <a16:creationId xmlns:a16="http://schemas.microsoft.com/office/drawing/2014/main" id="{FAA4EC08-6E8C-4D0E-8F03-0B3B390E004F}"/>
+                <a16:creationId xmlns:a16="http://schemas.microsoft.com/office/drawing/2014/main" id="{02F66A4D-A2FD-47B4-AB5C-91FADE4CB8F3}"/>
               </a:ext>
             </a:extLst>
           </p:cNvPr>
@@ -5563,7 +5563,7 @@
           <p:cNvPr id="20" name="">
             <a:extLst xmlns:a="http://schemas.openxmlformats.org/drawingml/2006/main">
               <a:ext uri="{FF2B5EF4-FFF2-40B4-BE49-F238E27FC236}">
-                <a16:creationId xmlns:a16="http://schemas.microsoft.com/office/drawing/2014/main" id="{F588BB18-33EA-431F-8CC1-0B0968587844}"/>
+                <a16:creationId xmlns:a16="http://schemas.microsoft.com/office/drawing/2014/main" id="{FFFD9930-A4C6-44B4-B01B-69911504FF3F}"/>
               </a:ext>
             </a:extLst>
           </p:cNvPr>
@@ -5619,7 +5619,7 @@
           <p:cNvPr id="21" name="">
             <a:extLst xmlns:a="http://schemas.openxmlformats.org/drawingml/2006/main">
               <a:ext uri="{FF2B5EF4-FFF2-40B4-BE49-F238E27FC236}">
-                <a16:creationId xmlns:a16="http://schemas.microsoft.com/office/drawing/2014/main" id="{38D48214-2CE7-4D34-9EFE-6C2369F0B968}"/>
+                <a16:creationId xmlns:a16="http://schemas.microsoft.com/office/drawing/2014/main" id="{90C6DF7A-D77B-41E8-8330-8EBCA9CB9B2E}"/>
               </a:ext>
             </a:extLst>
           </p:cNvPr>
@@ -5675,7 +5675,7 @@
           <p:cNvPr id="22" name="">
             <a:extLst xmlns:a="http://schemas.openxmlformats.org/drawingml/2006/main">
               <a:ext uri="{FF2B5EF4-FFF2-40B4-BE49-F238E27FC236}">
-                <a16:creationId xmlns:a16="http://schemas.microsoft.com/office/drawing/2014/main" id="{B578FC0F-32FE-476E-A847-E724BD4E1D30}"/>
+                <a16:creationId xmlns:a16="http://schemas.microsoft.com/office/drawing/2014/main" id="{9B519F1B-32C4-4841-BF3B-E5C42828676B}"/>
               </a:ext>
             </a:extLst>
           </p:cNvPr>
@@ -5710,7 +5710,7 @@
           <p:cNvPr id="23" name="">
             <a:extLst xmlns:a="http://schemas.openxmlformats.org/drawingml/2006/main">
               <a:ext uri="{FF2B5EF4-FFF2-40B4-BE49-F238E27FC236}">
-                <a16:creationId xmlns:a16="http://schemas.microsoft.com/office/drawing/2014/main" id="{AA52ABEA-BCE4-4F13-9A70-D9F81A421880}"/>
+                <a16:creationId xmlns:a16="http://schemas.microsoft.com/office/drawing/2014/main" id="{6E9C5D6C-C30F-4209-B958-54786908A020}"/>
               </a:ext>
             </a:extLst>
           </p:cNvPr>
@@ -5766,7 +5766,7 @@
           <p:cNvPr id="24" name="">
             <a:extLst xmlns:a="http://schemas.openxmlformats.org/drawingml/2006/main">
               <a:ext uri="{FF2B5EF4-FFF2-40B4-BE49-F238E27FC236}">
-                <a16:creationId xmlns:a16="http://schemas.microsoft.com/office/drawing/2014/main" id="{2BAE0821-4554-411B-B3D5-B110CF3DAA4E}"/>
+                <a16:creationId xmlns:a16="http://schemas.microsoft.com/office/drawing/2014/main" id="{EE98F830-E41E-4CA4-A78F-A113F5B098E1}"/>
               </a:ext>
             </a:extLst>
           </p:cNvPr>
@@ -5822,7 +5822,7 @@
           <p:cNvPr id="25" name="">
             <a:extLst xmlns:a="http://schemas.openxmlformats.org/drawingml/2006/main">
               <a:ext uri="{FF2B5EF4-FFF2-40B4-BE49-F238E27FC236}">
-                <a16:creationId xmlns:a16="http://schemas.microsoft.com/office/drawing/2014/main" id="{489A7807-18F1-41F9-A734-198514CDC6B2}"/>
+                <a16:creationId xmlns:a16="http://schemas.microsoft.com/office/drawing/2014/main" id="{3C0EF0AB-306A-46DD-AF88-7980EAE9F059}"/>
               </a:ext>
             </a:extLst>
           </p:cNvPr>
@@ -5876,7 +5876,7 @@
     </p:spTree>
     <p:extLst>
       <p:ext uri="{BB962C8B-B14F-4D97-AF65-F5344CB8AC3E}">
-        <p14:creationId xmlns:p14="http://schemas.microsoft.com/office/powerpoint/2010/main" val="2077304359"/>
+        <p14:creationId xmlns:p14="http://schemas.microsoft.com/office/powerpoint/2010/main" val="1669225054"/>
       </p:ext>
     </p:extLst>
   </p:cSld>
@@ -5907,7 +5907,7 @@
           <p:cNvPr id="1" name="">
             <a:extLst xmlns:a="http://schemas.openxmlformats.org/drawingml/2006/main">
               <a:ext uri="{FF2B5EF4-FFF2-40B4-BE49-F238E27FC236}">
-                <a16:creationId xmlns:a16="http://schemas.microsoft.com/office/drawing/2014/main" id="{CCDEC776-FFBA-4CD1-8FF5-A1A52C27293C}"/>
+                <a16:creationId xmlns:a16="http://schemas.microsoft.com/office/drawing/2014/main" id="{72782305-AFE5-469B-B5C0-5641B6F8F49E}"/>
               </a:ext>
             </a:extLst>
           </p:cNvPr>
@@ -5940,7 +5940,7 @@
           <p:cNvPr id="2" name="">
             <a:extLst xmlns:a="http://schemas.openxmlformats.org/drawingml/2006/main">
               <a:ext uri="{FF2B5EF4-FFF2-40B4-BE49-F238E27FC236}">
-                <a16:creationId xmlns:a16="http://schemas.microsoft.com/office/drawing/2014/main" id="{BAD7B662-D576-452D-ABC4-9D292A2022E8}"/>
+                <a16:creationId xmlns:a16="http://schemas.microsoft.com/office/drawing/2014/main" id="{25384214-B16E-4ACD-94A4-E96D80540319}"/>
               </a:ext>
             </a:extLst>
           </p:cNvPr>
@@ -5973,7 +5973,7 @@
           <p:cNvPr id="3" name="">
             <a:extLst xmlns:a="http://schemas.openxmlformats.org/drawingml/2006/main">
               <a:ext uri="{FF2B5EF4-FFF2-40B4-BE49-F238E27FC236}">
-                <a16:creationId xmlns:a16="http://schemas.microsoft.com/office/drawing/2014/main" id="{2C37E796-B914-414A-92A5-AA0B5BA6A0AC}"/>
+                <a16:creationId xmlns:a16="http://schemas.microsoft.com/office/drawing/2014/main" id="{D2527A2B-6F2D-4894-A4BF-41D5381833AC}"/>
               </a:ext>
             </a:extLst>
           </p:cNvPr>
@@ -6029,7 +6029,7 @@
           <p:cNvPr id="4" name="">
             <a:extLst xmlns:a="http://schemas.openxmlformats.org/drawingml/2006/main">
               <a:ext uri="{FF2B5EF4-FFF2-40B4-BE49-F238E27FC236}">
-                <a16:creationId xmlns:a16="http://schemas.microsoft.com/office/drawing/2014/main" id="{0C98EDB2-28AD-43A9-8406-1BFB73D7E786}"/>
+                <a16:creationId xmlns:a16="http://schemas.microsoft.com/office/drawing/2014/main" id="{9960B679-69DA-41CB-BC18-736E4EE8AD09}"/>
               </a:ext>
             </a:extLst>
           </p:cNvPr>
@@ -6085,7 +6085,7 @@
           <p:cNvPr id="5" name="">
             <a:extLst xmlns:a="http://schemas.openxmlformats.org/drawingml/2006/main">
               <a:ext uri="{FF2B5EF4-FFF2-40B4-BE49-F238E27FC236}">
-                <a16:creationId xmlns:a16="http://schemas.microsoft.com/office/drawing/2014/main" id="{46F08D26-E8E7-4F95-B890-F5A1F221C382}"/>
+                <a16:creationId xmlns:a16="http://schemas.microsoft.com/office/drawing/2014/main" id="{1E993CD2-8F0E-4EB8-BE5D-E1502DF646D8}"/>
               </a:ext>
             </a:extLst>
           </p:cNvPr>
@@ -6120,7 +6120,7 @@
           <p:nvPr/>
         </p:nvPicPr>
         <p:blipFill>
-          <a:blip xmlns:r="http://schemas.openxmlformats.org/officeDocument/2006/relationships" xmlns:a="http://schemas.openxmlformats.org/drawingml/2006/main" r:embed="Rad93c4de84e64720"/>
+          <a:blip xmlns:r="http://schemas.openxmlformats.org/officeDocument/2006/relationships" xmlns:a="http://schemas.openxmlformats.org/drawingml/2006/main" r:embed="Rf190550643794206"/>
           <a:stretch xmlns:a="http://schemas.openxmlformats.org/drawingml/2006/main"/>
         </p:blipFill>
         <p:spPr>
@@ -6138,7 +6138,7 @@
           <p:cNvPr id="7" name="">
             <a:extLst xmlns:a="http://schemas.openxmlformats.org/drawingml/2006/main">
               <a:ext uri="{FF2B5EF4-FFF2-40B4-BE49-F238E27FC236}">
-                <a16:creationId xmlns:a16="http://schemas.microsoft.com/office/drawing/2014/main" id="{2460603B-542C-4885-94A1-B9824FDA1D59}"/>
+                <a16:creationId xmlns:a16="http://schemas.microsoft.com/office/drawing/2014/main" id="{4AE4148C-7AB2-47A7-8F30-BE1ABE328362}"/>
               </a:ext>
             </a:extLst>
           </p:cNvPr>
@@ -6171,7 +6171,7 @@
           <p:cNvPr id="8" name="">
             <a:extLst xmlns:a="http://schemas.openxmlformats.org/drawingml/2006/main">
               <a:ext uri="{FF2B5EF4-FFF2-40B4-BE49-F238E27FC236}">
-                <a16:creationId xmlns:a16="http://schemas.microsoft.com/office/drawing/2014/main" id="{7492B916-8F3A-4871-9368-B611DF549359}"/>
+                <a16:creationId xmlns:a16="http://schemas.microsoft.com/office/drawing/2014/main" id="{3225080A-4DF4-42E4-8688-B578AC440BB4}"/>
               </a:ext>
             </a:extLst>
           </p:cNvPr>
@@ -6227,7 +6227,7 @@
           <p:cNvPr id="9" name="">
             <a:extLst xmlns:a="http://schemas.openxmlformats.org/drawingml/2006/main">
               <a:ext uri="{FF2B5EF4-FFF2-40B4-BE49-F238E27FC236}">
-                <a16:creationId xmlns:a16="http://schemas.microsoft.com/office/drawing/2014/main" id="{B664C30B-65B7-4AFE-AD25-4F651D36025E}"/>
+                <a16:creationId xmlns:a16="http://schemas.microsoft.com/office/drawing/2014/main" id="{A6FDBF6B-B680-49FE-9F5B-44B1B5BE1343}"/>
               </a:ext>
             </a:extLst>
           </p:cNvPr>
@@ -6260,7 +6260,7 @@
           <p:cNvPr id="10" name="">
             <a:extLst xmlns:a="http://schemas.openxmlformats.org/drawingml/2006/main">
               <a:ext uri="{FF2B5EF4-FFF2-40B4-BE49-F238E27FC236}">
-                <a16:creationId xmlns:a16="http://schemas.microsoft.com/office/drawing/2014/main" id="{F572127A-10B1-4B4F-8890-3E6993583877}"/>
+                <a16:creationId xmlns:a16="http://schemas.microsoft.com/office/drawing/2014/main" id="{B51B92BB-8A17-45C6-ABD2-47BB5F2760E2}"/>
               </a:ext>
             </a:extLst>
           </p:cNvPr>
@@ -6316,7 +6316,7 @@
           <p:cNvPr id="11" name="">
             <a:extLst xmlns:a="http://schemas.openxmlformats.org/drawingml/2006/main">
               <a:ext uri="{FF2B5EF4-FFF2-40B4-BE49-F238E27FC236}">
-                <a16:creationId xmlns:a16="http://schemas.microsoft.com/office/drawing/2014/main" id="{2E9CF1BE-7A55-4B7D-BA52-59B2F89A87C7}"/>
+                <a16:creationId xmlns:a16="http://schemas.microsoft.com/office/drawing/2014/main" id="{D4E8B522-DB29-446A-8570-681C3D7223F2}"/>
               </a:ext>
             </a:extLst>
           </p:cNvPr>
@@ -6349,7 +6349,7 @@
           <p:cNvPr id="12" name="">
             <a:extLst xmlns:a="http://schemas.openxmlformats.org/drawingml/2006/main">
               <a:ext uri="{FF2B5EF4-FFF2-40B4-BE49-F238E27FC236}">
-                <a16:creationId xmlns:a16="http://schemas.microsoft.com/office/drawing/2014/main" id="{3C7CBC3C-1DD2-401D-BECB-942791127433}"/>
+                <a16:creationId xmlns:a16="http://schemas.microsoft.com/office/drawing/2014/main" id="{AF5D7127-E766-495D-8604-38965E95A56C}"/>
               </a:ext>
             </a:extLst>
           </p:cNvPr>
@@ -6405,7 +6405,7 @@
           <p:cNvPr id="13" name="">
             <a:extLst xmlns:a="http://schemas.openxmlformats.org/drawingml/2006/main">
               <a:ext uri="{FF2B5EF4-FFF2-40B4-BE49-F238E27FC236}">
-                <a16:creationId xmlns:a16="http://schemas.microsoft.com/office/drawing/2014/main" id="{F754F641-8FB3-4A40-85C2-0620D01587AC}"/>
+                <a16:creationId xmlns:a16="http://schemas.microsoft.com/office/drawing/2014/main" id="{CD8E4D1F-77A5-4862-A29B-3EEC06A17A93}"/>
               </a:ext>
             </a:extLst>
           </p:cNvPr>
@@ -6438,7 +6438,7 @@
           <p:cNvPr id="14" name="">
             <a:extLst xmlns:a="http://schemas.openxmlformats.org/drawingml/2006/main">
               <a:ext uri="{FF2B5EF4-FFF2-40B4-BE49-F238E27FC236}">
-                <a16:creationId xmlns:a16="http://schemas.microsoft.com/office/drawing/2014/main" id="{060EFB2F-96AD-4705-AADC-C4EEA18DEF73}"/>
+                <a16:creationId xmlns:a16="http://schemas.microsoft.com/office/drawing/2014/main" id="{16185846-2C56-40F9-849B-85240DD7D2D3}"/>
               </a:ext>
             </a:extLst>
           </p:cNvPr>
@@ -6492,7 +6492,7 @@
     </p:spTree>
     <p:extLst>
       <p:ext uri="{BB962C8B-B14F-4D97-AF65-F5344CB8AC3E}">
-        <p14:creationId xmlns:p14="http://schemas.microsoft.com/office/powerpoint/2010/main" val="1018678323"/>
+        <p14:creationId xmlns:p14="http://schemas.microsoft.com/office/powerpoint/2010/main" val="1223455485"/>
       </p:ext>
     </p:extLst>
   </p:cSld>
@@ -6523,7 +6523,7 @@
           <p:cNvPr id="1" name="">
             <a:extLst xmlns:a="http://schemas.openxmlformats.org/drawingml/2006/main">
               <a:ext uri="{FF2B5EF4-FFF2-40B4-BE49-F238E27FC236}">
-                <a16:creationId xmlns:a16="http://schemas.microsoft.com/office/drawing/2014/main" id="{3BFC05E3-4A47-4DFA-B2BF-2D5E2A16C709}"/>
+                <a16:creationId xmlns:a16="http://schemas.microsoft.com/office/drawing/2014/main" id="{B538F643-F8EB-49E3-B495-EE1E5279D9CE}"/>
               </a:ext>
             </a:extLst>
           </p:cNvPr>
@@ -6556,7 +6556,7 @@
           <p:cNvPr id="2" name="">
             <a:extLst xmlns:a="http://schemas.openxmlformats.org/drawingml/2006/main">
               <a:ext uri="{FF2B5EF4-FFF2-40B4-BE49-F238E27FC236}">
-                <a16:creationId xmlns:a16="http://schemas.microsoft.com/office/drawing/2014/main" id="{00488CDB-A6FC-474F-B1F0-4C5C2FB87BFA}"/>
+                <a16:creationId xmlns:a16="http://schemas.microsoft.com/office/drawing/2014/main" id="{C56946D1-80B7-43A3-A213-90F9A6BD4189}"/>
               </a:ext>
             </a:extLst>
           </p:cNvPr>
@@ -6589,7 +6589,7 @@
           <p:cNvPr id="3" name="">
             <a:extLst xmlns:a="http://schemas.openxmlformats.org/drawingml/2006/main">
               <a:ext uri="{FF2B5EF4-FFF2-40B4-BE49-F238E27FC236}">
-                <a16:creationId xmlns:a16="http://schemas.microsoft.com/office/drawing/2014/main" id="{38889DC9-4672-48B9-9113-8736DC0D2FC8}"/>
+                <a16:creationId xmlns:a16="http://schemas.microsoft.com/office/drawing/2014/main" id="{3B628CF9-7FFF-4F1F-A8B2-EFFAD7BF5C8F}"/>
               </a:ext>
             </a:extLst>
           </p:cNvPr>
@@ -6645,7 +6645,7 @@
           <p:cNvPr id="4" name="">
             <a:extLst xmlns:a="http://schemas.openxmlformats.org/drawingml/2006/main">
               <a:ext uri="{FF2B5EF4-FFF2-40B4-BE49-F238E27FC236}">
-                <a16:creationId xmlns:a16="http://schemas.microsoft.com/office/drawing/2014/main" id="{D11A0140-6421-4233-8FB7-53C198E69B08}"/>
+                <a16:creationId xmlns:a16="http://schemas.microsoft.com/office/drawing/2014/main" id="{1A7F0DC6-EC01-43FF-BFA3-29487E7DC680}"/>
               </a:ext>
             </a:extLst>
           </p:cNvPr>
@@ -6701,7 +6701,7 @@
           <p:cNvPr id="5" name="">
             <a:extLst xmlns:a="http://schemas.openxmlformats.org/drawingml/2006/main">
               <a:ext uri="{FF2B5EF4-FFF2-40B4-BE49-F238E27FC236}">
-                <a16:creationId xmlns:a16="http://schemas.microsoft.com/office/drawing/2014/main" id="{0AC70C7D-180C-443A-9AE2-0356F69C6DFD}"/>
+                <a16:creationId xmlns:a16="http://schemas.microsoft.com/office/drawing/2014/main" id="{D9380AE8-4DD6-4E81-A601-4C960BABB478}"/>
               </a:ext>
             </a:extLst>
           </p:cNvPr>
@@ -6736,7 +6736,7 @@
           <p:nvPr/>
         </p:nvPicPr>
         <p:blipFill>
-          <a:blip xmlns:r="http://schemas.openxmlformats.org/officeDocument/2006/relationships" xmlns:a="http://schemas.openxmlformats.org/drawingml/2006/main" r:embed="R7bf172a512434459"/>
+          <a:blip xmlns:r="http://schemas.openxmlformats.org/officeDocument/2006/relationships" xmlns:a="http://schemas.openxmlformats.org/drawingml/2006/main" r:embed="Rcef124828a454714"/>
           <a:stretch xmlns:a="http://schemas.openxmlformats.org/drawingml/2006/main"/>
         </p:blipFill>
         <p:spPr>
@@ -6754,7 +6754,7 @@
           <p:cNvPr id="7" name="">
             <a:extLst xmlns:a="http://schemas.openxmlformats.org/drawingml/2006/main">
               <a:ext uri="{FF2B5EF4-FFF2-40B4-BE49-F238E27FC236}">
-                <a16:creationId xmlns:a16="http://schemas.microsoft.com/office/drawing/2014/main" id="{D38D4294-1329-49E3-BBF7-B4EC3DBB5124}"/>
+                <a16:creationId xmlns:a16="http://schemas.microsoft.com/office/drawing/2014/main" id="{1D237912-DFF8-404D-B37E-8C4F7C0D654A}"/>
               </a:ext>
             </a:extLst>
           </p:cNvPr>
@@ -6787,7 +6787,7 @@
           <p:cNvPr id="8" name="">
             <a:extLst xmlns:a="http://schemas.openxmlformats.org/drawingml/2006/main">
               <a:ext uri="{FF2B5EF4-FFF2-40B4-BE49-F238E27FC236}">
-                <a16:creationId xmlns:a16="http://schemas.microsoft.com/office/drawing/2014/main" id="{1BFAAF39-3483-408A-A4B7-523A0FBA7F5C}"/>
+                <a16:creationId xmlns:a16="http://schemas.microsoft.com/office/drawing/2014/main" id="{BA3E0391-63C1-4BC9-856E-0D94F3A7AA02}"/>
               </a:ext>
             </a:extLst>
           </p:cNvPr>
@@ -6843,7 +6843,7 @@
           <p:cNvPr id="9" name="">
             <a:extLst xmlns:a="http://schemas.openxmlformats.org/drawingml/2006/main">
               <a:ext uri="{FF2B5EF4-FFF2-40B4-BE49-F238E27FC236}">
-                <a16:creationId xmlns:a16="http://schemas.microsoft.com/office/drawing/2014/main" id="{DA48DA20-930F-46E4-8B1F-424FCE4DEEAE}"/>
+                <a16:creationId xmlns:a16="http://schemas.microsoft.com/office/drawing/2014/main" id="{147345B1-CB80-44AE-8ECF-40770A7D7C44}"/>
               </a:ext>
             </a:extLst>
           </p:cNvPr>
@@ -6876,7 +6876,7 @@
           <p:cNvPr id="10" name="">
             <a:extLst xmlns:a="http://schemas.openxmlformats.org/drawingml/2006/main">
               <a:ext uri="{FF2B5EF4-FFF2-40B4-BE49-F238E27FC236}">
-                <a16:creationId xmlns:a16="http://schemas.microsoft.com/office/drawing/2014/main" id="{8D073B5E-3F06-40E7-AF37-66F857A3A84E}"/>
+                <a16:creationId xmlns:a16="http://schemas.microsoft.com/office/drawing/2014/main" id="{76D95874-BFD4-43A4-B2C7-C77B9E7FF380}"/>
               </a:ext>
             </a:extLst>
           </p:cNvPr>
@@ -6932,7 +6932,7 @@
           <p:cNvPr id="11" name="">
             <a:extLst xmlns:a="http://schemas.openxmlformats.org/drawingml/2006/main">
               <a:ext uri="{FF2B5EF4-FFF2-40B4-BE49-F238E27FC236}">
-                <a16:creationId xmlns:a16="http://schemas.microsoft.com/office/drawing/2014/main" id="{5CA89DED-F961-46B3-AF94-3C7E2B1003FF}"/>
+                <a16:creationId xmlns:a16="http://schemas.microsoft.com/office/drawing/2014/main" id="{D9429B51-E5B7-45A4-AD68-5D6D01885C91}"/>
               </a:ext>
             </a:extLst>
           </p:cNvPr>
@@ -6965,7 +6965,7 @@
           <p:cNvPr id="12" name="">
             <a:extLst xmlns:a="http://schemas.openxmlformats.org/drawingml/2006/main">
               <a:ext uri="{FF2B5EF4-FFF2-40B4-BE49-F238E27FC236}">
-                <a16:creationId xmlns:a16="http://schemas.microsoft.com/office/drawing/2014/main" id="{F8797ADE-B30D-416B-BDC4-F8DECDE36381}"/>
+                <a16:creationId xmlns:a16="http://schemas.microsoft.com/office/drawing/2014/main" id="{2849D648-36EE-4962-B8B8-BA2D73AD0781}"/>
               </a:ext>
             </a:extLst>
           </p:cNvPr>
@@ -7021,7 +7021,7 @@
           <p:cNvPr id="13" name="">
             <a:extLst xmlns:a="http://schemas.openxmlformats.org/drawingml/2006/main">
               <a:ext uri="{FF2B5EF4-FFF2-40B4-BE49-F238E27FC236}">
-                <a16:creationId xmlns:a16="http://schemas.microsoft.com/office/drawing/2014/main" id="{30DF7579-B5A6-458E-9BB5-672D4055C6F9}"/>
+                <a16:creationId xmlns:a16="http://schemas.microsoft.com/office/drawing/2014/main" id="{00602A91-5B7F-4439-AA97-E38205A827C5}"/>
               </a:ext>
             </a:extLst>
           </p:cNvPr>
@@ -7054,7 +7054,7 @@
           <p:cNvPr id="14" name="">
             <a:extLst xmlns:a="http://schemas.openxmlformats.org/drawingml/2006/main">
               <a:ext uri="{FF2B5EF4-FFF2-40B4-BE49-F238E27FC236}">
-                <a16:creationId xmlns:a16="http://schemas.microsoft.com/office/drawing/2014/main" id="{F099B60B-C29C-43E9-B5C0-113BCACCDC63}"/>
+                <a16:creationId xmlns:a16="http://schemas.microsoft.com/office/drawing/2014/main" id="{E0F6F24B-BA06-459D-8EEF-8A553BBAE336}"/>
               </a:ext>
             </a:extLst>
           </p:cNvPr>
@@ -7108,7 +7108,7 @@
     </p:spTree>
     <p:extLst>
       <p:ext uri="{BB962C8B-B14F-4D97-AF65-F5344CB8AC3E}">
-        <p14:creationId xmlns:p14="http://schemas.microsoft.com/office/powerpoint/2010/main" val="2113274228"/>
+        <p14:creationId xmlns:p14="http://schemas.microsoft.com/office/powerpoint/2010/main" val="236648010"/>
       </p:ext>
     </p:extLst>
   </p:cSld>
@@ -7139,7 +7139,7 @@
           <p:cNvPr id="1" name="">
             <a:extLst xmlns:a="http://schemas.openxmlformats.org/drawingml/2006/main">
               <a:ext uri="{FF2B5EF4-FFF2-40B4-BE49-F238E27FC236}">
-                <a16:creationId xmlns:a16="http://schemas.microsoft.com/office/drawing/2014/main" id="{46324D33-FE37-4632-B34F-68833FD5C573}"/>
+                <a16:creationId xmlns:a16="http://schemas.microsoft.com/office/drawing/2014/main" id="{C83CB4B0-4ED0-4A22-A7EB-975525FDFD0F}"/>
               </a:ext>
             </a:extLst>
           </p:cNvPr>
@@ -7176,7 +7176,7 @@
           <p:nvPr/>
         </p:nvPicPr>
         <p:blipFill>
-          <a:blip xmlns:r="http://schemas.openxmlformats.org/officeDocument/2006/relationships" xmlns:a="http://schemas.openxmlformats.org/drawingml/2006/main" r:embed="R98a55a1731e2442d"/>
+          <a:blip xmlns:r="http://schemas.openxmlformats.org/officeDocument/2006/relationships" xmlns:a="http://schemas.openxmlformats.org/drawingml/2006/main" r:embed="Rf37d54f7db9f4b6c"/>
           <a:stretch xmlns:a="http://schemas.openxmlformats.org/drawingml/2006/main"/>
         </p:blipFill>
         <p:spPr>
@@ -7194,7 +7194,7 @@
           <p:cNvPr id="3" name="">
             <a:extLst xmlns:a="http://schemas.openxmlformats.org/drawingml/2006/main">
               <a:ext uri="{FF2B5EF4-FFF2-40B4-BE49-F238E27FC236}">
-                <a16:creationId xmlns:a16="http://schemas.microsoft.com/office/drawing/2014/main" id="{2FF3DB68-4A96-450D-8D45-95A50A0E6166}"/>
+                <a16:creationId xmlns:a16="http://schemas.microsoft.com/office/drawing/2014/main" id="{D65F5648-4FBA-41E6-AA56-45CD01176CAA}"/>
               </a:ext>
             </a:extLst>
           </p:cNvPr>
@@ -7250,7 +7250,7 @@
           <p:cNvPr id="4" name="">
             <a:extLst xmlns:a="http://schemas.openxmlformats.org/drawingml/2006/main">
               <a:ext uri="{FF2B5EF4-FFF2-40B4-BE49-F238E27FC236}">
-                <a16:creationId xmlns:a16="http://schemas.microsoft.com/office/drawing/2014/main" id="{BCFD5608-D525-4737-B723-23D0FA1EF673}"/>
+                <a16:creationId xmlns:a16="http://schemas.microsoft.com/office/drawing/2014/main" id="{F4E3A725-95B1-4AB3-B867-2A69C5755ECE}"/>
               </a:ext>
             </a:extLst>
           </p:cNvPr>
@@ -7306,7 +7306,7 @@
           <p:cNvPr id="5" name="">
             <a:extLst xmlns:a="http://schemas.openxmlformats.org/drawingml/2006/main">
               <a:ext uri="{FF2B5EF4-FFF2-40B4-BE49-F238E27FC236}">
-                <a16:creationId xmlns:a16="http://schemas.microsoft.com/office/drawing/2014/main" id="{2EB5368C-D95A-47D3-891C-3935A0B9CF41}"/>
+                <a16:creationId xmlns:a16="http://schemas.microsoft.com/office/drawing/2014/main" id="{EDD2405F-D734-4B05-A9A3-C5371B8AD937}"/>
               </a:ext>
             </a:extLst>
           </p:cNvPr>
@@ -7341,7 +7341,7 @@
           <p:cNvPr id="6" name="">
             <a:extLst xmlns:a="http://schemas.openxmlformats.org/drawingml/2006/main">
               <a:ext uri="{FF2B5EF4-FFF2-40B4-BE49-F238E27FC236}">
-                <a16:creationId xmlns:a16="http://schemas.microsoft.com/office/drawing/2014/main" id="{526E7C43-E142-49DD-BAF9-07F46B7D9B5A}"/>
+                <a16:creationId xmlns:a16="http://schemas.microsoft.com/office/drawing/2014/main" id="{C8BB2162-2AF2-4775-A502-D86A75C72B72}"/>
               </a:ext>
             </a:extLst>
           </p:cNvPr>
@@ -7397,7 +7397,7 @@
           <p:cNvPr id="7" name="">
             <a:extLst xmlns:a="http://schemas.openxmlformats.org/drawingml/2006/main">
               <a:ext uri="{FF2B5EF4-FFF2-40B4-BE49-F238E27FC236}">
-                <a16:creationId xmlns:a16="http://schemas.microsoft.com/office/drawing/2014/main" id="{64BFC4EE-FCC2-4B28-AFFD-29EF305CE506}"/>
+                <a16:creationId xmlns:a16="http://schemas.microsoft.com/office/drawing/2014/main" id="{31E0320A-03E2-48DE-B470-74DC110BF66D}"/>
               </a:ext>
             </a:extLst>
           </p:cNvPr>
@@ -7451,7 +7451,7 @@
     </p:spTree>
     <p:extLst>
       <p:ext uri="{BB962C8B-B14F-4D97-AF65-F5344CB8AC3E}">
-        <p14:creationId xmlns:p14="http://schemas.microsoft.com/office/powerpoint/2010/main" val="822839776"/>
+        <p14:creationId xmlns:p14="http://schemas.microsoft.com/office/powerpoint/2010/main" val="1895545451"/>
       </p:ext>
     </p:extLst>
   </p:cSld>
@@ -7482,7 +7482,7 @@
           <p:cNvPr id="1" name="">
             <a:extLst xmlns:a="http://schemas.openxmlformats.org/drawingml/2006/main">
               <a:ext uri="{FF2B5EF4-FFF2-40B4-BE49-F238E27FC236}">
-                <a16:creationId xmlns:a16="http://schemas.microsoft.com/office/drawing/2014/main" id="{5141B280-E301-439C-BA48-6BF75BFD04EC}"/>
+                <a16:creationId xmlns:a16="http://schemas.microsoft.com/office/drawing/2014/main" id="{A7D874E2-EBA1-4A77-83A7-C630ABB70E57}"/>
               </a:ext>
             </a:extLst>
           </p:cNvPr>
@@ -7515,7 +7515,7 @@
           <p:cNvPr id="2" name="">
             <a:extLst xmlns:a="http://schemas.openxmlformats.org/drawingml/2006/main">
               <a:ext uri="{FF2B5EF4-FFF2-40B4-BE49-F238E27FC236}">
-                <a16:creationId xmlns:a16="http://schemas.microsoft.com/office/drawing/2014/main" id="{1EAFA4F2-72DC-44A0-ABBB-29E74B10E98F}"/>
+                <a16:creationId xmlns:a16="http://schemas.microsoft.com/office/drawing/2014/main" id="{2C7B4F5F-E779-4583-ADB7-4C982D31D813}"/>
               </a:ext>
             </a:extLst>
           </p:cNvPr>
@@ -7548,7 +7548,7 @@
           <p:cNvPr id="3" name="">
             <a:extLst xmlns:a="http://schemas.openxmlformats.org/drawingml/2006/main">
               <a:ext uri="{FF2B5EF4-FFF2-40B4-BE49-F238E27FC236}">
-                <a16:creationId xmlns:a16="http://schemas.microsoft.com/office/drawing/2014/main" id="{58901FCF-30BE-4A1F-AB56-118474E1658A}"/>
+                <a16:creationId xmlns:a16="http://schemas.microsoft.com/office/drawing/2014/main" id="{4CD60660-8A65-42AC-A50A-01556F26334A}"/>
               </a:ext>
             </a:extLst>
           </p:cNvPr>
@@ -7604,7 +7604,7 @@
           <p:cNvPr id="4" name="">
             <a:extLst xmlns:a="http://schemas.openxmlformats.org/drawingml/2006/main">
               <a:ext uri="{FF2B5EF4-FFF2-40B4-BE49-F238E27FC236}">
-                <a16:creationId xmlns:a16="http://schemas.microsoft.com/office/drawing/2014/main" id="{538BD847-699D-427C-9E05-0FF32696A163}"/>
+                <a16:creationId xmlns:a16="http://schemas.microsoft.com/office/drawing/2014/main" id="{65DA0177-F532-4FFB-ABB3-2663D771285A}"/>
               </a:ext>
             </a:extLst>
           </p:cNvPr>
@@ -7650,7 +7650,7 @@
                 <a:ea typeface="Aptos Display"/>
                 <a:cs typeface="Aptos Display"/>
               </a:rPr>
-              <a:t>Current System</a:t>
+              <a:t>Problem Statement</a:t>
             </a:r>
           </a:p>
         </p:txBody>
@@ -7660,7 +7660,7 @@
           <p:cNvPr id="5" name="">
             <a:extLst xmlns:a="http://schemas.openxmlformats.org/drawingml/2006/main">
               <a:ext uri="{FF2B5EF4-FFF2-40B4-BE49-F238E27FC236}">
-                <a16:creationId xmlns:a16="http://schemas.microsoft.com/office/drawing/2014/main" id="{67541F19-9E75-482D-8994-CC52A56517C5}"/>
+                <a16:creationId xmlns:a16="http://schemas.microsoft.com/office/drawing/2014/main" id="{52DFC895-8DE6-4BD7-92B2-2E97C79029CC}"/>
               </a:ext>
             </a:extLst>
           </p:cNvPr>
@@ -7688,14 +7688,14 @@
       </p:sp>
       <p:pic>
         <p:nvPicPr>
-          <p:cNvPr id="26" name=""/>
+          <p:cNvPr id="13" name=""/>
           <p:cNvPicPr>
             <a:picLocks xmlns:a="http://schemas.openxmlformats.org/drawingml/2006/main" noChangeAspect="1"/>
           </p:cNvPicPr>
           <p:nvPr/>
         </p:nvPicPr>
         <p:blipFill>
-          <a:blip xmlns:r="http://schemas.openxmlformats.org/officeDocument/2006/relationships" xmlns:a="http://schemas.openxmlformats.org/drawingml/2006/main" r:embed="R8b90524fef7a4670"/>
+          <a:blip xmlns:r="http://schemas.openxmlformats.org/officeDocument/2006/relationships" xmlns:a="http://schemas.openxmlformats.org/drawingml/2006/main" r:embed="Rdbc14bd2169047fb"/>
           <a:stretch xmlns:a="http://schemas.openxmlformats.org/drawingml/2006/main"/>
         </p:blipFill>
         <p:spPr>
@@ -7708,621 +7708,26 @@
           </a:prstGeom>
         </p:spPr>
       </p:pic>
-      <p:sp>
-        <p:nvSpPr>
-          <p:cNvPr id="7" name="">
-            <a:extLst xmlns:a="http://schemas.openxmlformats.org/drawingml/2006/main">
-              <a:ext uri="{FF2B5EF4-FFF2-40B4-BE49-F238E27FC236}">
-                <a16:creationId xmlns:a16="http://schemas.microsoft.com/office/drawing/2014/main" id="{02B72FB3-366E-4EC8-905A-EA529D4359B6}"/>
-              </a:ext>
-            </a:extLst>
-          </p:cNvPr>
-          <p:cNvSpPr>
-            <a:spLocks xmlns:a="http://schemas.openxmlformats.org/drawingml/2006/main" noGrp="1"/>
-          </p:cNvSpPr>
-          <p:nvPr/>
-        </p:nvSpPr>
-        <p:spPr>
-          <a:xfrm xmlns:a="http://schemas.openxmlformats.org/drawingml/2006/main">
-            <a:off x="895350" y="1695450"/>
-            <a:ext cx="3333750" cy="285750"/>
-          </a:xfrm>
-          <a:prstGeom xmlns:a="http://schemas.openxmlformats.org/drawingml/2006/main" prst="rect">
-            <a:avLst/>
-          </a:prstGeom>
-          <a:noFill xmlns:a="http://schemas.openxmlformats.org/drawingml/2006/main"/>
-          <a:ln xmlns:a="http://schemas.openxmlformats.org/drawingml/2006/main" w="0">
-            <a:noFill/>
-            <a:prstDash val="solid"/>
-          </a:ln>
-        </p:spPr>
-        <p:txBody>
-          <a:bodyPr xmlns:a="http://schemas.openxmlformats.org/drawingml/2006/main"/>
-          <a:lstStyle xmlns:a="http://schemas.openxmlformats.org/drawingml/2006/main"/>
-          <a:p xmlns:a="http://schemas.openxmlformats.org/drawingml/2006/main">
-            <a:pPr>
-              <a:defRPr sz="1875" b="1">
-                <a:solidFill>
-                  <a:srgbClr val="0D3D2D"/>
-                </a:solidFill>
-                <a:latin typeface="Aptos"/>
-                <a:ea typeface="Aptos"/>
-                <a:cs typeface="Aptos"/>
-              </a:defRPr>
-            </a:pPr>
-            <a:r>
-              <a:rPr sz="1875" b="1">
-                <a:solidFill>
-                  <a:srgbClr val="0D3D2D"/>
-                </a:solidFill>
-                <a:latin typeface="Aptos"/>
-                <a:ea typeface="Aptos"/>
-                <a:cs typeface="Aptos"/>
-              </a:rPr>
-              <a:t>Existing access pattern</a:t>
-            </a:r>
-          </a:p>
-        </p:txBody>
-      </p:sp>
-      <p:sp>
-        <p:nvSpPr>
-          <p:cNvPr id="8" name="">
-            <a:extLst xmlns:a="http://schemas.openxmlformats.org/drawingml/2006/main">
-              <a:ext uri="{FF2B5EF4-FFF2-40B4-BE49-F238E27FC236}">
-                <a16:creationId xmlns:a16="http://schemas.microsoft.com/office/drawing/2014/main" id="{07A3597F-5A11-44AC-A789-D76E9A361DD8}"/>
-              </a:ext>
-            </a:extLst>
-          </p:cNvPr>
-          <p:cNvSpPr>
-            <a:spLocks xmlns:a="http://schemas.openxmlformats.org/drawingml/2006/main" noGrp="1"/>
-          </p:cNvSpPr>
-          <p:nvPr/>
-        </p:nvSpPr>
-        <p:spPr>
-          <a:xfrm xmlns:a="http://schemas.openxmlformats.org/drawingml/2006/main">
-            <a:off x="952500" y="2362200"/>
-            <a:ext cx="95250" cy="95250"/>
-          </a:xfrm>
-          <a:prstGeom xmlns:a="http://schemas.openxmlformats.org/drawingml/2006/main" prst="ellipse">
-            <a:avLst/>
-          </a:prstGeom>
-          <a:solidFill xmlns:a="http://schemas.openxmlformats.org/drawingml/2006/main">
-            <a:srgbClr val="C7A044"/>
-          </a:solidFill>
-          <a:ln xmlns:a="http://schemas.openxmlformats.org/drawingml/2006/main" w="0">
-            <a:solidFill>
-              <a:srgbClr val="C7A044"/>
-            </a:solidFill>
-            <a:prstDash val="solid"/>
-          </a:ln>
-        </p:spPr>
-      </p:sp>
-      <p:sp>
-        <p:nvSpPr>
-          <p:cNvPr id="9" name="">
-            <a:extLst xmlns:a="http://schemas.openxmlformats.org/drawingml/2006/main">
-              <a:ext uri="{FF2B5EF4-FFF2-40B4-BE49-F238E27FC236}">
-                <a16:creationId xmlns:a16="http://schemas.microsoft.com/office/drawing/2014/main" id="{877920F1-2174-4CF3-A8B8-8275C6A19A1F}"/>
-              </a:ext>
-            </a:extLst>
-          </p:cNvPr>
-          <p:cNvSpPr>
-            <a:spLocks xmlns:a="http://schemas.openxmlformats.org/drawingml/2006/main" noGrp="1"/>
-          </p:cNvSpPr>
-          <p:nvPr/>
-        </p:nvSpPr>
-        <p:spPr>
-          <a:xfrm xmlns:a="http://schemas.openxmlformats.org/drawingml/2006/main">
-            <a:off x="1181100" y="2266950"/>
-            <a:ext cx="3867150" cy="428625"/>
-          </a:xfrm>
-          <a:prstGeom xmlns:a="http://schemas.openxmlformats.org/drawingml/2006/main" prst="rect">
-            <a:avLst/>
-          </a:prstGeom>
-          <a:noFill xmlns:a="http://schemas.openxmlformats.org/drawingml/2006/main"/>
-          <a:ln xmlns:a="http://schemas.openxmlformats.org/drawingml/2006/main" w="0">
-            <a:noFill/>
-            <a:prstDash val="solid"/>
-          </a:ln>
-        </p:spPr>
-        <p:txBody>
-          <a:bodyPr xmlns:a="http://schemas.openxmlformats.org/drawingml/2006/main"/>
-          <a:lstStyle xmlns:a="http://schemas.openxmlformats.org/drawingml/2006/main"/>
-          <a:p xmlns:a="http://schemas.openxmlformats.org/drawingml/2006/main">
-            <a:pPr>
-              <a:defRPr sz="1425" b="0">
-                <a:solidFill>
-                  <a:srgbClr val="18211F"/>
-                </a:solidFill>
-                <a:latin typeface="Aptos"/>
-                <a:ea typeface="Aptos"/>
-                <a:cs typeface="Aptos"/>
-              </a:defRPr>
-            </a:pPr>
-            <a:r>
-              <a:rPr sz="1425" b="0">
-                <a:solidFill>
-                  <a:srgbClr val="18211F"/>
-                </a:solidFill>
-                <a:latin typeface="Aptos"/>
-                <a:ea typeface="Aptos"/>
-                <a:cs typeface="Aptos"/>
-              </a:rPr>
-              <a:t>Typed catalogue search only</a:t>
-            </a:r>
-          </a:p>
-        </p:txBody>
-      </p:sp>
-      <p:sp>
-        <p:nvSpPr>
-          <p:cNvPr id="10" name="">
-            <a:extLst xmlns:a="http://schemas.openxmlformats.org/drawingml/2006/main">
-              <a:ext uri="{FF2B5EF4-FFF2-40B4-BE49-F238E27FC236}">
-                <a16:creationId xmlns:a16="http://schemas.microsoft.com/office/drawing/2014/main" id="{74966468-D366-4E7E-9F52-5B336E1B59BB}"/>
-              </a:ext>
-            </a:extLst>
-          </p:cNvPr>
-          <p:cNvSpPr>
-            <a:spLocks xmlns:a="http://schemas.openxmlformats.org/drawingml/2006/main" noGrp="1"/>
-          </p:cNvSpPr>
-          <p:nvPr/>
-        </p:nvSpPr>
-        <p:spPr>
-          <a:xfrm xmlns:a="http://schemas.openxmlformats.org/drawingml/2006/main">
-            <a:off x="952500" y="2819400"/>
-            <a:ext cx="95250" cy="95250"/>
-          </a:xfrm>
-          <a:prstGeom xmlns:a="http://schemas.openxmlformats.org/drawingml/2006/main" prst="ellipse">
-            <a:avLst/>
-          </a:prstGeom>
-          <a:solidFill xmlns:a="http://schemas.openxmlformats.org/drawingml/2006/main">
-            <a:srgbClr val="C7A044"/>
-          </a:solidFill>
-          <a:ln xmlns:a="http://schemas.openxmlformats.org/drawingml/2006/main" w="0">
-            <a:solidFill>
-              <a:srgbClr val="C7A044"/>
-            </a:solidFill>
-            <a:prstDash val="solid"/>
-          </a:ln>
-        </p:spPr>
-      </p:sp>
-      <p:sp>
-        <p:nvSpPr>
-          <p:cNvPr id="11" name="">
-            <a:extLst xmlns:a="http://schemas.openxmlformats.org/drawingml/2006/main">
-              <a:ext uri="{FF2B5EF4-FFF2-40B4-BE49-F238E27FC236}">
-                <a16:creationId xmlns:a16="http://schemas.microsoft.com/office/drawing/2014/main" id="{06126F15-C2EA-4513-B8F6-C49CAC3007C8}"/>
-              </a:ext>
-            </a:extLst>
-          </p:cNvPr>
-          <p:cNvSpPr>
-            <a:spLocks xmlns:a="http://schemas.openxmlformats.org/drawingml/2006/main" noGrp="1"/>
-          </p:cNvSpPr>
-          <p:nvPr/>
-        </p:nvSpPr>
-        <p:spPr>
-          <a:xfrm xmlns:a="http://schemas.openxmlformats.org/drawingml/2006/main">
-            <a:off x="1181100" y="2724150"/>
-            <a:ext cx="3867150" cy="428625"/>
-          </a:xfrm>
-          <a:prstGeom xmlns:a="http://schemas.openxmlformats.org/drawingml/2006/main" prst="rect">
-            <a:avLst/>
-          </a:prstGeom>
-          <a:noFill xmlns:a="http://schemas.openxmlformats.org/drawingml/2006/main"/>
-          <a:ln xmlns:a="http://schemas.openxmlformats.org/drawingml/2006/main" w="0">
-            <a:noFill/>
-            <a:prstDash val="solid"/>
-          </a:ln>
-        </p:spPr>
-        <p:txBody>
-          <a:bodyPr xmlns:a="http://schemas.openxmlformats.org/drawingml/2006/main"/>
-          <a:lstStyle xmlns:a="http://schemas.openxmlformats.org/drawingml/2006/main"/>
-          <a:p xmlns:a="http://schemas.openxmlformats.org/drawingml/2006/main">
-            <a:pPr>
-              <a:defRPr sz="1425" b="0">
-                <a:solidFill>
-                  <a:srgbClr val="18211F"/>
-                </a:solidFill>
-                <a:latin typeface="Aptos"/>
-                <a:ea typeface="Aptos"/>
-                <a:cs typeface="Aptos"/>
-              </a:defRPr>
-            </a:pPr>
-            <a:r>
-              <a:rPr sz="1425" b="0">
-                <a:solidFill>
-                  <a:srgbClr val="18211F"/>
-                </a:solidFill>
-                <a:latin typeface="Aptos"/>
-                <a:ea typeface="Aptos"/>
-                <a:cs typeface="Aptos"/>
-              </a:rPr>
-              <a:t>Login separate from improved role dashboards</a:t>
-            </a:r>
-          </a:p>
-        </p:txBody>
-      </p:sp>
-      <p:sp>
-        <p:nvSpPr>
-          <p:cNvPr id="12" name="">
-            <a:extLst xmlns:a="http://schemas.openxmlformats.org/drawingml/2006/main">
-              <a:ext uri="{FF2B5EF4-FFF2-40B4-BE49-F238E27FC236}">
-                <a16:creationId xmlns:a16="http://schemas.microsoft.com/office/drawing/2014/main" id="{376BF235-4F5F-4C8B-BDB7-564A4CDEF1F4}"/>
-              </a:ext>
-            </a:extLst>
-          </p:cNvPr>
-          <p:cNvSpPr>
-            <a:spLocks xmlns:a="http://schemas.openxmlformats.org/drawingml/2006/main" noGrp="1"/>
-          </p:cNvSpPr>
-          <p:nvPr/>
-        </p:nvSpPr>
-        <p:spPr>
-          <a:xfrm xmlns:a="http://schemas.openxmlformats.org/drawingml/2006/main">
-            <a:off x="952500" y="3276600"/>
-            <a:ext cx="95250" cy="95250"/>
-          </a:xfrm>
-          <a:prstGeom xmlns:a="http://schemas.openxmlformats.org/drawingml/2006/main" prst="ellipse">
-            <a:avLst/>
-          </a:prstGeom>
-          <a:solidFill xmlns:a="http://schemas.openxmlformats.org/drawingml/2006/main">
-            <a:srgbClr val="C7A044"/>
-          </a:solidFill>
-          <a:ln xmlns:a="http://schemas.openxmlformats.org/drawingml/2006/main" w="0">
-            <a:solidFill>
-              <a:srgbClr val="C7A044"/>
-            </a:solidFill>
-            <a:prstDash val="solid"/>
-          </a:ln>
-        </p:spPr>
-      </p:sp>
-      <p:sp>
-        <p:nvSpPr>
-          <p:cNvPr id="13" name="">
-            <a:extLst xmlns:a="http://schemas.openxmlformats.org/drawingml/2006/main">
-              <a:ext uri="{FF2B5EF4-FFF2-40B4-BE49-F238E27FC236}">
-                <a16:creationId xmlns:a16="http://schemas.microsoft.com/office/drawing/2014/main" id="{96385126-88E3-4F15-AB36-B87A556BA49F}"/>
-              </a:ext>
-            </a:extLst>
-          </p:cNvPr>
-          <p:cNvSpPr>
-            <a:spLocks xmlns:a="http://schemas.openxmlformats.org/drawingml/2006/main" noGrp="1"/>
-          </p:cNvSpPr>
-          <p:nvPr/>
-        </p:nvSpPr>
-        <p:spPr>
-          <a:xfrm xmlns:a="http://schemas.openxmlformats.org/drawingml/2006/main">
-            <a:off x="1181100" y="3181350"/>
-            <a:ext cx="3867150" cy="428625"/>
-          </a:xfrm>
-          <a:prstGeom xmlns:a="http://schemas.openxmlformats.org/drawingml/2006/main" prst="rect">
-            <a:avLst/>
-          </a:prstGeom>
-          <a:noFill xmlns:a="http://schemas.openxmlformats.org/drawingml/2006/main"/>
-          <a:ln xmlns:a="http://schemas.openxmlformats.org/drawingml/2006/main" w="0">
-            <a:noFill/>
-            <a:prstDash val="solid"/>
-          </a:ln>
-        </p:spPr>
-        <p:txBody>
-          <a:bodyPr xmlns:a="http://schemas.openxmlformats.org/drawingml/2006/main"/>
-          <a:lstStyle xmlns:a="http://schemas.openxmlformats.org/drawingml/2006/main"/>
-          <a:p xmlns:a="http://schemas.openxmlformats.org/drawingml/2006/main">
-            <a:pPr>
-              <a:defRPr sz="1425" b="0">
-                <a:solidFill>
-                  <a:srgbClr val="18211F"/>
-                </a:solidFill>
-                <a:latin typeface="Aptos"/>
-                <a:ea typeface="Aptos"/>
-                <a:cs typeface="Aptos"/>
-              </a:defRPr>
-            </a:pPr>
-            <a:r>
-              <a:rPr sz="1425" b="0">
-                <a:solidFill>
-                  <a:srgbClr val="18211F"/>
-                </a:solidFill>
-                <a:latin typeface="Aptos"/>
-                <a:ea typeface="Aptos"/>
-                <a:cs typeface="Aptos"/>
-              </a:rPr>
-              <a:t>No voice search</a:t>
-            </a:r>
-          </a:p>
-        </p:txBody>
-      </p:sp>
-      <p:sp>
-        <p:nvSpPr>
-          <p:cNvPr id="14" name="">
-            <a:extLst xmlns:a="http://schemas.openxmlformats.org/drawingml/2006/main">
-              <a:ext uri="{FF2B5EF4-FFF2-40B4-BE49-F238E27FC236}">
-                <a16:creationId xmlns:a16="http://schemas.microsoft.com/office/drawing/2014/main" id="{3A29505B-5739-4C22-9AEF-050DF6A49511}"/>
-              </a:ext>
-            </a:extLst>
-          </p:cNvPr>
-          <p:cNvSpPr>
-            <a:spLocks xmlns:a="http://schemas.openxmlformats.org/drawingml/2006/main" noGrp="1"/>
-          </p:cNvSpPr>
-          <p:nvPr/>
-        </p:nvSpPr>
-        <p:spPr>
-          <a:xfrm xmlns:a="http://schemas.openxmlformats.org/drawingml/2006/main">
-            <a:off x="952500" y="3733800"/>
-            <a:ext cx="95250" cy="95250"/>
-          </a:xfrm>
-          <a:prstGeom xmlns:a="http://schemas.openxmlformats.org/drawingml/2006/main" prst="ellipse">
-            <a:avLst/>
-          </a:prstGeom>
-          <a:solidFill xmlns:a="http://schemas.openxmlformats.org/drawingml/2006/main">
-            <a:srgbClr val="C7A044"/>
-          </a:solidFill>
-          <a:ln xmlns:a="http://schemas.openxmlformats.org/drawingml/2006/main" w="0">
-            <a:solidFill>
-              <a:srgbClr val="C7A044"/>
-            </a:solidFill>
-            <a:prstDash val="solid"/>
-          </a:ln>
-        </p:spPr>
-      </p:sp>
-      <p:sp>
-        <p:nvSpPr>
-          <p:cNvPr id="15" name="">
-            <a:extLst xmlns:a="http://schemas.openxmlformats.org/drawingml/2006/main">
-              <a:ext uri="{FF2B5EF4-FFF2-40B4-BE49-F238E27FC236}">
-                <a16:creationId xmlns:a16="http://schemas.microsoft.com/office/drawing/2014/main" id="{45C4A0B5-874B-4FC4-906E-4532479270FB}"/>
-              </a:ext>
-            </a:extLst>
-          </p:cNvPr>
-          <p:cNvSpPr>
-            <a:spLocks xmlns:a="http://schemas.openxmlformats.org/drawingml/2006/main" noGrp="1"/>
-          </p:cNvSpPr>
-          <p:nvPr/>
-        </p:nvSpPr>
-        <p:spPr>
-          <a:xfrm xmlns:a="http://schemas.openxmlformats.org/drawingml/2006/main">
-            <a:off x="1181100" y="3638550"/>
-            <a:ext cx="3867150" cy="428625"/>
-          </a:xfrm>
-          <a:prstGeom xmlns:a="http://schemas.openxmlformats.org/drawingml/2006/main" prst="rect">
-            <a:avLst/>
-          </a:prstGeom>
-          <a:noFill xmlns:a="http://schemas.openxmlformats.org/drawingml/2006/main"/>
-          <a:ln xmlns:a="http://schemas.openxmlformats.org/drawingml/2006/main" w="0">
-            <a:noFill/>
-            <a:prstDash val="solid"/>
-          </a:ln>
-        </p:spPr>
-        <p:txBody>
-          <a:bodyPr xmlns:a="http://schemas.openxmlformats.org/drawingml/2006/main"/>
-          <a:lstStyle xmlns:a="http://schemas.openxmlformats.org/drawingml/2006/main"/>
-          <a:p xmlns:a="http://schemas.openxmlformats.org/drawingml/2006/main">
-            <a:pPr>
-              <a:defRPr sz="1425" b="0">
-                <a:solidFill>
-                  <a:srgbClr val="18211F"/>
-                </a:solidFill>
-                <a:latin typeface="Aptos"/>
-                <a:ea typeface="Aptos"/>
-                <a:cs typeface="Aptos"/>
-              </a:defRPr>
-            </a:pPr>
-            <a:r>
-              <a:rPr sz="1425" b="0">
-                <a:solidFill>
-                  <a:srgbClr val="18211F"/>
-                </a:solidFill>
-                <a:latin typeface="Aptos"/>
-                <a:ea typeface="Aptos"/>
-                <a:cs typeface="Aptos"/>
-              </a:rPr>
-              <a:t>No audio-reading support</a:t>
-            </a:r>
-          </a:p>
-        </p:txBody>
-      </p:sp>
-      <p:sp>
-        <p:nvSpPr>
-          <p:cNvPr id="16" name="">
-            <a:extLst xmlns:a="http://schemas.openxmlformats.org/drawingml/2006/main">
-              <a:ext uri="{FF2B5EF4-FFF2-40B4-BE49-F238E27FC236}">
-                <a16:creationId xmlns:a16="http://schemas.microsoft.com/office/drawing/2014/main" id="{E10E757A-D6DA-499A-9DAF-609859AC69AC}"/>
-              </a:ext>
-            </a:extLst>
-          </p:cNvPr>
-          <p:cNvSpPr>
-            <a:spLocks xmlns:a="http://schemas.openxmlformats.org/drawingml/2006/main" noGrp="1"/>
-          </p:cNvSpPr>
-          <p:nvPr/>
-        </p:nvSpPr>
-        <p:spPr>
-          <a:xfrm xmlns:a="http://schemas.openxmlformats.org/drawingml/2006/main">
-            <a:off x="952500" y="4191000"/>
-            <a:ext cx="95250" cy="95250"/>
-          </a:xfrm>
-          <a:prstGeom xmlns:a="http://schemas.openxmlformats.org/drawingml/2006/main" prst="ellipse">
-            <a:avLst/>
-          </a:prstGeom>
-          <a:solidFill xmlns:a="http://schemas.openxmlformats.org/drawingml/2006/main">
-            <a:srgbClr val="C7A044"/>
-          </a:solidFill>
-          <a:ln xmlns:a="http://schemas.openxmlformats.org/drawingml/2006/main" w="0">
-            <a:solidFill>
-              <a:srgbClr val="C7A044"/>
-            </a:solidFill>
-            <a:prstDash val="solid"/>
-          </a:ln>
-        </p:spPr>
-      </p:sp>
-      <p:sp>
-        <p:nvSpPr>
-          <p:cNvPr id="17" name="">
-            <a:extLst xmlns:a="http://schemas.openxmlformats.org/drawingml/2006/main">
-              <a:ext uri="{FF2B5EF4-FFF2-40B4-BE49-F238E27FC236}">
-                <a16:creationId xmlns:a16="http://schemas.microsoft.com/office/drawing/2014/main" id="{B800BF03-480B-4A29-9D58-2055603AF22B}"/>
-              </a:ext>
-            </a:extLst>
-          </p:cNvPr>
-          <p:cNvSpPr>
-            <a:spLocks xmlns:a="http://schemas.openxmlformats.org/drawingml/2006/main" noGrp="1"/>
-          </p:cNvSpPr>
-          <p:nvPr/>
-        </p:nvSpPr>
-        <p:spPr>
-          <a:xfrm xmlns:a="http://schemas.openxmlformats.org/drawingml/2006/main">
-            <a:off x="1181100" y="4095750"/>
-            <a:ext cx="3867150" cy="428625"/>
-          </a:xfrm>
-          <a:prstGeom xmlns:a="http://schemas.openxmlformats.org/drawingml/2006/main" prst="rect">
-            <a:avLst/>
-          </a:prstGeom>
-          <a:noFill xmlns:a="http://schemas.openxmlformats.org/drawingml/2006/main"/>
-          <a:ln xmlns:a="http://schemas.openxmlformats.org/drawingml/2006/main" w="0">
-            <a:noFill/>
-            <a:prstDash val="solid"/>
-          </a:ln>
-        </p:spPr>
-        <p:txBody>
-          <a:bodyPr xmlns:a="http://schemas.openxmlformats.org/drawingml/2006/main"/>
-          <a:lstStyle xmlns:a="http://schemas.openxmlformats.org/drawingml/2006/main"/>
-          <a:p xmlns:a="http://schemas.openxmlformats.org/drawingml/2006/main">
-            <a:pPr>
-              <a:defRPr sz="1425" b="0">
-                <a:solidFill>
-                  <a:srgbClr val="18211F"/>
-                </a:solidFill>
-                <a:latin typeface="Aptos"/>
-                <a:ea typeface="Aptos"/>
-                <a:cs typeface="Aptos"/>
-              </a:defRPr>
-            </a:pPr>
-            <a:r>
-              <a:rPr sz="1425" b="0">
-                <a:solidFill>
-                  <a:srgbClr val="18211F"/>
-                </a:solidFill>
-                <a:latin typeface="Aptos"/>
-                <a:ea typeface="Aptos"/>
-                <a:cs typeface="Aptos"/>
-              </a:rPr>
-              <a:t>Limited accessibility for reading challenges</a:t>
-            </a:r>
-          </a:p>
-        </p:txBody>
-      </p:sp>
-      <p:sp>
-        <p:nvSpPr>
-          <p:cNvPr id="18" name="">
-            <a:extLst xmlns:a="http://schemas.openxmlformats.org/drawingml/2006/main">
-              <a:ext uri="{FF2B5EF4-FFF2-40B4-BE49-F238E27FC236}">
-                <a16:creationId xmlns:a16="http://schemas.microsoft.com/office/drawing/2014/main" id="{3B40BDDC-A684-40BB-AA45-7DC45B6239DA}"/>
-              </a:ext>
-            </a:extLst>
-          </p:cNvPr>
-          <p:cNvSpPr>
-            <a:spLocks xmlns:a="http://schemas.openxmlformats.org/drawingml/2006/main" noGrp="1"/>
-          </p:cNvSpPr>
-          <p:nvPr/>
-        </p:nvSpPr>
-        <p:spPr>
-          <a:xfrm xmlns:a="http://schemas.openxmlformats.org/drawingml/2006/main">
-            <a:off x="876300" y="5257800"/>
-            <a:ext cx="9867900" cy="533400"/>
-          </a:xfrm>
-          <a:prstGeom xmlns:a="http://schemas.openxmlformats.org/drawingml/2006/main" prst="roundRect">
-            <a:avLst>
-              <a:gd name="adj" fmla="val 14286"/>
-            </a:avLst>
-          </a:prstGeom>
-          <a:solidFill xmlns:a="http://schemas.openxmlformats.org/drawingml/2006/main">
-            <a:srgbClr val="0D3D2D"/>
-          </a:solidFill>
-          <a:ln xmlns:a="http://schemas.openxmlformats.org/drawingml/2006/main" w="9525">
-            <a:solidFill>
-              <a:srgbClr val="0D3D2D"/>
-            </a:solidFill>
-            <a:prstDash val="solid"/>
-          </a:ln>
-        </p:spPr>
-      </p:sp>
-      <p:sp>
-        <p:nvSpPr>
-          <p:cNvPr id="19" name="">
-            <a:extLst xmlns:a="http://schemas.openxmlformats.org/drawingml/2006/main">
-              <a:ext uri="{FF2B5EF4-FFF2-40B4-BE49-F238E27FC236}">
-                <a16:creationId xmlns:a16="http://schemas.microsoft.com/office/drawing/2014/main" id="{1D4A32F3-FA20-4ABC-8ABF-C26FA35F5B10}"/>
-              </a:ext>
-            </a:extLst>
-          </p:cNvPr>
-          <p:cNvSpPr>
-            <a:spLocks xmlns:a="http://schemas.openxmlformats.org/drawingml/2006/main" noGrp="1"/>
-          </p:cNvSpPr>
-          <p:nvPr/>
-        </p:nvSpPr>
-        <p:spPr>
-          <a:xfrm xmlns:a="http://schemas.openxmlformats.org/drawingml/2006/main">
-            <a:off x="1219200" y="5410200"/>
-            <a:ext cx="8286750" cy="247650"/>
-          </a:xfrm>
-          <a:prstGeom xmlns:a="http://schemas.openxmlformats.org/drawingml/2006/main" prst="rect">
-            <a:avLst/>
-          </a:prstGeom>
-          <a:noFill xmlns:a="http://schemas.openxmlformats.org/drawingml/2006/main"/>
-          <a:ln xmlns:a="http://schemas.openxmlformats.org/drawingml/2006/main" w="0">
-            <a:noFill/>
-            <a:prstDash val="solid"/>
-          </a:ln>
-        </p:spPr>
-        <p:txBody>
-          <a:bodyPr xmlns:a="http://schemas.openxmlformats.org/drawingml/2006/main"/>
-          <a:lstStyle xmlns:a="http://schemas.openxmlformats.org/drawingml/2006/main"/>
-          <a:p xmlns:a="http://schemas.openxmlformats.org/drawingml/2006/main">
-            <a:pPr>
-              <a:defRPr sz="1575" b="1">
-                <a:solidFill>
-                  <a:srgbClr val="FFFFFF"/>
-                </a:solidFill>
-                <a:latin typeface="Aptos"/>
-                <a:ea typeface="Aptos"/>
-                <a:cs typeface="Aptos"/>
-              </a:defRPr>
-            </a:pPr>
-            <a:r>
-              <a:rPr sz="1575" b="1">
-                <a:solidFill>
-                  <a:srgbClr val="FFFFFF"/>
-                </a:solidFill>
-                <a:latin typeface="Aptos"/>
-                <a:ea typeface="Aptos"/>
-                <a:cs typeface="Aptos"/>
-              </a:rPr>
-              <a:t>Challenge: users still need easier retrieval and inclusive reading support.</a:t>
-            </a:r>
-          </a:p>
-        </p:txBody>
-      </p:sp>
       <p:pic>
         <p:nvPicPr>
-          <p:cNvPr id="40" name=""/>
+          <p:cNvPr id="14" name=""/>
           <p:cNvPicPr>
             <a:picLocks xmlns:a="http://schemas.openxmlformats.org/drawingml/2006/main" noChangeAspect="1"/>
           </p:cNvPicPr>
           <p:nvPr/>
         </p:nvPicPr>
         <p:blipFill>
-          <a:blip xmlns:r="http://schemas.openxmlformats.org/officeDocument/2006/relationships" xmlns:a="http://schemas.openxmlformats.org/drawingml/2006/main" r:embed="R918ff24c604c4f03"/>
-          <a:srcRect xmlns:a="http://schemas.openxmlformats.org/drawingml/2006/main" l="11215" t="0" r="11215" b="0"/>
-          <a:stretch xmlns:a="http://schemas.openxmlformats.org/drawingml/2006/main">
-            <a:fillRect l="0" t="0" r="0" b="0"/>
-          </a:stretch>
+          <a:blip xmlns:r="http://schemas.openxmlformats.org/officeDocument/2006/relationships" xmlns:a="http://schemas.openxmlformats.org/drawingml/2006/main" r:embed="Rd2428d04b5684210"/>
+          <a:stretch xmlns:a="http://schemas.openxmlformats.org/drawingml/2006/main"/>
         </p:blipFill>
         <p:spPr>
           <a:xfrm xmlns:a="http://schemas.openxmlformats.org/drawingml/2006/main">
-            <a:off x="5886450" y="1676400"/>
-            <a:ext cx="4895850" cy="3143250"/>
+            <a:off x="2614613" y="1562100"/>
+            <a:ext cx="6143625" cy="4095750"/>
           </a:xfrm>
           <a:prstGeom xmlns:a="http://schemas.openxmlformats.org/drawingml/2006/main" prst="roundRect">
             <a:avLst>
-              <a:gd name="adj" fmla="val 1818"/>
+              <a:gd name="adj" fmla="val 1395"/>
             </a:avLst>
           </a:prstGeom>
         </p:spPr>
@@ -8330,7 +7735,7 @@
     </p:spTree>
     <p:extLst>
       <p:ext uri="{BB962C8B-B14F-4D97-AF65-F5344CB8AC3E}">
-        <p14:creationId xmlns:p14="http://schemas.microsoft.com/office/powerpoint/2010/main" val="1097938681"/>
+        <p14:creationId xmlns:p14="http://schemas.microsoft.com/office/powerpoint/2010/main" val="171938717"/>
       </p:ext>
     </p:extLst>
   </p:cSld>
@@ -8361,7 +7766,7 @@
           <p:cNvPr id="1" name="">
             <a:extLst xmlns:a="http://schemas.openxmlformats.org/drawingml/2006/main">
               <a:ext uri="{FF2B5EF4-FFF2-40B4-BE49-F238E27FC236}">
-                <a16:creationId xmlns:a16="http://schemas.microsoft.com/office/drawing/2014/main" id="{B58C6C5F-B224-432F-8D29-ED59C5A72144}"/>
+                <a16:creationId xmlns:a16="http://schemas.microsoft.com/office/drawing/2014/main" id="{A511934A-476D-47DF-8849-516833CC4776}"/>
               </a:ext>
             </a:extLst>
           </p:cNvPr>
@@ -8394,7 +7799,7 @@
           <p:cNvPr id="2" name="">
             <a:extLst xmlns:a="http://schemas.openxmlformats.org/drawingml/2006/main">
               <a:ext uri="{FF2B5EF4-FFF2-40B4-BE49-F238E27FC236}">
-                <a16:creationId xmlns:a16="http://schemas.microsoft.com/office/drawing/2014/main" id="{92651BFE-F93C-43A9-A1E7-E93A3D5FF144}"/>
+                <a16:creationId xmlns:a16="http://schemas.microsoft.com/office/drawing/2014/main" id="{C65201AB-1956-4BF9-B736-4290BDD20274}"/>
               </a:ext>
             </a:extLst>
           </p:cNvPr>
@@ -8427,7 +7832,7 @@
           <p:cNvPr id="3" name="">
             <a:extLst xmlns:a="http://schemas.openxmlformats.org/drawingml/2006/main">
               <a:ext uri="{FF2B5EF4-FFF2-40B4-BE49-F238E27FC236}">
-                <a16:creationId xmlns:a16="http://schemas.microsoft.com/office/drawing/2014/main" id="{4D2BF741-A07F-407F-A1AE-9C7E846441CD}"/>
+                <a16:creationId xmlns:a16="http://schemas.microsoft.com/office/drawing/2014/main" id="{33D99AC9-4C64-4B1F-917E-5A57A9A925E0}"/>
               </a:ext>
             </a:extLst>
           </p:cNvPr>
@@ -8483,7 +7888,7 @@
           <p:cNvPr id="4" name="">
             <a:extLst xmlns:a="http://schemas.openxmlformats.org/drawingml/2006/main">
               <a:ext uri="{FF2B5EF4-FFF2-40B4-BE49-F238E27FC236}">
-                <a16:creationId xmlns:a16="http://schemas.microsoft.com/office/drawing/2014/main" id="{AD067385-F904-428D-BDF0-E4A07EFC6DC7}"/>
+                <a16:creationId xmlns:a16="http://schemas.microsoft.com/office/drawing/2014/main" id="{CDFC62D9-7D13-4EDD-8025-E3136EAEDA71}"/>
               </a:ext>
             </a:extLst>
           </p:cNvPr>
@@ -8529,7 +7934,7 @@
                 <a:ea typeface="Aptos Display"/>
                 <a:cs typeface="Aptos Display"/>
               </a:rPr>
-              <a:t>Problems Identified</a:t>
+              <a:t>Current System</a:t>
             </a:r>
           </a:p>
         </p:txBody>
@@ -8539,7 +7944,7 @@
           <p:cNvPr id="5" name="">
             <a:extLst xmlns:a="http://schemas.openxmlformats.org/drawingml/2006/main">
               <a:ext uri="{FF2B5EF4-FFF2-40B4-BE49-F238E27FC236}">
-                <a16:creationId xmlns:a16="http://schemas.microsoft.com/office/drawing/2014/main" id="{65A5C7CE-F526-4709-912C-99DA2FC3F146}"/>
+                <a16:creationId xmlns:a16="http://schemas.microsoft.com/office/drawing/2014/main" id="{C3910182-9E28-4BE7-9BD1-1FAFEA416A67}"/>
               </a:ext>
             </a:extLst>
           </p:cNvPr>
@@ -8567,14 +7972,14 @@
       </p:sp>
       <p:pic>
         <p:nvPicPr>
-          <p:cNvPr id="28" name=""/>
+          <p:cNvPr id="26" name=""/>
           <p:cNvPicPr>
             <a:picLocks xmlns:a="http://schemas.openxmlformats.org/drawingml/2006/main" noChangeAspect="1"/>
           </p:cNvPicPr>
           <p:nvPr/>
         </p:nvPicPr>
         <p:blipFill>
-          <a:blip xmlns:r="http://schemas.openxmlformats.org/officeDocument/2006/relationships" xmlns:a="http://schemas.openxmlformats.org/drawingml/2006/main" r:embed="R6e08747efe27467b"/>
+          <a:blip xmlns:r="http://schemas.openxmlformats.org/officeDocument/2006/relationships" xmlns:a="http://schemas.openxmlformats.org/drawingml/2006/main" r:embed="R2d705db3e6994e0b"/>
           <a:stretch xmlns:a="http://schemas.openxmlformats.org/drawingml/2006/main"/>
         </p:blipFill>
         <p:spPr>
@@ -8592,19 +7997,19 @@
           <p:cNvPr id="7" name="">
             <a:extLst xmlns:a="http://schemas.openxmlformats.org/drawingml/2006/main">
               <a:ext uri="{FF2B5EF4-FFF2-40B4-BE49-F238E27FC236}">
-                <a16:creationId xmlns:a16="http://schemas.microsoft.com/office/drawing/2014/main" id="{49E754E1-699E-453A-A209-53E4E3D7876E}"/>
-              </a:ext>
-            </a:extLst>
-          </p:cNvPr>
-          <p:cNvSpPr>
-            <a:spLocks xmlns:a="http://schemas.openxmlformats.org/drawingml/2006/main" noGrp="1"/>
-          </p:cNvSpPr>
-          <p:nvPr/>
-        </p:nvSpPr>
-        <p:spPr>
-          <a:xfrm xmlns:a="http://schemas.openxmlformats.org/drawingml/2006/main">
-            <a:off x="895350" y="1619250"/>
-            <a:ext cx="4095750" cy="266700"/>
+                <a16:creationId xmlns:a16="http://schemas.microsoft.com/office/drawing/2014/main" id="{D1165A08-B482-4BD8-9AFB-C681BCC10E9B}"/>
+              </a:ext>
+            </a:extLst>
+          </p:cNvPr>
+          <p:cNvSpPr>
+            <a:spLocks xmlns:a="http://schemas.openxmlformats.org/drawingml/2006/main" noGrp="1"/>
+          </p:cNvSpPr>
+          <p:nvPr/>
+        </p:nvSpPr>
+        <p:spPr>
+          <a:xfrm xmlns:a="http://schemas.openxmlformats.org/drawingml/2006/main">
+            <a:off x="895350" y="1695450"/>
+            <a:ext cx="3333750" cy="285750"/>
           </a:xfrm>
           <a:prstGeom xmlns:a="http://schemas.openxmlformats.org/drawingml/2006/main" prst="rect">
             <a:avLst/>
@@ -8620,7 +8025,7 @@
           <a:lstStyle xmlns:a="http://schemas.openxmlformats.org/drawingml/2006/main"/>
           <a:p xmlns:a="http://schemas.openxmlformats.org/drawingml/2006/main">
             <a:pPr>
-              <a:defRPr sz="1725" b="1">
+              <a:defRPr sz="1875" b="1">
                 <a:solidFill>
                   <a:srgbClr val="0D3D2D"/>
                 </a:solidFill>
@@ -8630,7 +8035,7 @@
               </a:defRPr>
             </a:pPr>
             <a:r>
-              <a:rPr sz="1725" b="1">
+              <a:rPr sz="1875" b="1">
                 <a:solidFill>
                   <a:srgbClr val="0D3D2D"/>
                 </a:solidFill>
@@ -8638,7 +8043,7 @@
                 <a:ea typeface="Aptos"/>
                 <a:cs typeface="Aptos"/>
               </a:rPr>
-              <a:t>Challenges in the INES library environment</a:t>
+              <a:t>Main challenges</a:t>
             </a:r>
           </a:p>
         </p:txBody>
@@ -8648,18 +8053,18 @@
           <p:cNvPr id="8" name="">
             <a:extLst xmlns:a="http://schemas.openxmlformats.org/drawingml/2006/main">
               <a:ext uri="{FF2B5EF4-FFF2-40B4-BE49-F238E27FC236}">
-                <a16:creationId xmlns:a16="http://schemas.microsoft.com/office/drawing/2014/main" id="{F3F1F856-6F69-43A5-BC80-9AE378663B96}"/>
-              </a:ext>
-            </a:extLst>
-          </p:cNvPr>
-          <p:cNvSpPr>
-            <a:spLocks xmlns:a="http://schemas.openxmlformats.org/drawingml/2006/main" noGrp="1"/>
-          </p:cNvSpPr>
-          <p:nvPr/>
-        </p:nvSpPr>
-        <p:spPr>
-          <a:xfrm xmlns:a="http://schemas.openxmlformats.org/drawingml/2006/main">
-            <a:off x="952500" y="2228850"/>
+                <a16:creationId xmlns:a16="http://schemas.microsoft.com/office/drawing/2014/main" id="{BF29985F-C6A4-4AD3-BC8C-3D1C383E6F7D}"/>
+              </a:ext>
+            </a:extLst>
+          </p:cNvPr>
+          <p:cNvSpPr>
+            <a:spLocks xmlns:a="http://schemas.openxmlformats.org/drawingml/2006/main" noGrp="1"/>
+          </p:cNvSpPr>
+          <p:nvPr/>
+        </p:nvSpPr>
+        <p:spPr>
+          <a:xfrm xmlns:a="http://schemas.openxmlformats.org/drawingml/2006/main">
+            <a:off x="952500" y="2362200"/>
             <a:ext cx="95250" cy="95250"/>
           </a:xfrm>
           <a:prstGeom xmlns:a="http://schemas.openxmlformats.org/drawingml/2006/main" prst="ellipse">
@@ -8681,19 +8086,19 @@
           <p:cNvPr id="9" name="">
             <a:extLst xmlns:a="http://schemas.openxmlformats.org/drawingml/2006/main">
               <a:ext uri="{FF2B5EF4-FFF2-40B4-BE49-F238E27FC236}">
-                <a16:creationId xmlns:a16="http://schemas.microsoft.com/office/drawing/2014/main" id="{D26A2C00-B187-492A-833B-647A40B4A6FA}"/>
-              </a:ext>
-            </a:extLst>
-          </p:cNvPr>
-          <p:cNvSpPr>
-            <a:spLocks xmlns:a="http://schemas.openxmlformats.org/drawingml/2006/main" noGrp="1"/>
-          </p:cNvSpPr>
-          <p:nvPr/>
-        </p:nvSpPr>
-        <p:spPr>
-          <a:xfrm xmlns:a="http://schemas.openxmlformats.org/drawingml/2006/main">
-            <a:off x="1181100" y="2133600"/>
-            <a:ext cx="4229100" cy="400050"/>
+                <a16:creationId xmlns:a16="http://schemas.microsoft.com/office/drawing/2014/main" id="{8F95AC35-541B-46F4-BE0A-5D377CB26D51}"/>
+              </a:ext>
+            </a:extLst>
+          </p:cNvPr>
+          <p:cNvSpPr>
+            <a:spLocks xmlns:a="http://schemas.openxmlformats.org/drawingml/2006/main" noGrp="1"/>
+          </p:cNvSpPr>
+          <p:nvPr/>
+        </p:nvSpPr>
+        <p:spPr>
+          <a:xfrm xmlns:a="http://schemas.openxmlformats.org/drawingml/2006/main">
+            <a:off x="1181100" y="2266950"/>
+            <a:ext cx="3867150" cy="428625"/>
           </a:xfrm>
           <a:prstGeom xmlns:a="http://schemas.openxmlformats.org/drawingml/2006/main" prst="rect">
             <a:avLst/>
@@ -8709,7 +8114,7 @@
           <a:lstStyle xmlns:a="http://schemas.openxmlformats.org/drawingml/2006/main"/>
           <a:p xmlns:a="http://schemas.openxmlformats.org/drawingml/2006/main">
             <a:pPr>
-              <a:defRPr sz="1350" b="0">
+              <a:defRPr sz="1425" b="0">
                 <a:solidFill>
                   <a:srgbClr val="18211F"/>
                 </a:solidFill>
@@ -8719,7 +8124,7 @@
               </a:defRPr>
             </a:pPr>
             <a:r>
-              <a:rPr sz="1350" b="0">
+              <a:rPr sz="1425" b="0">
                 <a:solidFill>
                   <a:srgbClr val="18211F"/>
                 </a:solidFill>
@@ -8727,7 +8132,7 @@
                 <a:ea typeface="Aptos"/>
                 <a:cs typeface="Aptos"/>
               </a:rPr>
-              <a:t>Time-consuming manual search</a:t>
+              <a:t>Typed catalogue search only</a:t>
             </a:r>
           </a:p>
         </p:txBody>
@@ -8737,18 +8142,18 @@
           <p:cNvPr id="10" name="">
             <a:extLst xmlns:a="http://schemas.openxmlformats.org/drawingml/2006/main">
               <a:ext uri="{FF2B5EF4-FFF2-40B4-BE49-F238E27FC236}">
-                <a16:creationId xmlns:a16="http://schemas.microsoft.com/office/drawing/2014/main" id="{6BC7B037-E70B-4C16-8173-515E3F6CB5CA}"/>
-              </a:ext>
-            </a:extLst>
-          </p:cNvPr>
-          <p:cNvSpPr>
-            <a:spLocks xmlns:a="http://schemas.openxmlformats.org/drawingml/2006/main" noGrp="1"/>
-          </p:cNvSpPr>
-          <p:nvPr/>
-        </p:nvSpPr>
-        <p:spPr>
-          <a:xfrm xmlns:a="http://schemas.openxmlformats.org/drawingml/2006/main">
-            <a:off x="952500" y="2657475"/>
+                <a16:creationId xmlns:a16="http://schemas.microsoft.com/office/drawing/2014/main" id="{2119B2B5-4FF9-4770-AEFE-7B0A14CAA4AD}"/>
+              </a:ext>
+            </a:extLst>
+          </p:cNvPr>
+          <p:cNvSpPr>
+            <a:spLocks xmlns:a="http://schemas.openxmlformats.org/drawingml/2006/main" noGrp="1"/>
+          </p:cNvSpPr>
+          <p:nvPr/>
+        </p:nvSpPr>
+        <p:spPr>
+          <a:xfrm xmlns:a="http://schemas.openxmlformats.org/drawingml/2006/main">
+            <a:off x="952500" y="2819400"/>
             <a:ext cx="95250" cy="95250"/>
           </a:xfrm>
           <a:prstGeom xmlns:a="http://schemas.openxmlformats.org/drawingml/2006/main" prst="ellipse">
@@ -8770,19 +8175,19 @@
           <p:cNvPr id="11" name="">
             <a:extLst xmlns:a="http://schemas.openxmlformats.org/drawingml/2006/main">
               <a:ext uri="{FF2B5EF4-FFF2-40B4-BE49-F238E27FC236}">
-                <a16:creationId xmlns:a16="http://schemas.microsoft.com/office/drawing/2014/main" id="{795D98D6-7A1C-4DE7-82F0-0A5B99CDEFE5}"/>
-              </a:ext>
-            </a:extLst>
-          </p:cNvPr>
-          <p:cNvSpPr>
-            <a:spLocks xmlns:a="http://schemas.openxmlformats.org/drawingml/2006/main" noGrp="1"/>
-          </p:cNvSpPr>
-          <p:nvPr/>
-        </p:nvSpPr>
-        <p:spPr>
-          <a:xfrm xmlns:a="http://schemas.openxmlformats.org/drawingml/2006/main">
-            <a:off x="1181100" y="2562225"/>
-            <a:ext cx="4229100" cy="400050"/>
+                <a16:creationId xmlns:a16="http://schemas.microsoft.com/office/drawing/2014/main" id="{984C8517-0D0B-401B-8A2E-47A50132CA59}"/>
+              </a:ext>
+            </a:extLst>
+          </p:cNvPr>
+          <p:cNvSpPr>
+            <a:spLocks xmlns:a="http://schemas.openxmlformats.org/drawingml/2006/main" noGrp="1"/>
+          </p:cNvSpPr>
+          <p:nvPr/>
+        </p:nvSpPr>
+        <p:spPr>
+          <a:xfrm xmlns:a="http://schemas.openxmlformats.org/drawingml/2006/main">
+            <a:off x="1181100" y="2724150"/>
+            <a:ext cx="3867150" cy="428625"/>
           </a:xfrm>
           <a:prstGeom xmlns:a="http://schemas.openxmlformats.org/drawingml/2006/main" prst="rect">
             <a:avLst/>
@@ -8798,7 +8203,7 @@
           <a:lstStyle xmlns:a="http://schemas.openxmlformats.org/drawingml/2006/main"/>
           <a:p xmlns:a="http://schemas.openxmlformats.org/drawingml/2006/main">
             <a:pPr>
-              <a:defRPr sz="1350" b="0">
+              <a:defRPr sz="1425" b="0">
                 <a:solidFill>
                   <a:srgbClr val="18211F"/>
                 </a:solidFill>
@@ -8808,7 +8213,7 @@
               </a:defRPr>
             </a:pPr>
             <a:r>
-              <a:rPr sz="1350" b="0">
+              <a:rPr sz="1425" b="0">
                 <a:solidFill>
                   <a:srgbClr val="18211F"/>
                 </a:solidFill>
@@ -8816,7 +8221,7 @@
                 <a:ea typeface="Aptos"/>
                 <a:cs typeface="Aptos"/>
               </a:rPr>
-              <a:t>Library schedule limitations</a:t>
+              <a:t>No voice search</a:t>
             </a:r>
           </a:p>
         </p:txBody>
@@ -8826,18 +8231,18 @@
           <p:cNvPr id="12" name="">
             <a:extLst xmlns:a="http://schemas.openxmlformats.org/drawingml/2006/main">
               <a:ext uri="{FF2B5EF4-FFF2-40B4-BE49-F238E27FC236}">
-                <a16:creationId xmlns:a16="http://schemas.microsoft.com/office/drawing/2014/main" id="{14DE44C6-1E60-4456-9079-6B82F6689AC3}"/>
-              </a:ext>
-            </a:extLst>
-          </p:cNvPr>
-          <p:cNvSpPr>
-            <a:spLocks xmlns:a="http://schemas.openxmlformats.org/drawingml/2006/main" noGrp="1"/>
-          </p:cNvSpPr>
-          <p:nvPr/>
-        </p:nvSpPr>
-        <p:spPr>
-          <a:xfrm xmlns:a="http://schemas.openxmlformats.org/drawingml/2006/main">
-            <a:off x="952500" y="3086100"/>
+                <a16:creationId xmlns:a16="http://schemas.microsoft.com/office/drawing/2014/main" id="{45C7457A-B6FF-4949-BF05-2D2F019175AB}"/>
+              </a:ext>
+            </a:extLst>
+          </p:cNvPr>
+          <p:cNvSpPr>
+            <a:spLocks xmlns:a="http://schemas.openxmlformats.org/drawingml/2006/main" noGrp="1"/>
+          </p:cNvSpPr>
+          <p:nvPr/>
+        </p:nvSpPr>
+        <p:spPr>
+          <a:xfrm xmlns:a="http://schemas.openxmlformats.org/drawingml/2006/main">
+            <a:off x="952500" y="3276600"/>
             <a:ext cx="95250" cy="95250"/>
           </a:xfrm>
           <a:prstGeom xmlns:a="http://schemas.openxmlformats.org/drawingml/2006/main" prst="ellipse">
@@ -8859,19 +8264,19 @@
           <p:cNvPr id="13" name="">
             <a:extLst xmlns:a="http://schemas.openxmlformats.org/drawingml/2006/main">
               <a:ext uri="{FF2B5EF4-FFF2-40B4-BE49-F238E27FC236}">
-                <a16:creationId xmlns:a16="http://schemas.microsoft.com/office/drawing/2014/main" id="{11BD68CE-39F8-44A7-8A59-F576DF6CC26E}"/>
-              </a:ext>
-            </a:extLst>
-          </p:cNvPr>
-          <p:cNvSpPr>
-            <a:spLocks xmlns:a="http://schemas.openxmlformats.org/drawingml/2006/main" noGrp="1"/>
-          </p:cNvSpPr>
-          <p:nvPr/>
-        </p:nvSpPr>
-        <p:spPr>
-          <a:xfrm xmlns:a="http://schemas.openxmlformats.org/drawingml/2006/main">
-            <a:off x="1181100" y="2990850"/>
-            <a:ext cx="4229100" cy="400050"/>
+                <a16:creationId xmlns:a16="http://schemas.microsoft.com/office/drawing/2014/main" id="{45C3200A-A3DD-4560-9536-9358AFDED635}"/>
+              </a:ext>
+            </a:extLst>
+          </p:cNvPr>
+          <p:cNvSpPr>
+            <a:spLocks xmlns:a="http://schemas.openxmlformats.org/drawingml/2006/main" noGrp="1"/>
+          </p:cNvSpPr>
+          <p:nvPr/>
+        </p:nvSpPr>
+        <p:spPr>
+          <a:xfrm xmlns:a="http://schemas.openxmlformats.org/drawingml/2006/main">
+            <a:off x="1181100" y="3181350"/>
+            <a:ext cx="3867150" cy="428625"/>
           </a:xfrm>
           <a:prstGeom xmlns:a="http://schemas.openxmlformats.org/drawingml/2006/main" prst="rect">
             <a:avLst/>
@@ -8887,7 +8292,7 @@
           <a:lstStyle xmlns:a="http://schemas.openxmlformats.org/drawingml/2006/main"/>
           <a:p xmlns:a="http://schemas.openxmlformats.org/drawingml/2006/main">
             <a:pPr>
-              <a:defRPr sz="1350" b="0">
+              <a:defRPr sz="1425" b="0">
                 <a:solidFill>
                   <a:srgbClr val="18211F"/>
                 </a:solidFill>
@@ -8897,7 +8302,7 @@
               </a:defRPr>
             </a:pPr>
             <a:r>
-              <a:rPr sz="1350" b="0">
+              <a:rPr sz="1425" b="0">
                 <a:solidFill>
                   <a:srgbClr val="18211F"/>
                 </a:solidFill>
@@ -8905,7 +8310,7 @@
                 <a:ea typeface="Aptos"/>
                 <a:cs typeface="Aptos"/>
               </a:rPr>
-              <a:t>Extra time and effort required</a:t>
+              <a:t>No audio-reading support</a:t>
             </a:r>
           </a:p>
         </p:txBody>
@@ -8915,18 +8320,18 @@
           <p:cNvPr id="14" name="">
             <a:extLst xmlns:a="http://schemas.openxmlformats.org/drawingml/2006/main">
               <a:ext uri="{FF2B5EF4-FFF2-40B4-BE49-F238E27FC236}">
-                <a16:creationId xmlns:a16="http://schemas.microsoft.com/office/drawing/2014/main" id="{6A5A3565-0084-4C0C-97E3-49F7A6A403C5}"/>
-              </a:ext>
-            </a:extLst>
-          </p:cNvPr>
-          <p:cNvSpPr>
-            <a:spLocks xmlns:a="http://schemas.openxmlformats.org/drawingml/2006/main" noGrp="1"/>
-          </p:cNvSpPr>
-          <p:nvPr/>
-        </p:nvSpPr>
-        <p:spPr>
-          <a:xfrm xmlns:a="http://schemas.openxmlformats.org/drawingml/2006/main">
-            <a:off x="952500" y="3514725"/>
+                <a16:creationId xmlns:a16="http://schemas.microsoft.com/office/drawing/2014/main" id="{D9C79842-E461-4B57-B900-197F80B2225B}"/>
+              </a:ext>
+            </a:extLst>
+          </p:cNvPr>
+          <p:cNvSpPr>
+            <a:spLocks xmlns:a="http://schemas.openxmlformats.org/drawingml/2006/main" noGrp="1"/>
+          </p:cNvSpPr>
+          <p:nvPr/>
+        </p:nvSpPr>
+        <p:spPr>
+          <a:xfrm xmlns:a="http://schemas.openxmlformats.org/drawingml/2006/main">
+            <a:off x="952500" y="3733800"/>
             <a:ext cx="95250" cy="95250"/>
           </a:xfrm>
           <a:prstGeom xmlns:a="http://schemas.openxmlformats.org/drawingml/2006/main" prst="ellipse">
@@ -8948,19 +8353,19 @@
           <p:cNvPr id="15" name="">
             <a:extLst xmlns:a="http://schemas.openxmlformats.org/drawingml/2006/main">
               <a:ext uri="{FF2B5EF4-FFF2-40B4-BE49-F238E27FC236}">
-                <a16:creationId xmlns:a16="http://schemas.microsoft.com/office/drawing/2014/main" id="{DC7CB836-50AF-48FD-A1D1-8E6830960351}"/>
-              </a:ext>
-            </a:extLst>
-          </p:cNvPr>
-          <p:cNvSpPr>
-            <a:spLocks xmlns:a="http://schemas.openxmlformats.org/drawingml/2006/main" noGrp="1"/>
-          </p:cNvSpPr>
-          <p:nvPr/>
-        </p:nvSpPr>
-        <p:spPr>
-          <a:xfrm xmlns:a="http://schemas.openxmlformats.org/drawingml/2006/main">
-            <a:off x="1181100" y="3419475"/>
-            <a:ext cx="4229100" cy="400050"/>
+                <a16:creationId xmlns:a16="http://schemas.microsoft.com/office/drawing/2014/main" id="{7AEF9D1D-7554-42B6-B45A-609A4235642E}"/>
+              </a:ext>
+            </a:extLst>
+          </p:cNvPr>
+          <p:cNvSpPr>
+            <a:spLocks xmlns:a="http://schemas.openxmlformats.org/drawingml/2006/main" noGrp="1"/>
+          </p:cNvSpPr>
+          <p:nvPr/>
+        </p:nvSpPr>
+        <p:spPr>
+          <a:xfrm xmlns:a="http://schemas.openxmlformats.org/drawingml/2006/main">
+            <a:off x="1181100" y="3638550"/>
+            <a:ext cx="3867150" cy="428625"/>
           </a:xfrm>
           <a:prstGeom xmlns:a="http://schemas.openxmlformats.org/drawingml/2006/main" prst="rect">
             <a:avLst/>
@@ -8976,7 +8381,7 @@
           <a:lstStyle xmlns:a="http://schemas.openxmlformats.org/drawingml/2006/main"/>
           <a:p xmlns:a="http://schemas.openxmlformats.org/drawingml/2006/main">
             <a:pPr>
-              <a:defRPr sz="1350" b="0">
+              <a:defRPr sz="1425" b="0">
                 <a:solidFill>
                   <a:srgbClr val="18211F"/>
                 </a:solidFill>
@@ -8986,7 +8391,7 @@
               </a:defRPr>
             </a:pPr>
             <a:r>
-              <a:rPr sz="1350" b="0">
+              <a:rPr sz="1425" b="0">
                 <a:solidFill>
                   <a:srgbClr val="18211F"/>
                 </a:solidFill>
@@ -8994,7 +8399,7 @@
                 <a:ea typeface="Aptos"/>
                 <a:cs typeface="Aptos"/>
               </a:rPr>
-              <a:t>Difficult for learners with reading challenges</a:t>
+              <a:t>Limited support for reading difficulties</a:t>
             </a:r>
           </a:p>
         </p:txBody>
@@ -9004,18 +8409,18 @@
           <p:cNvPr id="16" name="">
             <a:extLst xmlns:a="http://schemas.openxmlformats.org/drawingml/2006/main">
               <a:ext uri="{FF2B5EF4-FFF2-40B4-BE49-F238E27FC236}">
-                <a16:creationId xmlns:a16="http://schemas.microsoft.com/office/drawing/2014/main" id="{5A5EFE7F-CEA9-4546-B688-1D07A2317B5C}"/>
-              </a:ext>
-            </a:extLst>
-          </p:cNvPr>
-          <p:cNvSpPr>
-            <a:spLocks xmlns:a="http://schemas.openxmlformats.org/drawingml/2006/main" noGrp="1"/>
-          </p:cNvSpPr>
-          <p:nvPr/>
-        </p:nvSpPr>
-        <p:spPr>
-          <a:xfrm xmlns:a="http://schemas.openxmlformats.org/drawingml/2006/main">
-            <a:off x="952500" y="3943350"/>
+                <a16:creationId xmlns:a16="http://schemas.microsoft.com/office/drawing/2014/main" id="{9EA4E797-D33E-4AE7-B846-1197121A2B32}"/>
+              </a:ext>
+            </a:extLst>
+          </p:cNvPr>
+          <p:cNvSpPr>
+            <a:spLocks xmlns:a="http://schemas.openxmlformats.org/drawingml/2006/main" noGrp="1"/>
+          </p:cNvSpPr>
+          <p:nvPr/>
+        </p:nvSpPr>
+        <p:spPr>
+          <a:xfrm xmlns:a="http://schemas.openxmlformats.org/drawingml/2006/main">
+            <a:off x="952500" y="4191000"/>
             <a:ext cx="95250" cy="95250"/>
           </a:xfrm>
           <a:prstGeom xmlns:a="http://schemas.openxmlformats.org/drawingml/2006/main" prst="ellipse">
@@ -9037,19 +8442,19 @@
           <p:cNvPr id="17" name="">
             <a:extLst xmlns:a="http://schemas.openxmlformats.org/drawingml/2006/main">
               <a:ext uri="{FF2B5EF4-FFF2-40B4-BE49-F238E27FC236}">
-                <a16:creationId xmlns:a16="http://schemas.microsoft.com/office/drawing/2014/main" id="{797EB704-4CD3-4D47-9ED5-F4B0D27DCD8D}"/>
-              </a:ext>
-            </a:extLst>
-          </p:cNvPr>
-          <p:cNvSpPr>
-            <a:spLocks xmlns:a="http://schemas.openxmlformats.org/drawingml/2006/main" noGrp="1"/>
-          </p:cNvSpPr>
-          <p:nvPr/>
-        </p:nvSpPr>
-        <p:spPr>
-          <a:xfrm xmlns:a="http://schemas.openxmlformats.org/drawingml/2006/main">
-            <a:off x="1181100" y="3848100"/>
-            <a:ext cx="4229100" cy="400050"/>
+                <a16:creationId xmlns:a16="http://schemas.microsoft.com/office/drawing/2014/main" id="{3A3065E9-C0B4-4E85-863C-A67E8C49D9C4}"/>
+              </a:ext>
+            </a:extLst>
+          </p:cNvPr>
+          <p:cNvSpPr>
+            <a:spLocks xmlns:a="http://schemas.openxmlformats.org/drawingml/2006/main" noGrp="1"/>
+          </p:cNvSpPr>
+          <p:nvPr/>
+        </p:nvSpPr>
+        <p:spPr>
+          <a:xfrm xmlns:a="http://schemas.openxmlformats.org/drawingml/2006/main">
+            <a:off x="1181100" y="4095750"/>
+            <a:ext cx="3867150" cy="428625"/>
           </a:xfrm>
           <a:prstGeom xmlns:a="http://schemas.openxmlformats.org/drawingml/2006/main" prst="rect">
             <a:avLst/>
@@ -9065,7 +8470,7 @@
           <a:lstStyle xmlns:a="http://schemas.openxmlformats.org/drawingml/2006/main"/>
           <a:p xmlns:a="http://schemas.openxmlformats.org/drawingml/2006/main">
             <a:pPr>
-              <a:defRPr sz="1350" b="0">
+              <a:defRPr sz="1425" b="0">
                 <a:solidFill>
                   <a:srgbClr val="18211F"/>
                 </a:solidFill>
@@ -9075,7 +8480,7 @@
               </a:defRPr>
             </a:pPr>
             <a:r>
-              <a:rPr sz="1350" b="0">
+              <a:rPr sz="1425" b="0">
                 <a:solidFill>
                   <a:srgbClr val="18211F"/>
                 </a:solidFill>
@@ -9083,7 +8488,7 @@
                 <a:ea typeface="Aptos"/>
                 <a:cs typeface="Aptos"/>
               </a:rPr>
-              <a:t>Reading fatigue and low motivation</a:t>
+              <a:t>Less convenient access to resources</a:t>
             </a:r>
           </a:p>
         </p:txBody>
@@ -9093,112 +8498,23 @@
           <p:cNvPr id="18" name="">
             <a:extLst xmlns:a="http://schemas.openxmlformats.org/drawingml/2006/main">
               <a:ext uri="{FF2B5EF4-FFF2-40B4-BE49-F238E27FC236}">
-                <a16:creationId xmlns:a16="http://schemas.microsoft.com/office/drawing/2014/main" id="{AFA9C697-3CB2-45E5-BE70-560026983405}"/>
-              </a:ext>
-            </a:extLst>
-          </p:cNvPr>
-          <p:cNvSpPr>
-            <a:spLocks xmlns:a="http://schemas.openxmlformats.org/drawingml/2006/main" noGrp="1"/>
-          </p:cNvSpPr>
-          <p:nvPr/>
-        </p:nvSpPr>
-        <p:spPr>
-          <a:xfrm xmlns:a="http://schemas.openxmlformats.org/drawingml/2006/main">
-            <a:off x="952500" y="4371975"/>
-            <a:ext cx="95250" cy="95250"/>
-          </a:xfrm>
-          <a:prstGeom xmlns:a="http://schemas.openxmlformats.org/drawingml/2006/main" prst="ellipse">
-            <a:avLst/>
-          </a:prstGeom>
-          <a:solidFill xmlns:a="http://schemas.openxmlformats.org/drawingml/2006/main">
-            <a:srgbClr val="C7A044"/>
-          </a:solidFill>
-          <a:ln xmlns:a="http://schemas.openxmlformats.org/drawingml/2006/main" w="0">
-            <a:solidFill>
-              <a:srgbClr val="C7A044"/>
-            </a:solidFill>
-            <a:prstDash val="solid"/>
-          </a:ln>
-        </p:spPr>
-      </p:sp>
-      <p:sp>
-        <p:nvSpPr>
-          <p:cNvPr id="19" name="">
-            <a:extLst xmlns:a="http://schemas.openxmlformats.org/drawingml/2006/main">
-              <a:ext uri="{FF2B5EF4-FFF2-40B4-BE49-F238E27FC236}">
-                <a16:creationId xmlns:a16="http://schemas.microsoft.com/office/drawing/2014/main" id="{6D2F8D91-2F0D-4E25-9D43-4E2F52F3521B}"/>
-              </a:ext>
-            </a:extLst>
-          </p:cNvPr>
-          <p:cNvSpPr>
-            <a:spLocks xmlns:a="http://schemas.openxmlformats.org/drawingml/2006/main" noGrp="1"/>
-          </p:cNvSpPr>
-          <p:nvPr/>
-        </p:nvSpPr>
-        <p:spPr>
-          <a:xfrm xmlns:a="http://schemas.openxmlformats.org/drawingml/2006/main">
-            <a:off x="1181100" y="4276725"/>
-            <a:ext cx="4229100" cy="400050"/>
-          </a:xfrm>
-          <a:prstGeom xmlns:a="http://schemas.openxmlformats.org/drawingml/2006/main" prst="rect">
-            <a:avLst/>
-          </a:prstGeom>
-          <a:noFill xmlns:a="http://schemas.openxmlformats.org/drawingml/2006/main"/>
-          <a:ln xmlns:a="http://schemas.openxmlformats.org/drawingml/2006/main" w="0">
-            <a:noFill/>
-            <a:prstDash val="solid"/>
-          </a:ln>
-        </p:spPr>
-        <p:txBody>
-          <a:bodyPr xmlns:a="http://schemas.openxmlformats.org/drawingml/2006/main"/>
-          <a:lstStyle xmlns:a="http://schemas.openxmlformats.org/drawingml/2006/main"/>
-          <a:p xmlns:a="http://schemas.openxmlformats.org/drawingml/2006/main">
-            <a:pPr>
-              <a:defRPr sz="1350" b="0">
-                <a:solidFill>
-                  <a:srgbClr val="18211F"/>
-                </a:solidFill>
-                <a:latin typeface="Aptos"/>
-                <a:ea typeface="Aptos"/>
-                <a:cs typeface="Aptos"/>
-              </a:defRPr>
-            </a:pPr>
-            <a:r>
-              <a:rPr sz="1350" b="0">
-                <a:solidFill>
-                  <a:srgbClr val="18211F"/>
-                </a:solidFill>
-                <a:latin typeface="Aptos"/>
-                <a:ea typeface="Aptos"/>
-                <a:cs typeface="Aptos"/>
-              </a:rPr>
-              <a:t>Lack of voice-based search and audio-reading</a:t>
-            </a:r>
-          </a:p>
-        </p:txBody>
-      </p:sp>
-      <p:sp>
-        <p:nvSpPr>
-          <p:cNvPr id="20" name="">
-            <a:extLst xmlns:a="http://schemas.openxmlformats.org/drawingml/2006/main">
-              <a:ext uri="{FF2B5EF4-FFF2-40B4-BE49-F238E27FC236}">
-                <a16:creationId xmlns:a16="http://schemas.microsoft.com/office/drawing/2014/main" id="{8BA829A3-AB27-4292-8CC0-F664F20BB630}"/>
-              </a:ext>
-            </a:extLst>
-          </p:cNvPr>
-          <p:cNvSpPr>
-            <a:spLocks xmlns:a="http://schemas.openxmlformats.org/drawingml/2006/main" noGrp="1"/>
-          </p:cNvSpPr>
-          <p:nvPr/>
-        </p:nvSpPr>
-        <p:spPr>
-          <a:xfrm xmlns:a="http://schemas.openxmlformats.org/drawingml/2006/main">
-            <a:off x="895350" y="5257800"/>
-            <a:ext cx="9601200" cy="552450"/>
+                <a16:creationId xmlns:a16="http://schemas.microsoft.com/office/drawing/2014/main" id="{842CCE43-67E7-4667-BEC8-CDB5749B80BD}"/>
+              </a:ext>
+            </a:extLst>
+          </p:cNvPr>
+          <p:cNvSpPr>
+            <a:spLocks xmlns:a="http://schemas.openxmlformats.org/drawingml/2006/main" noGrp="1"/>
+          </p:cNvSpPr>
+          <p:nvPr/>
+        </p:nvSpPr>
+        <p:spPr>
+          <a:xfrm xmlns:a="http://schemas.openxmlformats.org/drawingml/2006/main">
+            <a:off x="876300" y="5257800"/>
+            <a:ext cx="9867900" cy="533400"/>
           </a:xfrm>
           <a:prstGeom xmlns:a="http://schemas.openxmlformats.org/drawingml/2006/main" prst="roundRect">
             <a:avLst>
-              <a:gd name="adj" fmla="val 13793"/>
+              <a:gd name="adj" fmla="val 14286"/>
             </a:avLst>
           </a:prstGeom>
           <a:solidFill xmlns:a="http://schemas.openxmlformats.org/drawingml/2006/main">
@@ -9214,21 +8530,21 @@
       </p:sp>
       <p:sp>
         <p:nvSpPr>
-          <p:cNvPr id="21" name="">
-            <a:extLst xmlns:a="http://schemas.openxmlformats.org/drawingml/2006/main">
-              <a:ext uri="{FF2B5EF4-FFF2-40B4-BE49-F238E27FC236}">
-                <a16:creationId xmlns:a16="http://schemas.microsoft.com/office/drawing/2014/main" id="{C5334EA3-F81B-4529-90FD-4573F0339D80}"/>
-              </a:ext>
-            </a:extLst>
-          </p:cNvPr>
-          <p:cNvSpPr>
-            <a:spLocks xmlns:a="http://schemas.openxmlformats.org/drawingml/2006/main" noGrp="1"/>
-          </p:cNvSpPr>
-          <p:nvPr/>
-        </p:nvSpPr>
-        <p:spPr>
-          <a:xfrm xmlns:a="http://schemas.openxmlformats.org/drawingml/2006/main">
-            <a:off x="1238250" y="5410200"/>
+          <p:cNvPr id="19" name="">
+            <a:extLst xmlns:a="http://schemas.openxmlformats.org/drawingml/2006/main">
+              <a:ext uri="{FF2B5EF4-FFF2-40B4-BE49-F238E27FC236}">
+                <a16:creationId xmlns:a16="http://schemas.microsoft.com/office/drawing/2014/main" id="{6ADE7622-C4C5-4015-B57A-E9AE6477FF6E}"/>
+              </a:ext>
+            </a:extLst>
+          </p:cNvPr>
+          <p:cNvSpPr>
+            <a:spLocks xmlns:a="http://schemas.openxmlformats.org/drawingml/2006/main" noGrp="1"/>
+          </p:cNvSpPr>
+          <p:nvPr/>
+        </p:nvSpPr>
+        <p:spPr>
+          <a:xfrm xmlns:a="http://schemas.openxmlformats.org/drawingml/2006/main">
+            <a:off x="1219200" y="5410200"/>
             <a:ext cx="8096250" cy="247650"/>
           </a:xfrm>
           <a:prstGeom xmlns:a="http://schemas.openxmlformats.org/drawingml/2006/main" prst="rect">
@@ -9263,34 +8579,34 @@
                 <a:ea typeface="Aptos"/>
                 <a:cs typeface="Aptos"/>
               </a:rPr>
-              <a:t>Result: reduced accessibility, convenience, and efficiency of educational resource use.</a:t>
+              <a:t>Need: easier book retrieval and more inclusive reading support.</a:t>
             </a:r>
           </a:p>
         </p:txBody>
       </p:sp>
       <p:pic>
         <p:nvPicPr>
-          <p:cNvPr id="44" name=""/>
+          <p:cNvPr id="40" name=""/>
           <p:cNvPicPr>
             <a:picLocks xmlns:a="http://schemas.openxmlformats.org/drawingml/2006/main" noChangeAspect="1"/>
           </p:cNvPicPr>
           <p:nvPr/>
         </p:nvPicPr>
         <p:blipFill>
-          <a:blip xmlns:r="http://schemas.openxmlformats.org/officeDocument/2006/relationships" xmlns:a="http://schemas.openxmlformats.org/drawingml/2006/main" r:embed="Rf02af0151eae4eee"/>
-          <a:srcRect xmlns:a="http://schemas.openxmlformats.org/drawingml/2006/main" l="6929" t="0" r="6929" b="0"/>
+          <a:blip xmlns:r="http://schemas.openxmlformats.org/officeDocument/2006/relationships" xmlns:a="http://schemas.openxmlformats.org/drawingml/2006/main" r:embed="R471c0bf9691743fd"/>
+          <a:srcRect xmlns:a="http://schemas.openxmlformats.org/drawingml/2006/main" l="11215" t="0" r="11215" b="0"/>
           <a:stretch xmlns:a="http://schemas.openxmlformats.org/drawingml/2006/main">
             <a:fillRect l="0" t="0" r="0" b="0"/>
           </a:stretch>
         </p:blipFill>
         <p:spPr>
           <a:xfrm xmlns:a="http://schemas.openxmlformats.org/drawingml/2006/main">
-            <a:off x="6115050" y="1600200"/>
-            <a:ext cx="4381500" cy="3390900"/>
+            <a:off x="5886450" y="1676400"/>
+            <a:ext cx="4895850" cy="3143250"/>
           </a:xfrm>
           <a:prstGeom xmlns:a="http://schemas.openxmlformats.org/drawingml/2006/main" prst="roundRect">
             <a:avLst>
-              <a:gd name="adj" fmla="val 1685"/>
+              <a:gd name="adj" fmla="val 1818"/>
             </a:avLst>
           </a:prstGeom>
         </p:spPr>
@@ -9298,7 +8614,7 @@
     </p:spTree>
     <p:extLst>
       <p:ext uri="{BB962C8B-B14F-4D97-AF65-F5344CB8AC3E}">
-        <p14:creationId xmlns:p14="http://schemas.microsoft.com/office/powerpoint/2010/main" val="1708646658"/>
+        <p14:creationId xmlns:p14="http://schemas.microsoft.com/office/powerpoint/2010/main" val="1801980841"/>
       </p:ext>
     </p:extLst>
   </p:cSld>
@@ -9311,7 +8627,7 @@
     <p:bg>
       <p:bgPr>
         <a:solidFill xmlns:a="http://schemas.openxmlformats.org/drawingml/2006/main">
-          <a:srgbClr val="0D3D2D"/>
+          <a:srgbClr val="FFFFFF"/>
         </a:solidFill>
       </p:bgPr>
     </p:bg>
@@ -9329,7 +8645,7 @@
           <p:cNvPr id="1" name="">
             <a:extLst xmlns:a="http://schemas.openxmlformats.org/drawingml/2006/main">
               <a:ext uri="{FF2B5EF4-FFF2-40B4-BE49-F238E27FC236}">
-                <a16:creationId xmlns:a16="http://schemas.microsoft.com/office/drawing/2014/main" id="{0A2870DA-557E-4651-B67B-777C5706B56F}"/>
+                <a16:creationId xmlns:a16="http://schemas.microsoft.com/office/drawing/2014/main" id="{DC07DC40-E437-4FCA-8785-23B42E9E1239}"/>
               </a:ext>
             </a:extLst>
           </p:cNvPr>
@@ -9341,7 +8657,40 @@
         <p:spPr>
           <a:xfrm xmlns:a="http://schemas.openxmlformats.org/drawingml/2006/main">
             <a:off x="0" y="0"/>
-            <a:ext cx="361950" cy="6858000"/>
+            <a:ext cx="285750" cy="6858000"/>
+          </a:xfrm>
+          <a:prstGeom xmlns:a="http://schemas.openxmlformats.org/drawingml/2006/main" prst="rect">
+            <a:avLst/>
+          </a:prstGeom>
+          <a:solidFill xmlns:a="http://schemas.openxmlformats.org/drawingml/2006/main">
+            <a:srgbClr val="0D3D2D"/>
+          </a:solidFill>
+          <a:ln xmlns:a="http://schemas.openxmlformats.org/drawingml/2006/main" w="0">
+            <a:solidFill>
+              <a:srgbClr val="0D3D2D"/>
+            </a:solidFill>
+            <a:prstDash val="solid"/>
+          </a:ln>
+        </p:spPr>
+      </p:sp>
+      <p:sp>
+        <p:nvSpPr>
+          <p:cNvPr id="2" name="">
+            <a:extLst xmlns:a="http://schemas.openxmlformats.org/drawingml/2006/main">
+              <a:ext uri="{FF2B5EF4-FFF2-40B4-BE49-F238E27FC236}">
+                <a16:creationId xmlns:a16="http://schemas.microsoft.com/office/drawing/2014/main" id="{AFD4B4B9-D9F9-447F-A0E7-A196D2D73377}"/>
+              </a:ext>
+            </a:extLst>
+          </p:cNvPr>
+          <p:cNvSpPr>
+            <a:spLocks xmlns:a="http://schemas.openxmlformats.org/drawingml/2006/main" noGrp="1"/>
+          </p:cNvSpPr>
+          <p:nvPr/>
+        </p:nvSpPr>
+        <p:spPr>
+          <a:xfrm xmlns:a="http://schemas.openxmlformats.org/drawingml/2006/main">
+            <a:off x="285750" y="0"/>
+            <a:ext cx="76200" cy="6858000"/>
           </a:xfrm>
           <a:prstGeom xmlns:a="http://schemas.openxmlformats.org/drawingml/2006/main" prst="rect">
             <a:avLst/>
@@ -9357,46 +8706,24 @@
           </a:ln>
         </p:spPr>
       </p:sp>
-      <p:pic>
-        <p:nvPicPr>
-          <p:cNvPr id="6" name=""/>
-          <p:cNvPicPr>
-            <a:picLocks xmlns:a="http://schemas.openxmlformats.org/drawingml/2006/main" noChangeAspect="1"/>
-          </p:cNvPicPr>
-          <p:nvPr/>
-        </p:nvPicPr>
-        <p:blipFill>
-          <a:blip xmlns:r="http://schemas.openxmlformats.org/officeDocument/2006/relationships" xmlns:a="http://schemas.openxmlformats.org/drawingml/2006/main" r:embed="Ra3ec19bd24b14cba"/>
-          <a:stretch xmlns:a="http://schemas.openxmlformats.org/drawingml/2006/main"/>
-        </p:blipFill>
-        <p:spPr>
-          <a:xfrm xmlns:a="http://schemas.openxmlformats.org/drawingml/2006/main">
-            <a:off x="838769" y="590550"/>
-            <a:ext cx="837063" cy="876300"/>
-          </a:xfrm>
-          <a:prstGeom xmlns:a="http://schemas.openxmlformats.org/drawingml/2006/main" prst="rect">
-            <a:avLst/>
-          </a:prstGeom>
-        </p:spPr>
-      </p:pic>
       <p:sp>
         <p:nvSpPr>
           <p:cNvPr id="3" name="">
             <a:extLst xmlns:a="http://schemas.openxmlformats.org/drawingml/2006/main">
               <a:ext uri="{FF2B5EF4-FFF2-40B4-BE49-F238E27FC236}">
-                <a16:creationId xmlns:a16="http://schemas.microsoft.com/office/drawing/2014/main" id="{250BB8AC-479B-4DEB-9B73-1C48EB1D4D35}"/>
-              </a:ext>
-            </a:extLst>
-          </p:cNvPr>
-          <p:cNvSpPr>
-            <a:spLocks xmlns:a="http://schemas.openxmlformats.org/drawingml/2006/main" noGrp="1"/>
-          </p:cNvSpPr>
-          <p:nvPr/>
-        </p:nvSpPr>
-        <p:spPr>
-          <a:xfrm xmlns:a="http://schemas.openxmlformats.org/drawingml/2006/main">
-            <a:off x="838200" y="2266950"/>
-            <a:ext cx="8382000" cy="685800"/>
+                <a16:creationId xmlns:a16="http://schemas.microsoft.com/office/drawing/2014/main" id="{6B069B08-0316-4A97-9B79-1BDD0CC21C50}"/>
+              </a:ext>
+            </a:extLst>
+          </p:cNvPr>
+          <p:cNvSpPr>
+            <a:spLocks xmlns:a="http://schemas.openxmlformats.org/drawingml/2006/main" noGrp="1"/>
+          </p:cNvSpPr>
+          <p:nvPr/>
+        </p:nvSpPr>
+        <p:spPr>
+          <a:xfrm xmlns:a="http://schemas.openxmlformats.org/drawingml/2006/main">
+            <a:off x="762000" y="400050"/>
+            <a:ext cx="4000500" cy="209550"/>
           </a:xfrm>
           <a:prstGeom xmlns:a="http://schemas.openxmlformats.org/drawingml/2006/main" prst="rect">
             <a:avLst/>
@@ -9412,9 +8739,65 @@
           <a:lstStyle xmlns:a="http://schemas.openxmlformats.org/drawingml/2006/main"/>
           <a:p xmlns:a="http://schemas.openxmlformats.org/drawingml/2006/main">
             <a:pPr>
-              <a:defRPr sz="3450" b="1">
-                <a:solidFill>
-                  <a:srgbClr val="FFFFFF"/>
+              <a:defRPr sz="900" b="1">
+                <a:solidFill>
+                  <a:srgbClr val="0D3D2D"/>
+                </a:solidFill>
+                <a:latin typeface="Aptos"/>
+                <a:ea typeface="Aptos"/>
+                <a:cs typeface="Aptos"/>
+              </a:defRPr>
+            </a:pPr>
+            <a:r>
+              <a:rPr sz="900" b="1">
+                <a:solidFill>
+                  <a:srgbClr val="0D3D2D"/>
+                </a:solidFill>
+                <a:latin typeface="Aptos"/>
+                <a:ea typeface="Aptos"/>
+                <a:cs typeface="Aptos"/>
+              </a:rPr>
+              <a:t>INES DIGITAL LIBRARY</a:t>
+            </a:r>
+          </a:p>
+        </p:txBody>
+      </p:sp>
+      <p:sp>
+        <p:nvSpPr>
+          <p:cNvPr id="4" name="">
+            <a:extLst xmlns:a="http://schemas.openxmlformats.org/drawingml/2006/main">
+              <a:ext uri="{FF2B5EF4-FFF2-40B4-BE49-F238E27FC236}">
+                <a16:creationId xmlns:a16="http://schemas.microsoft.com/office/drawing/2014/main" id="{BC74C414-0229-424A-9AAD-958D1E3AA1E2}"/>
+              </a:ext>
+            </a:extLst>
+          </p:cNvPr>
+          <p:cNvSpPr>
+            <a:spLocks xmlns:a="http://schemas.openxmlformats.org/drawingml/2006/main" noGrp="1"/>
+          </p:cNvSpPr>
+          <p:nvPr/>
+        </p:nvSpPr>
+        <p:spPr>
+          <a:xfrm xmlns:a="http://schemas.openxmlformats.org/drawingml/2006/main">
+            <a:off x="762000" y="742950"/>
+            <a:ext cx="8191500" cy="457200"/>
+          </a:xfrm>
+          <a:prstGeom xmlns:a="http://schemas.openxmlformats.org/drawingml/2006/main" prst="rect">
+            <a:avLst/>
+          </a:prstGeom>
+          <a:noFill xmlns:a="http://schemas.openxmlformats.org/drawingml/2006/main"/>
+          <a:ln xmlns:a="http://schemas.openxmlformats.org/drawingml/2006/main" w="0">
+            <a:noFill/>
+            <a:prstDash val="solid"/>
+          </a:ln>
+        </p:spPr>
+        <p:txBody>
+          <a:bodyPr xmlns:a="http://schemas.openxmlformats.org/drawingml/2006/main"/>
+          <a:lstStyle xmlns:a="http://schemas.openxmlformats.org/drawingml/2006/main"/>
+          <a:p xmlns:a="http://schemas.openxmlformats.org/drawingml/2006/main">
+            <a:pPr>
+              <a:defRPr sz="2475" b="1">
+                <a:solidFill>
+                  <a:srgbClr val="18211F"/>
                 </a:solidFill>
                 <a:latin typeface="Aptos Display"/>
                 <a:ea typeface="Aptos Display"/>
@@ -9422,37 +8805,90 @@
               </a:defRPr>
             </a:pPr>
             <a:r>
-              <a:rPr sz="3450" b="1">
-                <a:solidFill>
-                  <a:srgbClr val="FFFFFF"/>
+              <a:rPr sz="2475" b="1">
+                <a:solidFill>
+                  <a:srgbClr val="18211F"/>
                 </a:solidFill>
                 <a:latin typeface="Aptos Display"/>
                 <a:ea typeface="Aptos Display"/>
                 <a:cs typeface="Aptos Display"/>
               </a:rPr>
-              <a:t>TRANSFORMER-BASED DIGITAL LIBRARY</a:t>
-            </a:r>
-          </a:p>
-        </p:txBody>
-      </p:sp>
-      <p:sp>
-        <p:nvSpPr>
-          <p:cNvPr id="4" name="">
-            <a:extLst xmlns:a="http://schemas.openxmlformats.org/drawingml/2006/main">
-              <a:ext uri="{FF2B5EF4-FFF2-40B4-BE49-F238E27FC236}">
-                <a16:creationId xmlns:a16="http://schemas.microsoft.com/office/drawing/2014/main" id="{37CFDE58-F485-4056-B8BD-04F319FB8803}"/>
-              </a:ext>
-            </a:extLst>
-          </p:cNvPr>
-          <p:cNvSpPr>
-            <a:spLocks xmlns:a="http://schemas.openxmlformats.org/drawingml/2006/main" noGrp="1"/>
-          </p:cNvSpPr>
-          <p:nvPr/>
-        </p:nvSpPr>
-        <p:spPr>
-          <a:xfrm xmlns:a="http://schemas.openxmlformats.org/drawingml/2006/main">
-            <a:off x="876300" y="3143250"/>
-            <a:ext cx="7810500" cy="400050"/>
+              <a:t>Research Objectives</a:t>
+            </a:r>
+          </a:p>
+        </p:txBody>
+      </p:sp>
+      <p:sp>
+        <p:nvSpPr>
+          <p:cNvPr id="5" name="">
+            <a:extLst xmlns:a="http://schemas.openxmlformats.org/drawingml/2006/main">
+              <a:ext uri="{FF2B5EF4-FFF2-40B4-BE49-F238E27FC236}">
+                <a16:creationId xmlns:a16="http://schemas.microsoft.com/office/drawing/2014/main" id="{881E36F7-64D4-4DA6-B3D2-846C07640C91}"/>
+              </a:ext>
+            </a:extLst>
+          </p:cNvPr>
+          <p:cNvSpPr>
+            <a:spLocks xmlns:a="http://schemas.openxmlformats.org/drawingml/2006/main" noGrp="1"/>
+          </p:cNvSpPr>
+          <p:nvPr/>
+        </p:nvSpPr>
+        <p:spPr>
+          <a:xfrm xmlns:a="http://schemas.openxmlformats.org/drawingml/2006/main">
+            <a:off x="762000" y="1333500"/>
+            <a:ext cx="9810750" cy="0"/>
+          </a:xfrm>
+          <a:prstGeom xmlns:a="http://schemas.openxmlformats.org/drawingml/2006/main" prst="line">
+            <a:avLst/>
+          </a:prstGeom>
+          <a:noFill xmlns:a="http://schemas.openxmlformats.org/drawingml/2006/main"/>
+          <a:ln xmlns:a="http://schemas.openxmlformats.org/drawingml/2006/main" w="9525">
+            <a:solidFill>
+              <a:srgbClr val="D5E2DC"/>
+            </a:solidFill>
+            <a:prstDash val="solid"/>
+          </a:ln>
+        </p:spPr>
+      </p:sp>
+      <p:pic>
+        <p:nvPicPr>
+          <p:cNvPr id="23" name=""/>
+          <p:cNvPicPr>
+            <a:picLocks xmlns:a="http://schemas.openxmlformats.org/drawingml/2006/main" noChangeAspect="1"/>
+          </p:cNvPicPr>
+          <p:nvPr/>
+        </p:nvPicPr>
+        <p:blipFill>
+          <a:blip xmlns:r="http://schemas.openxmlformats.org/officeDocument/2006/relationships" xmlns:a="http://schemas.openxmlformats.org/drawingml/2006/main" r:embed="R90d3a01ba30a42b2"/>
+          <a:stretch xmlns:a="http://schemas.openxmlformats.org/drawingml/2006/main"/>
+        </p:blipFill>
+        <p:spPr>
+          <a:xfrm xmlns:a="http://schemas.openxmlformats.org/drawingml/2006/main">
+            <a:off x="10019163" y="419100"/>
+            <a:ext cx="764275" cy="800100"/>
+          </a:xfrm>
+          <a:prstGeom xmlns:a="http://schemas.openxmlformats.org/drawingml/2006/main" prst="rect">
+            <a:avLst/>
+          </a:prstGeom>
+        </p:spPr>
+      </p:pic>
+      <p:sp>
+        <p:nvSpPr>
+          <p:cNvPr id="7" name="">
+            <a:extLst xmlns:a="http://schemas.openxmlformats.org/drawingml/2006/main">
+              <a:ext uri="{FF2B5EF4-FFF2-40B4-BE49-F238E27FC236}">
+                <a16:creationId xmlns:a16="http://schemas.microsoft.com/office/drawing/2014/main" id="{07BD7F80-5B23-4636-AF5B-7C578CE82142}"/>
+              </a:ext>
+            </a:extLst>
+          </p:cNvPr>
+          <p:cNvSpPr>
+            <a:spLocks xmlns:a="http://schemas.openxmlformats.org/drawingml/2006/main" noGrp="1"/>
+          </p:cNvSpPr>
+          <p:nvPr/>
+        </p:nvSpPr>
+        <p:spPr>
+          <a:xfrm xmlns:a="http://schemas.openxmlformats.org/drawingml/2006/main">
+            <a:off x="895350" y="1581150"/>
+            <a:ext cx="2571750" cy="285750"/>
           </a:xfrm>
           <a:prstGeom xmlns:a="http://schemas.openxmlformats.org/drawingml/2006/main" prst="rect">
             <a:avLst/>
@@ -9468,9 +8904,9 @@
           <a:lstStyle xmlns:a="http://schemas.openxmlformats.org/drawingml/2006/main"/>
           <a:p xmlns:a="http://schemas.openxmlformats.org/drawingml/2006/main">
             <a:pPr>
-              <a:defRPr sz="1800" b="0">
-                <a:solidFill>
-                  <a:srgbClr val="DDEEE6"/>
+              <a:defRPr sz="1800" b="1">
+                <a:solidFill>
+                  <a:srgbClr val="0D3D2D"/>
                 </a:solidFill>
                 <a:latin typeface="Aptos"/>
                 <a:ea typeface="Aptos"/>
@@ -9478,15 +8914,483 @@
               </a:defRPr>
             </a:pPr>
             <a:r>
-              <a:rPr sz="1800" b="0">
-                <a:solidFill>
-                  <a:srgbClr val="DDEEE6"/>
+              <a:rPr sz="1800" b="1">
+                <a:solidFill>
+                  <a:srgbClr val="0D3D2D"/>
                 </a:solidFill>
                 <a:latin typeface="Aptos"/>
                 <a:ea typeface="Aptos"/>
                 <a:cs typeface="Aptos"/>
               </a:rPr>
-              <a:t>New system with speech-to-text and text-to-speech support</a:t>
+              <a:t>General objective</a:t>
+            </a:r>
+          </a:p>
+        </p:txBody>
+      </p:sp>
+      <p:sp>
+        <p:nvSpPr>
+          <p:cNvPr id="8" name="">
+            <a:extLst xmlns:a="http://schemas.openxmlformats.org/drawingml/2006/main">
+              <a:ext uri="{FF2B5EF4-FFF2-40B4-BE49-F238E27FC236}">
+                <a16:creationId xmlns:a16="http://schemas.microsoft.com/office/drawing/2014/main" id="{C8BA3DCC-D6E4-4BA0-98C1-2D56AC799974}"/>
+              </a:ext>
+            </a:extLst>
+          </p:cNvPr>
+          <p:cNvSpPr>
+            <a:spLocks xmlns:a="http://schemas.openxmlformats.org/drawingml/2006/main" noGrp="1"/>
+          </p:cNvSpPr>
+          <p:nvPr/>
+        </p:nvSpPr>
+        <p:spPr>
+          <a:xfrm xmlns:a="http://schemas.openxmlformats.org/drawingml/2006/main">
+            <a:off x="895350" y="1981200"/>
+            <a:ext cx="8572500" cy="685800"/>
+          </a:xfrm>
+          <a:prstGeom xmlns:a="http://schemas.openxmlformats.org/drawingml/2006/main" prst="rect">
+            <a:avLst/>
+          </a:prstGeom>
+          <a:noFill xmlns:a="http://schemas.openxmlformats.org/drawingml/2006/main"/>
+          <a:ln xmlns:a="http://schemas.openxmlformats.org/drawingml/2006/main" w="0">
+            <a:noFill/>
+            <a:prstDash val="solid"/>
+          </a:ln>
+        </p:spPr>
+        <p:txBody>
+          <a:bodyPr xmlns:a="http://schemas.openxmlformats.org/drawingml/2006/main"/>
+          <a:lstStyle xmlns:a="http://schemas.openxmlformats.org/drawingml/2006/main"/>
+          <a:p xmlns:a="http://schemas.openxmlformats.org/drawingml/2006/main">
+            <a:pPr>
+              <a:defRPr sz="1500" b="0">
+                <a:solidFill>
+                  <a:srgbClr val="18211F"/>
+                </a:solidFill>
+                <a:latin typeface="Aptos"/>
+                <a:ea typeface="Aptos"/>
+                <a:cs typeface="Aptos"/>
+              </a:defRPr>
+            </a:pPr>
+            <a:r>
+              <a:rPr sz="1500" b="0">
+                <a:solidFill>
+                  <a:srgbClr val="18211F"/>
+                </a:solidFill>
+                <a:latin typeface="Aptos"/>
+                <a:ea typeface="Aptos"/>
+                <a:cs typeface="Aptos"/>
+              </a:rPr>
+              <a:t>To design and develop a Transformer-Based Voice-Interactive System for Book Retrieval and Audio-Reading that enhances accessibility and inclusive learning within INES Ruhengeri Library.</a:t>
+            </a:r>
+          </a:p>
+        </p:txBody>
+      </p:sp>
+      <p:sp>
+        <p:nvSpPr>
+          <p:cNvPr id="9" name="">
+            <a:extLst xmlns:a="http://schemas.openxmlformats.org/drawingml/2006/main">
+              <a:ext uri="{FF2B5EF4-FFF2-40B4-BE49-F238E27FC236}">
+                <a16:creationId xmlns:a16="http://schemas.microsoft.com/office/drawing/2014/main" id="{04FF0699-9289-4FDB-BBB8-24DF2D0DF19B}"/>
+              </a:ext>
+            </a:extLst>
+          </p:cNvPr>
+          <p:cNvSpPr>
+            <a:spLocks xmlns:a="http://schemas.openxmlformats.org/drawingml/2006/main" noGrp="1"/>
+          </p:cNvSpPr>
+          <p:nvPr/>
+        </p:nvSpPr>
+        <p:spPr>
+          <a:xfrm xmlns:a="http://schemas.openxmlformats.org/drawingml/2006/main">
+            <a:off x="895350" y="3067050"/>
+            <a:ext cx="2571750" cy="285750"/>
+          </a:xfrm>
+          <a:prstGeom xmlns:a="http://schemas.openxmlformats.org/drawingml/2006/main" prst="rect">
+            <a:avLst/>
+          </a:prstGeom>
+          <a:noFill xmlns:a="http://schemas.openxmlformats.org/drawingml/2006/main"/>
+          <a:ln xmlns:a="http://schemas.openxmlformats.org/drawingml/2006/main" w="0">
+            <a:noFill/>
+            <a:prstDash val="solid"/>
+          </a:ln>
+        </p:spPr>
+        <p:txBody>
+          <a:bodyPr xmlns:a="http://schemas.openxmlformats.org/drawingml/2006/main"/>
+          <a:lstStyle xmlns:a="http://schemas.openxmlformats.org/drawingml/2006/main"/>
+          <a:p xmlns:a="http://schemas.openxmlformats.org/drawingml/2006/main">
+            <a:pPr>
+              <a:defRPr sz="1800" b="1">
+                <a:solidFill>
+                  <a:srgbClr val="0D3D2D"/>
+                </a:solidFill>
+                <a:latin typeface="Aptos"/>
+                <a:ea typeface="Aptos"/>
+                <a:cs typeface="Aptos"/>
+              </a:defRPr>
+            </a:pPr>
+            <a:r>
+              <a:rPr sz="1800" b="1">
+                <a:solidFill>
+                  <a:srgbClr val="0D3D2D"/>
+                </a:solidFill>
+                <a:latin typeface="Aptos"/>
+                <a:ea typeface="Aptos"/>
+                <a:cs typeface="Aptos"/>
+              </a:rPr>
+              <a:t>Specific objectives</a:t>
+            </a:r>
+          </a:p>
+        </p:txBody>
+      </p:sp>
+      <p:sp>
+        <p:nvSpPr>
+          <p:cNvPr id="10" name="">
+            <a:extLst xmlns:a="http://schemas.openxmlformats.org/drawingml/2006/main">
+              <a:ext uri="{FF2B5EF4-FFF2-40B4-BE49-F238E27FC236}">
+                <a16:creationId xmlns:a16="http://schemas.microsoft.com/office/drawing/2014/main" id="{821E85AA-1C4D-4364-A863-B2816AEF515E}"/>
+              </a:ext>
+            </a:extLst>
+          </p:cNvPr>
+          <p:cNvSpPr>
+            <a:spLocks xmlns:a="http://schemas.openxmlformats.org/drawingml/2006/main" noGrp="1"/>
+          </p:cNvSpPr>
+          <p:nvPr/>
+        </p:nvSpPr>
+        <p:spPr>
+          <a:xfrm xmlns:a="http://schemas.openxmlformats.org/drawingml/2006/main">
+            <a:off x="952500" y="3638550"/>
+            <a:ext cx="95250" cy="95250"/>
+          </a:xfrm>
+          <a:prstGeom xmlns:a="http://schemas.openxmlformats.org/drawingml/2006/main" prst="ellipse">
+            <a:avLst/>
+          </a:prstGeom>
+          <a:solidFill xmlns:a="http://schemas.openxmlformats.org/drawingml/2006/main">
+            <a:srgbClr val="C7A044"/>
+          </a:solidFill>
+          <a:ln xmlns:a="http://schemas.openxmlformats.org/drawingml/2006/main" w="0">
+            <a:solidFill>
+              <a:srgbClr val="C7A044"/>
+            </a:solidFill>
+            <a:prstDash val="solid"/>
+          </a:ln>
+        </p:spPr>
+      </p:sp>
+      <p:sp>
+        <p:nvSpPr>
+          <p:cNvPr id="11" name="">
+            <a:extLst xmlns:a="http://schemas.openxmlformats.org/drawingml/2006/main">
+              <a:ext uri="{FF2B5EF4-FFF2-40B4-BE49-F238E27FC236}">
+                <a16:creationId xmlns:a16="http://schemas.microsoft.com/office/drawing/2014/main" id="{A0B95B38-C9EB-4A8C-A4B2-BD1BE837E9A7}"/>
+              </a:ext>
+            </a:extLst>
+          </p:cNvPr>
+          <p:cNvSpPr>
+            <a:spLocks xmlns:a="http://schemas.openxmlformats.org/drawingml/2006/main" noGrp="1"/>
+          </p:cNvSpPr>
+          <p:nvPr/>
+        </p:nvSpPr>
+        <p:spPr>
+          <a:xfrm xmlns:a="http://schemas.openxmlformats.org/drawingml/2006/main">
+            <a:off x="1181100" y="3543300"/>
+            <a:ext cx="8343900" cy="447675"/>
+          </a:xfrm>
+          <a:prstGeom xmlns:a="http://schemas.openxmlformats.org/drawingml/2006/main" prst="rect">
+            <a:avLst/>
+          </a:prstGeom>
+          <a:noFill xmlns:a="http://schemas.openxmlformats.org/drawingml/2006/main"/>
+          <a:ln xmlns:a="http://schemas.openxmlformats.org/drawingml/2006/main" w="0">
+            <a:noFill/>
+            <a:prstDash val="solid"/>
+          </a:ln>
+        </p:spPr>
+        <p:txBody>
+          <a:bodyPr xmlns:a="http://schemas.openxmlformats.org/drawingml/2006/main"/>
+          <a:lstStyle xmlns:a="http://schemas.openxmlformats.org/drawingml/2006/main"/>
+          <a:p xmlns:a="http://schemas.openxmlformats.org/drawingml/2006/main">
+            <a:pPr>
+              <a:defRPr sz="1425" b="0">
+                <a:solidFill>
+                  <a:srgbClr val="18211F"/>
+                </a:solidFill>
+                <a:latin typeface="Aptos"/>
+                <a:ea typeface="Aptos"/>
+                <a:cs typeface="Aptos"/>
+              </a:defRPr>
+            </a:pPr>
+            <a:r>
+              <a:rPr sz="1425" b="0">
+                <a:solidFill>
+                  <a:srgbClr val="18211F"/>
+                </a:solidFill>
+                <a:latin typeface="Aptos"/>
+                <a:ea typeface="Aptos"/>
+                <a:cs typeface="Aptos"/>
+              </a:rPr>
+              <a:t>Collect and analyze accessibility and digital-library requirements.</a:t>
+            </a:r>
+          </a:p>
+        </p:txBody>
+      </p:sp>
+      <p:sp>
+        <p:nvSpPr>
+          <p:cNvPr id="12" name="">
+            <a:extLst xmlns:a="http://schemas.openxmlformats.org/drawingml/2006/main">
+              <a:ext uri="{FF2B5EF4-FFF2-40B4-BE49-F238E27FC236}">
+                <a16:creationId xmlns:a16="http://schemas.microsoft.com/office/drawing/2014/main" id="{329EFD95-9AF7-4DA8-8340-B74952B3BF03}"/>
+              </a:ext>
+            </a:extLst>
+          </p:cNvPr>
+          <p:cNvSpPr>
+            <a:spLocks xmlns:a="http://schemas.openxmlformats.org/drawingml/2006/main" noGrp="1"/>
+          </p:cNvSpPr>
+          <p:nvPr/>
+        </p:nvSpPr>
+        <p:spPr>
+          <a:xfrm xmlns:a="http://schemas.openxmlformats.org/drawingml/2006/main">
+            <a:off x="952500" y="4114800"/>
+            <a:ext cx="95250" cy="95250"/>
+          </a:xfrm>
+          <a:prstGeom xmlns:a="http://schemas.openxmlformats.org/drawingml/2006/main" prst="ellipse">
+            <a:avLst/>
+          </a:prstGeom>
+          <a:solidFill xmlns:a="http://schemas.openxmlformats.org/drawingml/2006/main">
+            <a:srgbClr val="C7A044"/>
+          </a:solidFill>
+          <a:ln xmlns:a="http://schemas.openxmlformats.org/drawingml/2006/main" w="0">
+            <a:solidFill>
+              <a:srgbClr val="C7A044"/>
+            </a:solidFill>
+            <a:prstDash val="solid"/>
+          </a:ln>
+        </p:spPr>
+      </p:sp>
+      <p:sp>
+        <p:nvSpPr>
+          <p:cNvPr id="13" name="">
+            <a:extLst xmlns:a="http://schemas.openxmlformats.org/drawingml/2006/main">
+              <a:ext uri="{FF2B5EF4-FFF2-40B4-BE49-F238E27FC236}">
+                <a16:creationId xmlns:a16="http://schemas.microsoft.com/office/drawing/2014/main" id="{2A1B2045-F46B-4103-B89E-85B465C4DC0C}"/>
+              </a:ext>
+            </a:extLst>
+          </p:cNvPr>
+          <p:cNvSpPr>
+            <a:spLocks xmlns:a="http://schemas.openxmlformats.org/drawingml/2006/main" noGrp="1"/>
+          </p:cNvSpPr>
+          <p:nvPr/>
+        </p:nvSpPr>
+        <p:spPr>
+          <a:xfrm xmlns:a="http://schemas.openxmlformats.org/drawingml/2006/main">
+            <a:off x="1181100" y="4019550"/>
+            <a:ext cx="8343900" cy="447675"/>
+          </a:xfrm>
+          <a:prstGeom xmlns:a="http://schemas.openxmlformats.org/drawingml/2006/main" prst="rect">
+            <a:avLst/>
+          </a:prstGeom>
+          <a:noFill xmlns:a="http://schemas.openxmlformats.org/drawingml/2006/main"/>
+          <a:ln xmlns:a="http://schemas.openxmlformats.org/drawingml/2006/main" w="0">
+            <a:noFill/>
+            <a:prstDash val="solid"/>
+          </a:ln>
+        </p:spPr>
+        <p:txBody>
+          <a:bodyPr xmlns:a="http://schemas.openxmlformats.org/drawingml/2006/main"/>
+          <a:lstStyle xmlns:a="http://schemas.openxmlformats.org/drawingml/2006/main"/>
+          <a:p xmlns:a="http://schemas.openxmlformats.org/drawingml/2006/main">
+            <a:pPr>
+              <a:defRPr sz="1425" b="0">
+                <a:solidFill>
+                  <a:srgbClr val="18211F"/>
+                </a:solidFill>
+                <a:latin typeface="Aptos"/>
+                <a:ea typeface="Aptos"/>
+                <a:cs typeface="Aptos"/>
+              </a:defRPr>
+            </a:pPr>
+            <a:r>
+              <a:rPr sz="1425" b="0">
+                <a:solidFill>
+                  <a:srgbClr val="18211F"/>
+                </a:solidFill>
+                <a:latin typeface="Aptos"/>
+                <a:ea typeface="Aptos"/>
+                <a:cs typeface="Aptos"/>
+              </a:rPr>
+              <a:t>Design and implement Transformer-based STT and TTS support.</a:t>
+            </a:r>
+          </a:p>
+        </p:txBody>
+      </p:sp>
+      <p:sp>
+        <p:nvSpPr>
+          <p:cNvPr id="14" name="">
+            <a:extLst xmlns:a="http://schemas.openxmlformats.org/drawingml/2006/main">
+              <a:ext uri="{FF2B5EF4-FFF2-40B4-BE49-F238E27FC236}">
+                <a16:creationId xmlns:a16="http://schemas.microsoft.com/office/drawing/2014/main" id="{46442095-FA23-461C-BB89-2E1FC306AAEF}"/>
+              </a:ext>
+            </a:extLst>
+          </p:cNvPr>
+          <p:cNvSpPr>
+            <a:spLocks xmlns:a="http://schemas.openxmlformats.org/drawingml/2006/main" noGrp="1"/>
+          </p:cNvSpPr>
+          <p:nvPr/>
+        </p:nvSpPr>
+        <p:spPr>
+          <a:xfrm xmlns:a="http://schemas.openxmlformats.org/drawingml/2006/main">
+            <a:off x="952500" y="4591050"/>
+            <a:ext cx="95250" cy="95250"/>
+          </a:xfrm>
+          <a:prstGeom xmlns:a="http://schemas.openxmlformats.org/drawingml/2006/main" prst="ellipse">
+            <a:avLst/>
+          </a:prstGeom>
+          <a:solidFill xmlns:a="http://schemas.openxmlformats.org/drawingml/2006/main">
+            <a:srgbClr val="C7A044"/>
+          </a:solidFill>
+          <a:ln xmlns:a="http://schemas.openxmlformats.org/drawingml/2006/main" w="0">
+            <a:solidFill>
+              <a:srgbClr val="C7A044"/>
+            </a:solidFill>
+            <a:prstDash val="solid"/>
+          </a:ln>
+        </p:spPr>
+      </p:sp>
+      <p:sp>
+        <p:nvSpPr>
+          <p:cNvPr id="15" name="">
+            <a:extLst xmlns:a="http://schemas.openxmlformats.org/drawingml/2006/main">
+              <a:ext uri="{FF2B5EF4-FFF2-40B4-BE49-F238E27FC236}">
+                <a16:creationId xmlns:a16="http://schemas.microsoft.com/office/drawing/2014/main" id="{702AD3C0-824A-4A42-9B74-B4A37B9840B8}"/>
+              </a:ext>
+            </a:extLst>
+          </p:cNvPr>
+          <p:cNvSpPr>
+            <a:spLocks xmlns:a="http://schemas.openxmlformats.org/drawingml/2006/main" noGrp="1"/>
+          </p:cNvSpPr>
+          <p:nvPr/>
+        </p:nvSpPr>
+        <p:spPr>
+          <a:xfrm xmlns:a="http://schemas.openxmlformats.org/drawingml/2006/main">
+            <a:off x="1181100" y="4495800"/>
+            <a:ext cx="8343900" cy="447675"/>
+          </a:xfrm>
+          <a:prstGeom xmlns:a="http://schemas.openxmlformats.org/drawingml/2006/main" prst="rect">
+            <a:avLst/>
+          </a:prstGeom>
+          <a:noFill xmlns:a="http://schemas.openxmlformats.org/drawingml/2006/main"/>
+          <a:ln xmlns:a="http://schemas.openxmlformats.org/drawingml/2006/main" w="0">
+            <a:noFill/>
+            <a:prstDash val="solid"/>
+          </a:ln>
+        </p:spPr>
+        <p:txBody>
+          <a:bodyPr xmlns:a="http://schemas.openxmlformats.org/drawingml/2006/main"/>
+          <a:lstStyle xmlns:a="http://schemas.openxmlformats.org/drawingml/2006/main"/>
+          <a:p xmlns:a="http://schemas.openxmlformats.org/drawingml/2006/main">
+            <a:pPr>
+              <a:defRPr sz="1425" b="0">
+                <a:solidFill>
+                  <a:srgbClr val="18211F"/>
+                </a:solidFill>
+                <a:latin typeface="Aptos"/>
+                <a:ea typeface="Aptos"/>
+                <a:cs typeface="Aptos"/>
+              </a:defRPr>
+            </a:pPr>
+            <a:r>
+              <a:rPr sz="1425" b="0">
+                <a:solidFill>
+                  <a:srgbClr val="18211F"/>
+                </a:solidFill>
+                <a:latin typeface="Aptos"/>
+                <a:ea typeface="Aptos"/>
+                <a:cs typeface="Aptos"/>
+              </a:rPr>
+              <a:t>Develop authentication and role-based access control.</a:t>
+            </a:r>
+          </a:p>
+        </p:txBody>
+      </p:sp>
+      <p:sp>
+        <p:nvSpPr>
+          <p:cNvPr id="16" name="">
+            <a:extLst xmlns:a="http://schemas.openxmlformats.org/drawingml/2006/main">
+              <a:ext uri="{FF2B5EF4-FFF2-40B4-BE49-F238E27FC236}">
+                <a16:creationId xmlns:a16="http://schemas.microsoft.com/office/drawing/2014/main" id="{06FCDE94-F520-49A3-A151-31E2291CEE22}"/>
+              </a:ext>
+            </a:extLst>
+          </p:cNvPr>
+          <p:cNvSpPr>
+            <a:spLocks xmlns:a="http://schemas.openxmlformats.org/drawingml/2006/main" noGrp="1"/>
+          </p:cNvSpPr>
+          <p:nvPr/>
+        </p:nvSpPr>
+        <p:spPr>
+          <a:xfrm xmlns:a="http://schemas.openxmlformats.org/drawingml/2006/main">
+            <a:off x="952500" y="5067300"/>
+            <a:ext cx="95250" cy="95250"/>
+          </a:xfrm>
+          <a:prstGeom xmlns:a="http://schemas.openxmlformats.org/drawingml/2006/main" prst="ellipse">
+            <a:avLst/>
+          </a:prstGeom>
+          <a:solidFill xmlns:a="http://schemas.openxmlformats.org/drawingml/2006/main">
+            <a:srgbClr val="C7A044"/>
+          </a:solidFill>
+          <a:ln xmlns:a="http://schemas.openxmlformats.org/drawingml/2006/main" w="0">
+            <a:solidFill>
+              <a:srgbClr val="C7A044"/>
+            </a:solidFill>
+            <a:prstDash val="solid"/>
+          </a:ln>
+        </p:spPr>
+      </p:sp>
+      <p:sp>
+        <p:nvSpPr>
+          <p:cNvPr id="17" name="">
+            <a:extLst xmlns:a="http://schemas.openxmlformats.org/drawingml/2006/main">
+              <a:ext uri="{FF2B5EF4-FFF2-40B4-BE49-F238E27FC236}">
+                <a16:creationId xmlns:a16="http://schemas.microsoft.com/office/drawing/2014/main" id="{48C8DCCB-0289-4AD8-B9FE-BB2E277A6AEA}"/>
+              </a:ext>
+            </a:extLst>
+          </p:cNvPr>
+          <p:cNvSpPr>
+            <a:spLocks xmlns:a="http://schemas.openxmlformats.org/drawingml/2006/main" noGrp="1"/>
+          </p:cNvSpPr>
+          <p:nvPr/>
+        </p:nvSpPr>
+        <p:spPr>
+          <a:xfrm xmlns:a="http://schemas.openxmlformats.org/drawingml/2006/main">
+            <a:off x="1181100" y="4972050"/>
+            <a:ext cx="8343900" cy="447675"/>
+          </a:xfrm>
+          <a:prstGeom xmlns:a="http://schemas.openxmlformats.org/drawingml/2006/main" prst="rect">
+            <a:avLst/>
+          </a:prstGeom>
+          <a:noFill xmlns:a="http://schemas.openxmlformats.org/drawingml/2006/main"/>
+          <a:ln xmlns:a="http://schemas.openxmlformats.org/drawingml/2006/main" w="0">
+            <a:noFill/>
+            <a:prstDash val="solid"/>
+          </a:ln>
+        </p:spPr>
+        <p:txBody>
+          <a:bodyPr xmlns:a="http://schemas.openxmlformats.org/drawingml/2006/main"/>
+          <a:lstStyle xmlns:a="http://schemas.openxmlformats.org/drawingml/2006/main"/>
+          <a:p xmlns:a="http://schemas.openxmlformats.org/drawingml/2006/main">
+            <a:pPr>
+              <a:defRPr sz="1425" b="0">
+                <a:solidFill>
+                  <a:srgbClr val="18211F"/>
+                </a:solidFill>
+                <a:latin typeface="Aptos"/>
+                <a:ea typeface="Aptos"/>
+                <a:cs typeface="Aptos"/>
+              </a:defRPr>
+            </a:pPr>
+            <a:r>
+              <a:rPr sz="1425" b="0">
+                <a:solidFill>
+                  <a:srgbClr val="18211F"/>
+                </a:solidFill>
+                <a:latin typeface="Aptos"/>
+                <a:ea typeface="Aptos"/>
+                <a:cs typeface="Aptos"/>
+              </a:rPr>
+              <a:t>Evaluate performance, usability, and resource accessibility.</a:t>
             </a:r>
           </a:p>
         </p:txBody>
@@ -9494,7 +9398,7 @@
     </p:spTree>
     <p:extLst>
       <p:ext uri="{BB962C8B-B14F-4D97-AF65-F5344CB8AC3E}">
-        <p14:creationId xmlns:p14="http://schemas.microsoft.com/office/powerpoint/2010/main" val="244154708"/>
+        <p14:creationId xmlns:p14="http://schemas.microsoft.com/office/powerpoint/2010/main" val="2039743280"/>
       </p:ext>
     </p:extLst>
   </p:cSld>
@@ -9525,7 +9429,7 @@
           <p:cNvPr id="1" name="">
             <a:extLst xmlns:a="http://schemas.openxmlformats.org/drawingml/2006/main">
               <a:ext uri="{FF2B5EF4-FFF2-40B4-BE49-F238E27FC236}">
-                <a16:creationId xmlns:a16="http://schemas.microsoft.com/office/drawing/2014/main" id="{83164C29-0D06-4EFC-9024-EC0A9AE998EC}"/>
+                <a16:creationId xmlns:a16="http://schemas.microsoft.com/office/drawing/2014/main" id="{9E779585-CBBD-487A-B2A0-6314128AA719}"/>
               </a:ext>
             </a:extLst>
           </p:cNvPr>
@@ -9558,7 +9462,7 @@
           <p:cNvPr id="2" name="">
             <a:extLst xmlns:a="http://schemas.openxmlformats.org/drawingml/2006/main">
               <a:ext uri="{FF2B5EF4-FFF2-40B4-BE49-F238E27FC236}">
-                <a16:creationId xmlns:a16="http://schemas.microsoft.com/office/drawing/2014/main" id="{4BBA2442-6B38-46DC-A9DF-2199CC09218D}"/>
+                <a16:creationId xmlns:a16="http://schemas.microsoft.com/office/drawing/2014/main" id="{DB07190B-A8C2-431D-AA73-8518E7C1B7A9}"/>
               </a:ext>
             </a:extLst>
           </p:cNvPr>
@@ -9591,7 +9495,7 @@
           <p:cNvPr id="3" name="">
             <a:extLst xmlns:a="http://schemas.openxmlformats.org/drawingml/2006/main">
               <a:ext uri="{FF2B5EF4-FFF2-40B4-BE49-F238E27FC236}">
-                <a16:creationId xmlns:a16="http://schemas.microsoft.com/office/drawing/2014/main" id="{47B4389B-4088-4332-BB50-F7E9BBC3165D}"/>
+                <a16:creationId xmlns:a16="http://schemas.microsoft.com/office/drawing/2014/main" id="{8B25C1F1-963A-49D5-AEAA-5AF82A5496C3}"/>
               </a:ext>
             </a:extLst>
           </p:cNvPr>
@@ -9647,7 +9551,7 @@
           <p:cNvPr id="4" name="">
             <a:extLst xmlns:a="http://schemas.openxmlformats.org/drawingml/2006/main">
               <a:ext uri="{FF2B5EF4-FFF2-40B4-BE49-F238E27FC236}">
-                <a16:creationId xmlns:a16="http://schemas.microsoft.com/office/drawing/2014/main" id="{BAD24FB8-64C1-479D-9EF8-1CD9820CAE25}"/>
+                <a16:creationId xmlns:a16="http://schemas.microsoft.com/office/drawing/2014/main" id="{721FADFB-1B15-4A68-A3FF-B848EF9F4249}"/>
               </a:ext>
             </a:extLst>
           </p:cNvPr>
@@ -9703,7 +9607,7 @@
           <p:cNvPr id="5" name="">
             <a:extLst xmlns:a="http://schemas.openxmlformats.org/drawingml/2006/main">
               <a:ext uri="{FF2B5EF4-FFF2-40B4-BE49-F238E27FC236}">
-                <a16:creationId xmlns:a16="http://schemas.microsoft.com/office/drawing/2014/main" id="{369ABA83-EA9D-4C26-89A7-A1310D3D26AD}"/>
+                <a16:creationId xmlns:a16="http://schemas.microsoft.com/office/drawing/2014/main" id="{40A62FF8-BB47-4837-9D69-4896D6460884}"/>
               </a:ext>
             </a:extLst>
           </p:cNvPr>
@@ -9738,7 +9642,7 @@
           <p:nvPr/>
         </p:nvPicPr>
         <p:blipFill>
-          <a:blip xmlns:r="http://schemas.openxmlformats.org/officeDocument/2006/relationships" xmlns:a="http://schemas.openxmlformats.org/drawingml/2006/main" r:embed="R24357c0618f64855"/>
+          <a:blip xmlns:r="http://schemas.openxmlformats.org/officeDocument/2006/relationships" xmlns:a="http://schemas.openxmlformats.org/drawingml/2006/main" r:embed="R350ba9320cd44c7e"/>
           <a:stretch xmlns:a="http://schemas.openxmlformats.org/drawingml/2006/main"/>
         </p:blipFill>
         <p:spPr>
@@ -9756,7 +9660,7 @@
           <p:cNvPr id="7" name="">
             <a:extLst xmlns:a="http://schemas.openxmlformats.org/drawingml/2006/main">
               <a:ext uri="{FF2B5EF4-FFF2-40B4-BE49-F238E27FC236}">
-                <a16:creationId xmlns:a16="http://schemas.microsoft.com/office/drawing/2014/main" id="{DED07EAF-4E23-40F8-B42D-DAFF611DBF14}"/>
+                <a16:creationId xmlns:a16="http://schemas.microsoft.com/office/drawing/2014/main" id="{9AD75935-A9FD-4073-8AA8-4A9D4B1D99B1}"/>
               </a:ext>
             </a:extLst>
           </p:cNvPr>
@@ -9791,7 +9695,7 @@
           <p:cNvPr id="8" name="">
             <a:extLst xmlns:a="http://schemas.openxmlformats.org/drawingml/2006/main">
               <a:ext uri="{FF2B5EF4-FFF2-40B4-BE49-F238E27FC236}">
-                <a16:creationId xmlns:a16="http://schemas.microsoft.com/office/drawing/2014/main" id="{4D32FC4C-B6F6-4C48-8AA7-C8472C1722B6}"/>
+                <a16:creationId xmlns:a16="http://schemas.microsoft.com/office/drawing/2014/main" id="{3F0E666C-E49F-4132-A3C5-D34FD2D74F94}"/>
               </a:ext>
             </a:extLst>
           </p:cNvPr>
@@ -9847,7 +9751,7 @@
           <p:cNvPr id="9" name="">
             <a:extLst xmlns:a="http://schemas.openxmlformats.org/drawingml/2006/main">
               <a:ext uri="{FF2B5EF4-FFF2-40B4-BE49-F238E27FC236}">
-                <a16:creationId xmlns:a16="http://schemas.microsoft.com/office/drawing/2014/main" id="{A570A847-00B6-4D18-9223-AE286E29AC11}"/>
+                <a16:creationId xmlns:a16="http://schemas.microsoft.com/office/drawing/2014/main" id="{9AC54F7D-0A82-45E1-A2ED-F1101747FE18}"/>
               </a:ext>
             </a:extLst>
           </p:cNvPr>
@@ -9903,7 +9807,7 @@
           <p:cNvPr id="10" name="">
             <a:extLst xmlns:a="http://schemas.openxmlformats.org/drawingml/2006/main">
               <a:ext uri="{FF2B5EF4-FFF2-40B4-BE49-F238E27FC236}">
-                <a16:creationId xmlns:a16="http://schemas.microsoft.com/office/drawing/2014/main" id="{46EFC1F2-4C67-46F9-BA73-A8EF72F23F81}"/>
+                <a16:creationId xmlns:a16="http://schemas.microsoft.com/office/drawing/2014/main" id="{B29D79EF-C101-4D5D-A399-78D75FC83E5E}"/>
               </a:ext>
             </a:extLst>
           </p:cNvPr>
@@ -9938,7 +9842,7 @@
           <p:cNvPr id="11" name="">
             <a:extLst xmlns:a="http://schemas.openxmlformats.org/drawingml/2006/main">
               <a:ext uri="{FF2B5EF4-FFF2-40B4-BE49-F238E27FC236}">
-                <a16:creationId xmlns:a16="http://schemas.microsoft.com/office/drawing/2014/main" id="{1A1B13F7-DFC3-47CF-A544-DEE6D9BDD17A}"/>
+                <a16:creationId xmlns:a16="http://schemas.microsoft.com/office/drawing/2014/main" id="{5010A189-35CD-4857-A5CA-FA45C054C5F0}"/>
               </a:ext>
             </a:extLst>
           </p:cNvPr>
@@ -9994,7 +9898,7 @@
           <p:cNvPr id="12" name="">
             <a:extLst xmlns:a="http://schemas.openxmlformats.org/drawingml/2006/main">
               <a:ext uri="{FF2B5EF4-FFF2-40B4-BE49-F238E27FC236}">
-                <a16:creationId xmlns:a16="http://schemas.microsoft.com/office/drawing/2014/main" id="{31F82366-3D8F-4A31-8439-8812EDD4CD0B}"/>
+                <a16:creationId xmlns:a16="http://schemas.microsoft.com/office/drawing/2014/main" id="{77BB774A-9859-41E2-89A7-1767B43A9661}"/>
               </a:ext>
             </a:extLst>
           </p:cNvPr>
@@ -10050,7 +9954,7 @@
           <p:cNvPr id="13" name="">
             <a:extLst xmlns:a="http://schemas.openxmlformats.org/drawingml/2006/main">
               <a:ext uri="{FF2B5EF4-FFF2-40B4-BE49-F238E27FC236}">
-                <a16:creationId xmlns:a16="http://schemas.microsoft.com/office/drawing/2014/main" id="{D1BE59B9-7F41-4C96-B455-28C6CC119D6E}"/>
+                <a16:creationId xmlns:a16="http://schemas.microsoft.com/office/drawing/2014/main" id="{FE6F5416-9900-4CF7-828E-967CF3C0AFF9}"/>
               </a:ext>
             </a:extLst>
           </p:cNvPr>
@@ -10085,7 +9989,7 @@
           <p:cNvPr id="14" name="">
             <a:extLst xmlns:a="http://schemas.openxmlformats.org/drawingml/2006/main">
               <a:ext uri="{FF2B5EF4-FFF2-40B4-BE49-F238E27FC236}">
-                <a16:creationId xmlns:a16="http://schemas.microsoft.com/office/drawing/2014/main" id="{B350F595-0774-4F8A-A988-421514213AAB}"/>
+                <a16:creationId xmlns:a16="http://schemas.microsoft.com/office/drawing/2014/main" id="{203EC9FA-70A0-4984-B26E-C2AF320E57D0}"/>
               </a:ext>
             </a:extLst>
           </p:cNvPr>
@@ -10141,7 +10045,7 @@
           <p:cNvPr id="15" name="">
             <a:extLst xmlns:a="http://schemas.openxmlformats.org/drawingml/2006/main">
               <a:ext uri="{FF2B5EF4-FFF2-40B4-BE49-F238E27FC236}">
-                <a16:creationId xmlns:a16="http://schemas.microsoft.com/office/drawing/2014/main" id="{06075D4E-2471-4367-BCF2-AC24D0D480FF}"/>
+                <a16:creationId xmlns:a16="http://schemas.microsoft.com/office/drawing/2014/main" id="{217B94F9-3B86-4111-882B-A20F4BBBDC0B}"/>
               </a:ext>
             </a:extLst>
           </p:cNvPr>
@@ -10197,7 +10101,7 @@
           <p:cNvPr id="16" name="">
             <a:extLst xmlns:a="http://schemas.openxmlformats.org/drawingml/2006/main">
               <a:ext uri="{FF2B5EF4-FFF2-40B4-BE49-F238E27FC236}">
-                <a16:creationId xmlns:a16="http://schemas.microsoft.com/office/drawing/2014/main" id="{C2E4C008-7F38-4D86-B604-30779CCD99A2}"/>
+                <a16:creationId xmlns:a16="http://schemas.microsoft.com/office/drawing/2014/main" id="{AC62403F-1623-429B-B6ED-AAF8BD3BA8A9}"/>
               </a:ext>
             </a:extLst>
           </p:cNvPr>
@@ -10232,7 +10136,7 @@
           <p:cNvPr id="17" name="">
             <a:extLst xmlns:a="http://schemas.openxmlformats.org/drawingml/2006/main">
               <a:ext uri="{FF2B5EF4-FFF2-40B4-BE49-F238E27FC236}">
-                <a16:creationId xmlns:a16="http://schemas.microsoft.com/office/drawing/2014/main" id="{84ADA7DC-D6A6-4896-8E80-58ADB135AE08}"/>
+                <a16:creationId xmlns:a16="http://schemas.microsoft.com/office/drawing/2014/main" id="{E390E4E8-1FCA-4885-A991-994F219881CA}"/>
               </a:ext>
             </a:extLst>
           </p:cNvPr>
@@ -10288,7 +10192,7 @@
           <p:cNvPr id="18" name="">
             <a:extLst xmlns:a="http://schemas.openxmlformats.org/drawingml/2006/main">
               <a:ext uri="{FF2B5EF4-FFF2-40B4-BE49-F238E27FC236}">
-                <a16:creationId xmlns:a16="http://schemas.microsoft.com/office/drawing/2014/main" id="{032EF7E9-BAB2-4852-BC3F-13CF07EBDEB5}"/>
+                <a16:creationId xmlns:a16="http://schemas.microsoft.com/office/drawing/2014/main" id="{4A1D2A8E-443C-41CC-AB01-0A2C1F5237AC}"/>
               </a:ext>
             </a:extLst>
           </p:cNvPr>
@@ -10344,7 +10248,7 @@
           <p:cNvPr id="19" name="">
             <a:extLst xmlns:a="http://schemas.openxmlformats.org/drawingml/2006/main">
               <a:ext uri="{FF2B5EF4-FFF2-40B4-BE49-F238E27FC236}">
-                <a16:creationId xmlns:a16="http://schemas.microsoft.com/office/drawing/2014/main" id="{13E3A11B-A0CC-4BF3-80D0-5730672464F1}"/>
+                <a16:creationId xmlns:a16="http://schemas.microsoft.com/office/drawing/2014/main" id="{7B8538FA-1DE7-4C4D-919B-597112BF6589}"/>
               </a:ext>
             </a:extLst>
           </p:cNvPr>
@@ -10379,7 +10283,7 @@
           <p:cNvPr id="20" name="">
             <a:extLst xmlns:a="http://schemas.openxmlformats.org/drawingml/2006/main">
               <a:ext uri="{FF2B5EF4-FFF2-40B4-BE49-F238E27FC236}">
-                <a16:creationId xmlns:a16="http://schemas.microsoft.com/office/drawing/2014/main" id="{32024B20-55A5-440A-B152-DEB0612535A9}"/>
+                <a16:creationId xmlns:a16="http://schemas.microsoft.com/office/drawing/2014/main" id="{E1FC5C4E-378F-4658-899C-393C5C162D9A}"/>
               </a:ext>
             </a:extLst>
           </p:cNvPr>
@@ -10435,7 +10339,7 @@
           <p:cNvPr id="21" name="">
             <a:extLst xmlns:a="http://schemas.openxmlformats.org/drawingml/2006/main">
               <a:ext uri="{FF2B5EF4-FFF2-40B4-BE49-F238E27FC236}">
-                <a16:creationId xmlns:a16="http://schemas.microsoft.com/office/drawing/2014/main" id="{A113A378-6DE7-40C1-94FE-A67D13CFD7C5}"/>
+                <a16:creationId xmlns:a16="http://schemas.microsoft.com/office/drawing/2014/main" id="{E054711B-2DC3-4344-951C-7314C403DB09}"/>
               </a:ext>
             </a:extLst>
           </p:cNvPr>
@@ -10491,7 +10395,7 @@
           <p:cNvPr id="22" name="">
             <a:extLst xmlns:a="http://schemas.openxmlformats.org/drawingml/2006/main">
               <a:ext uri="{FF2B5EF4-FFF2-40B4-BE49-F238E27FC236}">
-                <a16:creationId xmlns:a16="http://schemas.microsoft.com/office/drawing/2014/main" id="{909E4E37-71CC-49A3-9C88-40DD5396CB35}"/>
+                <a16:creationId xmlns:a16="http://schemas.microsoft.com/office/drawing/2014/main" id="{551B13CF-C0B4-4046-85F8-D0B7D7355E3F}"/>
               </a:ext>
             </a:extLst>
           </p:cNvPr>
@@ -10526,7 +10430,7 @@
           <p:cNvPr id="23" name="">
             <a:extLst xmlns:a="http://schemas.openxmlformats.org/drawingml/2006/main">
               <a:ext uri="{FF2B5EF4-FFF2-40B4-BE49-F238E27FC236}">
-                <a16:creationId xmlns:a16="http://schemas.microsoft.com/office/drawing/2014/main" id="{CB3F61DB-8946-49DC-A61F-0F1AA041EC81}"/>
+                <a16:creationId xmlns:a16="http://schemas.microsoft.com/office/drawing/2014/main" id="{B2183648-477A-46EC-BACA-53D21C4739C3}"/>
               </a:ext>
             </a:extLst>
           </p:cNvPr>
@@ -10582,7 +10486,7 @@
           <p:cNvPr id="24" name="">
             <a:extLst xmlns:a="http://schemas.openxmlformats.org/drawingml/2006/main">
               <a:ext uri="{FF2B5EF4-FFF2-40B4-BE49-F238E27FC236}">
-                <a16:creationId xmlns:a16="http://schemas.microsoft.com/office/drawing/2014/main" id="{EF724E99-5C64-4ED3-AC2C-FBD71F495FE8}"/>
+                <a16:creationId xmlns:a16="http://schemas.microsoft.com/office/drawing/2014/main" id="{F4C9064E-C92E-4897-B241-1D25CC4D418F}"/>
               </a:ext>
             </a:extLst>
           </p:cNvPr>
@@ -10636,7 +10540,7 @@
     </p:spTree>
     <p:extLst>
       <p:ext uri="{BB962C8B-B14F-4D97-AF65-F5344CB8AC3E}">
-        <p14:creationId xmlns:p14="http://schemas.microsoft.com/office/powerpoint/2010/main" val="1389410162"/>
+        <p14:creationId xmlns:p14="http://schemas.microsoft.com/office/powerpoint/2010/main" val="313570560"/>
       </p:ext>
     </p:extLst>
   </p:cSld>
@@ -10649,7 +10553,7 @@
     <p:bg>
       <p:bgPr>
         <a:solidFill xmlns:a="http://schemas.openxmlformats.org/drawingml/2006/main">
-          <a:srgbClr val="FFFFFF"/>
+          <a:srgbClr val="0D3D2D"/>
         </a:solidFill>
       </p:bgPr>
     </p:bg>
@@ -10667,7 +10571,7 @@
           <p:cNvPr id="1" name="">
             <a:extLst xmlns:a="http://schemas.openxmlformats.org/drawingml/2006/main">
               <a:ext uri="{FF2B5EF4-FFF2-40B4-BE49-F238E27FC236}">
-                <a16:creationId xmlns:a16="http://schemas.microsoft.com/office/drawing/2014/main" id="{525CEDC5-FD16-4C4D-8D24-1897C84A86C3}"/>
+                <a16:creationId xmlns:a16="http://schemas.microsoft.com/office/drawing/2014/main" id="{EF3EFBA5-35D3-4C70-AEAB-D1F095E0FCDB}"/>
               </a:ext>
             </a:extLst>
           </p:cNvPr>
@@ -10679,40 +10583,7 @@
         <p:spPr>
           <a:xfrm xmlns:a="http://schemas.openxmlformats.org/drawingml/2006/main">
             <a:off x="0" y="0"/>
-            <a:ext cx="285750" cy="6858000"/>
-          </a:xfrm>
-          <a:prstGeom xmlns:a="http://schemas.openxmlformats.org/drawingml/2006/main" prst="rect">
-            <a:avLst/>
-          </a:prstGeom>
-          <a:solidFill xmlns:a="http://schemas.openxmlformats.org/drawingml/2006/main">
-            <a:srgbClr val="0D3D2D"/>
-          </a:solidFill>
-          <a:ln xmlns:a="http://schemas.openxmlformats.org/drawingml/2006/main" w="0">
-            <a:solidFill>
-              <a:srgbClr val="0D3D2D"/>
-            </a:solidFill>
-            <a:prstDash val="solid"/>
-          </a:ln>
-        </p:spPr>
-      </p:sp>
-      <p:sp>
-        <p:nvSpPr>
-          <p:cNvPr id="2" name="">
-            <a:extLst xmlns:a="http://schemas.openxmlformats.org/drawingml/2006/main">
-              <a:ext uri="{FF2B5EF4-FFF2-40B4-BE49-F238E27FC236}">
-                <a16:creationId xmlns:a16="http://schemas.microsoft.com/office/drawing/2014/main" id="{2EABA93D-88BF-4C6C-8CF6-A3A653EE38D4}"/>
-              </a:ext>
-            </a:extLst>
-          </p:cNvPr>
-          <p:cNvSpPr>
-            <a:spLocks xmlns:a="http://schemas.openxmlformats.org/drawingml/2006/main" noGrp="1"/>
-          </p:cNvSpPr>
-          <p:nvPr/>
-        </p:nvSpPr>
-        <p:spPr>
-          <a:xfrm xmlns:a="http://schemas.openxmlformats.org/drawingml/2006/main">
-            <a:off x="285750" y="0"/>
-            <a:ext cx="76200" cy="6858000"/>
+            <a:ext cx="361950" cy="6858000"/>
           </a:xfrm>
           <a:prstGeom xmlns:a="http://schemas.openxmlformats.org/drawingml/2006/main" prst="rect">
             <a:avLst/>
@@ -10728,24 +10599,46 @@
           </a:ln>
         </p:spPr>
       </p:sp>
+      <p:pic>
+        <p:nvPicPr>
+          <p:cNvPr id="6" name=""/>
+          <p:cNvPicPr>
+            <a:picLocks xmlns:a="http://schemas.openxmlformats.org/drawingml/2006/main" noChangeAspect="1"/>
+          </p:cNvPicPr>
+          <p:nvPr/>
+        </p:nvPicPr>
+        <p:blipFill>
+          <a:blip xmlns:r="http://schemas.openxmlformats.org/officeDocument/2006/relationships" xmlns:a="http://schemas.openxmlformats.org/drawingml/2006/main" r:embed="R50b6cd3d3402430e"/>
+          <a:stretch xmlns:a="http://schemas.openxmlformats.org/drawingml/2006/main"/>
+        </p:blipFill>
+        <p:spPr>
+          <a:xfrm xmlns:a="http://schemas.openxmlformats.org/drawingml/2006/main">
+            <a:off x="838769" y="590550"/>
+            <a:ext cx="837063" cy="876300"/>
+          </a:xfrm>
+          <a:prstGeom xmlns:a="http://schemas.openxmlformats.org/drawingml/2006/main" prst="rect">
+            <a:avLst/>
+          </a:prstGeom>
+        </p:spPr>
+      </p:pic>
       <p:sp>
         <p:nvSpPr>
           <p:cNvPr id="3" name="">
             <a:extLst xmlns:a="http://schemas.openxmlformats.org/drawingml/2006/main">
               <a:ext uri="{FF2B5EF4-FFF2-40B4-BE49-F238E27FC236}">
-                <a16:creationId xmlns:a16="http://schemas.microsoft.com/office/drawing/2014/main" id="{86C03383-71A9-48DB-ADA7-CC1A52A8676B}"/>
-              </a:ext>
-            </a:extLst>
-          </p:cNvPr>
-          <p:cNvSpPr>
-            <a:spLocks xmlns:a="http://schemas.openxmlformats.org/drawingml/2006/main" noGrp="1"/>
-          </p:cNvSpPr>
-          <p:nvPr/>
-        </p:nvSpPr>
-        <p:spPr>
-          <a:xfrm xmlns:a="http://schemas.openxmlformats.org/drawingml/2006/main">
-            <a:off x="762000" y="400050"/>
-            <a:ext cx="4000500" cy="209550"/>
+                <a16:creationId xmlns:a16="http://schemas.microsoft.com/office/drawing/2014/main" id="{CB3A4AE8-796E-48D5-A6F5-216805F6D922}"/>
+              </a:ext>
+            </a:extLst>
+          </p:cNvPr>
+          <p:cNvSpPr>
+            <a:spLocks xmlns:a="http://schemas.openxmlformats.org/drawingml/2006/main" noGrp="1"/>
+          </p:cNvSpPr>
+          <p:nvPr/>
+        </p:nvSpPr>
+        <p:spPr>
+          <a:xfrm xmlns:a="http://schemas.openxmlformats.org/drawingml/2006/main">
+            <a:off x="838200" y="2266950"/>
+            <a:ext cx="8382000" cy="685800"/>
           </a:xfrm>
           <a:prstGeom xmlns:a="http://schemas.openxmlformats.org/drawingml/2006/main" prst="rect">
             <a:avLst/>
@@ -10761,65 +10654,9 @@
           <a:lstStyle xmlns:a="http://schemas.openxmlformats.org/drawingml/2006/main"/>
           <a:p xmlns:a="http://schemas.openxmlformats.org/drawingml/2006/main">
             <a:pPr>
-              <a:defRPr sz="900" b="1">
-                <a:solidFill>
-                  <a:srgbClr val="0D3D2D"/>
-                </a:solidFill>
-                <a:latin typeface="Aptos"/>
-                <a:ea typeface="Aptos"/>
-                <a:cs typeface="Aptos"/>
-              </a:defRPr>
-            </a:pPr>
-            <a:r>
-              <a:rPr sz="900" b="1">
-                <a:solidFill>
-                  <a:srgbClr val="0D3D2D"/>
-                </a:solidFill>
-                <a:latin typeface="Aptos"/>
-                <a:ea typeface="Aptos"/>
-                <a:cs typeface="Aptos"/>
-              </a:rPr>
-              <a:t>INES DIGITAL LIBRARY</a:t>
-            </a:r>
-          </a:p>
-        </p:txBody>
-      </p:sp>
-      <p:sp>
-        <p:nvSpPr>
-          <p:cNvPr id="4" name="">
-            <a:extLst xmlns:a="http://schemas.openxmlformats.org/drawingml/2006/main">
-              <a:ext uri="{FF2B5EF4-FFF2-40B4-BE49-F238E27FC236}">
-                <a16:creationId xmlns:a16="http://schemas.microsoft.com/office/drawing/2014/main" id="{59102721-C6DB-401C-8186-EFC13945BC21}"/>
-              </a:ext>
-            </a:extLst>
-          </p:cNvPr>
-          <p:cNvSpPr>
-            <a:spLocks xmlns:a="http://schemas.openxmlformats.org/drawingml/2006/main" noGrp="1"/>
-          </p:cNvSpPr>
-          <p:nvPr/>
-        </p:nvSpPr>
-        <p:spPr>
-          <a:xfrm xmlns:a="http://schemas.openxmlformats.org/drawingml/2006/main">
-            <a:off x="762000" y="742950"/>
-            <a:ext cx="8191500" cy="457200"/>
-          </a:xfrm>
-          <a:prstGeom xmlns:a="http://schemas.openxmlformats.org/drawingml/2006/main" prst="rect">
-            <a:avLst/>
-          </a:prstGeom>
-          <a:noFill xmlns:a="http://schemas.openxmlformats.org/drawingml/2006/main"/>
-          <a:ln xmlns:a="http://schemas.openxmlformats.org/drawingml/2006/main" w="0">
-            <a:noFill/>
-            <a:prstDash val="solid"/>
-          </a:ln>
-        </p:spPr>
-        <p:txBody>
-          <a:bodyPr xmlns:a="http://schemas.openxmlformats.org/drawingml/2006/main"/>
-          <a:lstStyle xmlns:a="http://schemas.openxmlformats.org/drawingml/2006/main"/>
-          <a:p xmlns:a="http://schemas.openxmlformats.org/drawingml/2006/main">
-            <a:pPr>
-              <a:defRPr sz="2475" b="1">
-                <a:solidFill>
-                  <a:srgbClr val="18211F"/>
+              <a:defRPr sz="3450" b="1">
+                <a:solidFill>
+                  <a:srgbClr val="FFFFFF"/>
                 </a:solidFill>
                 <a:latin typeface="Aptos Display"/>
                 <a:ea typeface="Aptos Display"/>
@@ -10827,90 +10664,37 @@
               </a:defRPr>
             </a:pPr>
             <a:r>
-              <a:rPr sz="2475" b="1">
-                <a:solidFill>
-                  <a:srgbClr val="18211F"/>
+              <a:rPr sz="3450" b="1">
+                <a:solidFill>
+                  <a:srgbClr val="FFFFFF"/>
                 </a:solidFill>
                 <a:latin typeface="Aptos Display"/>
                 <a:ea typeface="Aptos Display"/>
                 <a:cs typeface="Aptos Display"/>
               </a:rPr>
-              <a:t>Research Objectives</a:t>
-            </a:r>
-          </a:p>
-        </p:txBody>
-      </p:sp>
-      <p:sp>
-        <p:nvSpPr>
-          <p:cNvPr id="5" name="">
-            <a:extLst xmlns:a="http://schemas.openxmlformats.org/drawingml/2006/main">
-              <a:ext uri="{FF2B5EF4-FFF2-40B4-BE49-F238E27FC236}">
-                <a16:creationId xmlns:a16="http://schemas.microsoft.com/office/drawing/2014/main" id="{6113B746-0C2B-4C0B-BBE2-F366C33D78F0}"/>
-              </a:ext>
-            </a:extLst>
-          </p:cNvPr>
-          <p:cNvSpPr>
-            <a:spLocks xmlns:a="http://schemas.openxmlformats.org/drawingml/2006/main" noGrp="1"/>
-          </p:cNvSpPr>
-          <p:nvPr/>
-        </p:nvSpPr>
-        <p:spPr>
-          <a:xfrm xmlns:a="http://schemas.openxmlformats.org/drawingml/2006/main">
-            <a:off x="762000" y="1333500"/>
-            <a:ext cx="9810750" cy="0"/>
-          </a:xfrm>
-          <a:prstGeom xmlns:a="http://schemas.openxmlformats.org/drawingml/2006/main" prst="line">
-            <a:avLst/>
-          </a:prstGeom>
-          <a:noFill xmlns:a="http://schemas.openxmlformats.org/drawingml/2006/main"/>
-          <a:ln xmlns:a="http://schemas.openxmlformats.org/drawingml/2006/main" w="9525">
-            <a:solidFill>
-              <a:srgbClr val="D5E2DC"/>
-            </a:solidFill>
-            <a:prstDash val="solid"/>
-          </a:ln>
-        </p:spPr>
-      </p:sp>
-      <p:pic>
-        <p:nvPicPr>
-          <p:cNvPr id="23" name=""/>
-          <p:cNvPicPr>
-            <a:picLocks xmlns:a="http://schemas.openxmlformats.org/drawingml/2006/main" noChangeAspect="1"/>
-          </p:cNvPicPr>
-          <p:nvPr/>
-        </p:nvPicPr>
-        <p:blipFill>
-          <a:blip xmlns:r="http://schemas.openxmlformats.org/officeDocument/2006/relationships" xmlns:a="http://schemas.openxmlformats.org/drawingml/2006/main" r:embed="R0388093d5b4a437d"/>
-          <a:stretch xmlns:a="http://schemas.openxmlformats.org/drawingml/2006/main"/>
-        </p:blipFill>
-        <p:spPr>
-          <a:xfrm xmlns:a="http://schemas.openxmlformats.org/drawingml/2006/main">
-            <a:off x="10019163" y="419100"/>
-            <a:ext cx="764275" cy="800100"/>
-          </a:xfrm>
-          <a:prstGeom xmlns:a="http://schemas.openxmlformats.org/drawingml/2006/main" prst="rect">
-            <a:avLst/>
-          </a:prstGeom>
-        </p:spPr>
-      </p:pic>
-      <p:sp>
-        <p:nvSpPr>
-          <p:cNvPr id="7" name="">
-            <a:extLst xmlns:a="http://schemas.openxmlformats.org/drawingml/2006/main">
-              <a:ext uri="{FF2B5EF4-FFF2-40B4-BE49-F238E27FC236}">
-                <a16:creationId xmlns:a16="http://schemas.microsoft.com/office/drawing/2014/main" id="{6F0D12E9-2FEA-4945-A97D-5349E7FCFA38}"/>
-              </a:ext>
-            </a:extLst>
-          </p:cNvPr>
-          <p:cNvSpPr>
-            <a:spLocks xmlns:a="http://schemas.openxmlformats.org/drawingml/2006/main" noGrp="1"/>
-          </p:cNvSpPr>
-          <p:nvPr/>
-        </p:nvSpPr>
-        <p:spPr>
-          <a:xfrm xmlns:a="http://schemas.openxmlformats.org/drawingml/2006/main">
-            <a:off x="895350" y="1581150"/>
-            <a:ext cx="2571750" cy="285750"/>
+              <a:t>INES DIGITAL LIBRARY</a:t>
+            </a:r>
+          </a:p>
+        </p:txBody>
+      </p:sp>
+      <p:sp>
+        <p:nvSpPr>
+          <p:cNvPr id="4" name="">
+            <a:extLst xmlns:a="http://schemas.openxmlformats.org/drawingml/2006/main">
+              <a:ext uri="{FF2B5EF4-FFF2-40B4-BE49-F238E27FC236}">
+                <a16:creationId xmlns:a16="http://schemas.microsoft.com/office/drawing/2014/main" id="{B546B96E-681E-4CFA-ABC8-9434D21458C8}"/>
+              </a:ext>
+            </a:extLst>
+          </p:cNvPr>
+          <p:cNvSpPr>
+            <a:spLocks xmlns:a="http://schemas.openxmlformats.org/drawingml/2006/main" noGrp="1"/>
+          </p:cNvSpPr>
+          <p:nvPr/>
+        </p:nvSpPr>
+        <p:spPr>
+          <a:xfrm xmlns:a="http://schemas.openxmlformats.org/drawingml/2006/main">
+            <a:off x="876300" y="3143250"/>
+            <a:ext cx="7810500" cy="400050"/>
           </a:xfrm>
           <a:prstGeom xmlns:a="http://schemas.openxmlformats.org/drawingml/2006/main" prst="rect">
             <a:avLst/>
@@ -10926,9 +10710,9 @@
           <a:lstStyle xmlns:a="http://schemas.openxmlformats.org/drawingml/2006/main"/>
           <a:p xmlns:a="http://schemas.openxmlformats.org/drawingml/2006/main">
             <a:pPr>
-              <a:defRPr sz="1800" b="1">
-                <a:solidFill>
-                  <a:srgbClr val="0D3D2D"/>
+              <a:defRPr sz="1800" b="0">
+                <a:solidFill>
+                  <a:srgbClr val="DDEEE6"/>
                 </a:solidFill>
                 <a:latin typeface="Aptos"/>
                 <a:ea typeface="Aptos"/>
@@ -10936,483 +10720,15 @@
               </a:defRPr>
             </a:pPr>
             <a:r>
-              <a:rPr sz="1800" b="1">
-                <a:solidFill>
-                  <a:srgbClr val="0D3D2D"/>
+              <a:rPr sz="1800" b="0">
+                <a:solidFill>
+                  <a:srgbClr val="DDEEE6"/>
                 </a:solidFill>
                 <a:latin typeface="Aptos"/>
                 <a:ea typeface="Aptos"/>
                 <a:cs typeface="Aptos"/>
               </a:rPr>
-              <a:t>General objective</a:t>
-            </a:r>
-          </a:p>
-        </p:txBody>
-      </p:sp>
-      <p:sp>
-        <p:nvSpPr>
-          <p:cNvPr id="8" name="">
-            <a:extLst xmlns:a="http://schemas.openxmlformats.org/drawingml/2006/main">
-              <a:ext uri="{FF2B5EF4-FFF2-40B4-BE49-F238E27FC236}">
-                <a16:creationId xmlns:a16="http://schemas.microsoft.com/office/drawing/2014/main" id="{B8D9D4AF-3D85-4867-B482-54DAD561162B}"/>
-              </a:ext>
-            </a:extLst>
-          </p:cNvPr>
-          <p:cNvSpPr>
-            <a:spLocks xmlns:a="http://schemas.openxmlformats.org/drawingml/2006/main" noGrp="1"/>
-          </p:cNvSpPr>
-          <p:nvPr/>
-        </p:nvSpPr>
-        <p:spPr>
-          <a:xfrm xmlns:a="http://schemas.openxmlformats.org/drawingml/2006/main">
-            <a:off x="895350" y="1981200"/>
-            <a:ext cx="8572500" cy="685800"/>
-          </a:xfrm>
-          <a:prstGeom xmlns:a="http://schemas.openxmlformats.org/drawingml/2006/main" prst="rect">
-            <a:avLst/>
-          </a:prstGeom>
-          <a:noFill xmlns:a="http://schemas.openxmlformats.org/drawingml/2006/main"/>
-          <a:ln xmlns:a="http://schemas.openxmlformats.org/drawingml/2006/main" w="0">
-            <a:noFill/>
-            <a:prstDash val="solid"/>
-          </a:ln>
-        </p:spPr>
-        <p:txBody>
-          <a:bodyPr xmlns:a="http://schemas.openxmlformats.org/drawingml/2006/main"/>
-          <a:lstStyle xmlns:a="http://schemas.openxmlformats.org/drawingml/2006/main"/>
-          <a:p xmlns:a="http://schemas.openxmlformats.org/drawingml/2006/main">
-            <a:pPr>
-              <a:defRPr sz="1500" b="0">
-                <a:solidFill>
-                  <a:srgbClr val="18211F"/>
-                </a:solidFill>
-                <a:latin typeface="Aptos"/>
-                <a:ea typeface="Aptos"/>
-                <a:cs typeface="Aptos"/>
-              </a:defRPr>
-            </a:pPr>
-            <a:r>
-              <a:rPr sz="1500" b="0">
-                <a:solidFill>
-                  <a:srgbClr val="18211F"/>
-                </a:solidFill>
-                <a:latin typeface="Aptos"/>
-                <a:ea typeface="Aptos"/>
-                <a:cs typeface="Aptos"/>
-              </a:rPr>
-              <a:t>To design and develop a Transformer-Based Voice-Interactive System for Book Retrieval and Audio-Reading that enhances accessibility and inclusive learning within INES Ruhengeri Library.</a:t>
-            </a:r>
-          </a:p>
-        </p:txBody>
-      </p:sp>
-      <p:sp>
-        <p:nvSpPr>
-          <p:cNvPr id="9" name="">
-            <a:extLst xmlns:a="http://schemas.openxmlformats.org/drawingml/2006/main">
-              <a:ext uri="{FF2B5EF4-FFF2-40B4-BE49-F238E27FC236}">
-                <a16:creationId xmlns:a16="http://schemas.microsoft.com/office/drawing/2014/main" id="{AEAE395C-1779-4531-A381-85DDB78FF1B2}"/>
-              </a:ext>
-            </a:extLst>
-          </p:cNvPr>
-          <p:cNvSpPr>
-            <a:spLocks xmlns:a="http://schemas.openxmlformats.org/drawingml/2006/main" noGrp="1"/>
-          </p:cNvSpPr>
-          <p:nvPr/>
-        </p:nvSpPr>
-        <p:spPr>
-          <a:xfrm xmlns:a="http://schemas.openxmlformats.org/drawingml/2006/main">
-            <a:off x="895350" y="3067050"/>
-            <a:ext cx="2571750" cy="285750"/>
-          </a:xfrm>
-          <a:prstGeom xmlns:a="http://schemas.openxmlformats.org/drawingml/2006/main" prst="rect">
-            <a:avLst/>
-          </a:prstGeom>
-          <a:noFill xmlns:a="http://schemas.openxmlformats.org/drawingml/2006/main"/>
-          <a:ln xmlns:a="http://schemas.openxmlformats.org/drawingml/2006/main" w="0">
-            <a:noFill/>
-            <a:prstDash val="solid"/>
-          </a:ln>
-        </p:spPr>
-        <p:txBody>
-          <a:bodyPr xmlns:a="http://schemas.openxmlformats.org/drawingml/2006/main"/>
-          <a:lstStyle xmlns:a="http://schemas.openxmlformats.org/drawingml/2006/main"/>
-          <a:p xmlns:a="http://schemas.openxmlformats.org/drawingml/2006/main">
-            <a:pPr>
-              <a:defRPr sz="1800" b="1">
-                <a:solidFill>
-                  <a:srgbClr val="0D3D2D"/>
-                </a:solidFill>
-                <a:latin typeface="Aptos"/>
-                <a:ea typeface="Aptos"/>
-                <a:cs typeface="Aptos"/>
-              </a:defRPr>
-            </a:pPr>
-            <a:r>
-              <a:rPr sz="1800" b="1">
-                <a:solidFill>
-                  <a:srgbClr val="0D3D2D"/>
-                </a:solidFill>
-                <a:latin typeface="Aptos"/>
-                <a:ea typeface="Aptos"/>
-                <a:cs typeface="Aptos"/>
-              </a:rPr>
-              <a:t>Specific objectives</a:t>
-            </a:r>
-          </a:p>
-        </p:txBody>
-      </p:sp>
-      <p:sp>
-        <p:nvSpPr>
-          <p:cNvPr id="10" name="">
-            <a:extLst xmlns:a="http://schemas.openxmlformats.org/drawingml/2006/main">
-              <a:ext uri="{FF2B5EF4-FFF2-40B4-BE49-F238E27FC236}">
-                <a16:creationId xmlns:a16="http://schemas.microsoft.com/office/drawing/2014/main" id="{CAA3F3E5-2C18-4653-A9E1-7604836BAD04}"/>
-              </a:ext>
-            </a:extLst>
-          </p:cNvPr>
-          <p:cNvSpPr>
-            <a:spLocks xmlns:a="http://schemas.openxmlformats.org/drawingml/2006/main" noGrp="1"/>
-          </p:cNvSpPr>
-          <p:nvPr/>
-        </p:nvSpPr>
-        <p:spPr>
-          <a:xfrm xmlns:a="http://schemas.openxmlformats.org/drawingml/2006/main">
-            <a:off x="952500" y="3638550"/>
-            <a:ext cx="95250" cy="95250"/>
-          </a:xfrm>
-          <a:prstGeom xmlns:a="http://schemas.openxmlformats.org/drawingml/2006/main" prst="ellipse">
-            <a:avLst/>
-          </a:prstGeom>
-          <a:solidFill xmlns:a="http://schemas.openxmlformats.org/drawingml/2006/main">
-            <a:srgbClr val="C7A044"/>
-          </a:solidFill>
-          <a:ln xmlns:a="http://schemas.openxmlformats.org/drawingml/2006/main" w="0">
-            <a:solidFill>
-              <a:srgbClr val="C7A044"/>
-            </a:solidFill>
-            <a:prstDash val="solid"/>
-          </a:ln>
-        </p:spPr>
-      </p:sp>
-      <p:sp>
-        <p:nvSpPr>
-          <p:cNvPr id="11" name="">
-            <a:extLst xmlns:a="http://schemas.openxmlformats.org/drawingml/2006/main">
-              <a:ext uri="{FF2B5EF4-FFF2-40B4-BE49-F238E27FC236}">
-                <a16:creationId xmlns:a16="http://schemas.microsoft.com/office/drawing/2014/main" id="{969547CD-EBA5-4BAD-9DC9-39605D5E7654}"/>
-              </a:ext>
-            </a:extLst>
-          </p:cNvPr>
-          <p:cNvSpPr>
-            <a:spLocks xmlns:a="http://schemas.openxmlformats.org/drawingml/2006/main" noGrp="1"/>
-          </p:cNvSpPr>
-          <p:nvPr/>
-        </p:nvSpPr>
-        <p:spPr>
-          <a:xfrm xmlns:a="http://schemas.openxmlformats.org/drawingml/2006/main">
-            <a:off x="1181100" y="3543300"/>
-            <a:ext cx="8343900" cy="447675"/>
-          </a:xfrm>
-          <a:prstGeom xmlns:a="http://schemas.openxmlformats.org/drawingml/2006/main" prst="rect">
-            <a:avLst/>
-          </a:prstGeom>
-          <a:noFill xmlns:a="http://schemas.openxmlformats.org/drawingml/2006/main"/>
-          <a:ln xmlns:a="http://schemas.openxmlformats.org/drawingml/2006/main" w="0">
-            <a:noFill/>
-            <a:prstDash val="solid"/>
-          </a:ln>
-        </p:spPr>
-        <p:txBody>
-          <a:bodyPr xmlns:a="http://schemas.openxmlformats.org/drawingml/2006/main"/>
-          <a:lstStyle xmlns:a="http://schemas.openxmlformats.org/drawingml/2006/main"/>
-          <a:p xmlns:a="http://schemas.openxmlformats.org/drawingml/2006/main">
-            <a:pPr>
-              <a:defRPr sz="1425" b="0">
-                <a:solidFill>
-                  <a:srgbClr val="18211F"/>
-                </a:solidFill>
-                <a:latin typeface="Aptos"/>
-                <a:ea typeface="Aptos"/>
-                <a:cs typeface="Aptos"/>
-              </a:defRPr>
-            </a:pPr>
-            <a:r>
-              <a:rPr sz="1425" b="0">
-                <a:solidFill>
-                  <a:srgbClr val="18211F"/>
-                </a:solidFill>
-                <a:latin typeface="Aptos"/>
-                <a:ea typeface="Aptos"/>
-                <a:cs typeface="Aptos"/>
-              </a:rPr>
-              <a:t>Collect and analyze accessibility and digital-library requirements.</a:t>
-            </a:r>
-          </a:p>
-        </p:txBody>
-      </p:sp>
-      <p:sp>
-        <p:nvSpPr>
-          <p:cNvPr id="12" name="">
-            <a:extLst xmlns:a="http://schemas.openxmlformats.org/drawingml/2006/main">
-              <a:ext uri="{FF2B5EF4-FFF2-40B4-BE49-F238E27FC236}">
-                <a16:creationId xmlns:a16="http://schemas.microsoft.com/office/drawing/2014/main" id="{78335674-1EE2-49D3-BADE-2293BD657E94}"/>
-              </a:ext>
-            </a:extLst>
-          </p:cNvPr>
-          <p:cNvSpPr>
-            <a:spLocks xmlns:a="http://schemas.openxmlformats.org/drawingml/2006/main" noGrp="1"/>
-          </p:cNvSpPr>
-          <p:nvPr/>
-        </p:nvSpPr>
-        <p:spPr>
-          <a:xfrm xmlns:a="http://schemas.openxmlformats.org/drawingml/2006/main">
-            <a:off x="952500" y="4114800"/>
-            <a:ext cx="95250" cy="95250"/>
-          </a:xfrm>
-          <a:prstGeom xmlns:a="http://schemas.openxmlformats.org/drawingml/2006/main" prst="ellipse">
-            <a:avLst/>
-          </a:prstGeom>
-          <a:solidFill xmlns:a="http://schemas.openxmlformats.org/drawingml/2006/main">
-            <a:srgbClr val="C7A044"/>
-          </a:solidFill>
-          <a:ln xmlns:a="http://schemas.openxmlformats.org/drawingml/2006/main" w="0">
-            <a:solidFill>
-              <a:srgbClr val="C7A044"/>
-            </a:solidFill>
-            <a:prstDash val="solid"/>
-          </a:ln>
-        </p:spPr>
-      </p:sp>
-      <p:sp>
-        <p:nvSpPr>
-          <p:cNvPr id="13" name="">
-            <a:extLst xmlns:a="http://schemas.openxmlformats.org/drawingml/2006/main">
-              <a:ext uri="{FF2B5EF4-FFF2-40B4-BE49-F238E27FC236}">
-                <a16:creationId xmlns:a16="http://schemas.microsoft.com/office/drawing/2014/main" id="{049EA887-46A8-40E5-8FF6-3C4FFA3E8114}"/>
-              </a:ext>
-            </a:extLst>
-          </p:cNvPr>
-          <p:cNvSpPr>
-            <a:spLocks xmlns:a="http://schemas.openxmlformats.org/drawingml/2006/main" noGrp="1"/>
-          </p:cNvSpPr>
-          <p:nvPr/>
-        </p:nvSpPr>
-        <p:spPr>
-          <a:xfrm xmlns:a="http://schemas.openxmlformats.org/drawingml/2006/main">
-            <a:off x="1181100" y="4019550"/>
-            <a:ext cx="8343900" cy="447675"/>
-          </a:xfrm>
-          <a:prstGeom xmlns:a="http://schemas.openxmlformats.org/drawingml/2006/main" prst="rect">
-            <a:avLst/>
-          </a:prstGeom>
-          <a:noFill xmlns:a="http://schemas.openxmlformats.org/drawingml/2006/main"/>
-          <a:ln xmlns:a="http://schemas.openxmlformats.org/drawingml/2006/main" w="0">
-            <a:noFill/>
-            <a:prstDash val="solid"/>
-          </a:ln>
-        </p:spPr>
-        <p:txBody>
-          <a:bodyPr xmlns:a="http://schemas.openxmlformats.org/drawingml/2006/main"/>
-          <a:lstStyle xmlns:a="http://schemas.openxmlformats.org/drawingml/2006/main"/>
-          <a:p xmlns:a="http://schemas.openxmlformats.org/drawingml/2006/main">
-            <a:pPr>
-              <a:defRPr sz="1425" b="0">
-                <a:solidFill>
-                  <a:srgbClr val="18211F"/>
-                </a:solidFill>
-                <a:latin typeface="Aptos"/>
-                <a:ea typeface="Aptos"/>
-                <a:cs typeface="Aptos"/>
-              </a:defRPr>
-            </a:pPr>
-            <a:r>
-              <a:rPr sz="1425" b="0">
-                <a:solidFill>
-                  <a:srgbClr val="18211F"/>
-                </a:solidFill>
-                <a:latin typeface="Aptos"/>
-                <a:ea typeface="Aptos"/>
-                <a:cs typeface="Aptos"/>
-              </a:rPr>
-              <a:t>Design and implement Transformer-based speech-to-text and text-to-speech support.</a:t>
-            </a:r>
-          </a:p>
-        </p:txBody>
-      </p:sp>
-      <p:sp>
-        <p:nvSpPr>
-          <p:cNvPr id="14" name="">
-            <a:extLst xmlns:a="http://schemas.openxmlformats.org/drawingml/2006/main">
-              <a:ext uri="{FF2B5EF4-FFF2-40B4-BE49-F238E27FC236}">
-                <a16:creationId xmlns:a16="http://schemas.microsoft.com/office/drawing/2014/main" id="{F998A611-0F5E-46A9-B8A6-1121688EB124}"/>
-              </a:ext>
-            </a:extLst>
-          </p:cNvPr>
-          <p:cNvSpPr>
-            <a:spLocks xmlns:a="http://schemas.openxmlformats.org/drawingml/2006/main" noGrp="1"/>
-          </p:cNvSpPr>
-          <p:nvPr/>
-        </p:nvSpPr>
-        <p:spPr>
-          <a:xfrm xmlns:a="http://schemas.openxmlformats.org/drawingml/2006/main">
-            <a:off x="952500" y="4591050"/>
-            <a:ext cx="95250" cy="95250"/>
-          </a:xfrm>
-          <a:prstGeom xmlns:a="http://schemas.openxmlformats.org/drawingml/2006/main" prst="ellipse">
-            <a:avLst/>
-          </a:prstGeom>
-          <a:solidFill xmlns:a="http://schemas.openxmlformats.org/drawingml/2006/main">
-            <a:srgbClr val="C7A044"/>
-          </a:solidFill>
-          <a:ln xmlns:a="http://schemas.openxmlformats.org/drawingml/2006/main" w="0">
-            <a:solidFill>
-              <a:srgbClr val="C7A044"/>
-            </a:solidFill>
-            <a:prstDash val="solid"/>
-          </a:ln>
-        </p:spPr>
-      </p:sp>
-      <p:sp>
-        <p:nvSpPr>
-          <p:cNvPr id="15" name="">
-            <a:extLst xmlns:a="http://schemas.openxmlformats.org/drawingml/2006/main">
-              <a:ext uri="{FF2B5EF4-FFF2-40B4-BE49-F238E27FC236}">
-                <a16:creationId xmlns:a16="http://schemas.microsoft.com/office/drawing/2014/main" id="{83733C12-CE8C-4907-802A-FEE4D19BC7E7}"/>
-              </a:ext>
-            </a:extLst>
-          </p:cNvPr>
-          <p:cNvSpPr>
-            <a:spLocks xmlns:a="http://schemas.openxmlformats.org/drawingml/2006/main" noGrp="1"/>
-          </p:cNvSpPr>
-          <p:nvPr/>
-        </p:nvSpPr>
-        <p:spPr>
-          <a:xfrm xmlns:a="http://schemas.openxmlformats.org/drawingml/2006/main">
-            <a:off x="1181100" y="4495800"/>
-            <a:ext cx="8343900" cy="447675"/>
-          </a:xfrm>
-          <a:prstGeom xmlns:a="http://schemas.openxmlformats.org/drawingml/2006/main" prst="rect">
-            <a:avLst/>
-          </a:prstGeom>
-          <a:noFill xmlns:a="http://schemas.openxmlformats.org/drawingml/2006/main"/>
-          <a:ln xmlns:a="http://schemas.openxmlformats.org/drawingml/2006/main" w="0">
-            <a:noFill/>
-            <a:prstDash val="solid"/>
-          </a:ln>
-        </p:spPr>
-        <p:txBody>
-          <a:bodyPr xmlns:a="http://schemas.openxmlformats.org/drawingml/2006/main"/>
-          <a:lstStyle xmlns:a="http://schemas.openxmlformats.org/drawingml/2006/main"/>
-          <a:p xmlns:a="http://schemas.openxmlformats.org/drawingml/2006/main">
-            <a:pPr>
-              <a:defRPr sz="1425" b="0">
-                <a:solidFill>
-                  <a:srgbClr val="18211F"/>
-                </a:solidFill>
-                <a:latin typeface="Aptos"/>
-                <a:ea typeface="Aptos"/>
-                <a:cs typeface="Aptos"/>
-              </a:defRPr>
-            </a:pPr>
-            <a:r>
-              <a:rPr sz="1425" b="0">
-                <a:solidFill>
-                  <a:srgbClr val="18211F"/>
-                </a:solidFill>
-                <a:latin typeface="Aptos"/>
-                <a:ea typeface="Aptos"/>
-                <a:cs typeface="Aptos"/>
-              </a:rPr>
-              <a:t>Develop authentication and role-based access control integrated with library resources.</a:t>
-            </a:r>
-          </a:p>
-        </p:txBody>
-      </p:sp>
-      <p:sp>
-        <p:nvSpPr>
-          <p:cNvPr id="16" name="">
-            <a:extLst xmlns:a="http://schemas.openxmlformats.org/drawingml/2006/main">
-              <a:ext uri="{FF2B5EF4-FFF2-40B4-BE49-F238E27FC236}">
-                <a16:creationId xmlns:a16="http://schemas.microsoft.com/office/drawing/2014/main" id="{E0F9CB37-514E-491E-B9A1-7EB8B2C8719F}"/>
-              </a:ext>
-            </a:extLst>
-          </p:cNvPr>
-          <p:cNvSpPr>
-            <a:spLocks xmlns:a="http://schemas.openxmlformats.org/drawingml/2006/main" noGrp="1"/>
-          </p:cNvSpPr>
-          <p:nvPr/>
-        </p:nvSpPr>
-        <p:spPr>
-          <a:xfrm xmlns:a="http://schemas.openxmlformats.org/drawingml/2006/main">
-            <a:off x="952500" y="5067300"/>
-            <a:ext cx="95250" cy="95250"/>
-          </a:xfrm>
-          <a:prstGeom xmlns:a="http://schemas.openxmlformats.org/drawingml/2006/main" prst="ellipse">
-            <a:avLst/>
-          </a:prstGeom>
-          <a:solidFill xmlns:a="http://schemas.openxmlformats.org/drawingml/2006/main">
-            <a:srgbClr val="C7A044"/>
-          </a:solidFill>
-          <a:ln xmlns:a="http://schemas.openxmlformats.org/drawingml/2006/main" w="0">
-            <a:solidFill>
-              <a:srgbClr val="C7A044"/>
-            </a:solidFill>
-            <a:prstDash val="solid"/>
-          </a:ln>
-        </p:spPr>
-      </p:sp>
-      <p:sp>
-        <p:nvSpPr>
-          <p:cNvPr id="17" name="">
-            <a:extLst xmlns:a="http://schemas.openxmlformats.org/drawingml/2006/main">
-              <a:ext uri="{FF2B5EF4-FFF2-40B4-BE49-F238E27FC236}">
-                <a16:creationId xmlns:a16="http://schemas.microsoft.com/office/drawing/2014/main" id="{C3799C61-A260-4D8F-9A16-A37160BD67C6}"/>
-              </a:ext>
-            </a:extLst>
-          </p:cNvPr>
-          <p:cNvSpPr>
-            <a:spLocks xmlns:a="http://schemas.openxmlformats.org/drawingml/2006/main" noGrp="1"/>
-          </p:cNvSpPr>
-          <p:nvPr/>
-        </p:nvSpPr>
-        <p:spPr>
-          <a:xfrm xmlns:a="http://schemas.openxmlformats.org/drawingml/2006/main">
-            <a:off x="1181100" y="4972050"/>
-            <a:ext cx="8343900" cy="447675"/>
-          </a:xfrm>
-          <a:prstGeom xmlns:a="http://schemas.openxmlformats.org/drawingml/2006/main" prst="rect">
-            <a:avLst/>
-          </a:prstGeom>
-          <a:noFill xmlns:a="http://schemas.openxmlformats.org/drawingml/2006/main"/>
-          <a:ln xmlns:a="http://schemas.openxmlformats.org/drawingml/2006/main" w="0">
-            <a:noFill/>
-            <a:prstDash val="solid"/>
-          </a:ln>
-        </p:spPr>
-        <p:txBody>
-          <a:bodyPr xmlns:a="http://schemas.openxmlformats.org/drawingml/2006/main"/>
-          <a:lstStyle xmlns:a="http://schemas.openxmlformats.org/drawingml/2006/main"/>
-          <a:p xmlns:a="http://schemas.openxmlformats.org/drawingml/2006/main">
-            <a:pPr>
-              <a:defRPr sz="1425" b="0">
-                <a:solidFill>
-                  <a:srgbClr val="18211F"/>
-                </a:solidFill>
-                <a:latin typeface="Aptos"/>
-                <a:ea typeface="Aptos"/>
-                <a:cs typeface="Aptos"/>
-              </a:defRPr>
-            </a:pPr>
-            <a:r>
-              <a:rPr sz="1425" b="0">
-                <a:solidFill>
-                  <a:srgbClr val="18211F"/>
-                </a:solidFill>
-                <a:latin typeface="Aptos"/>
-                <a:ea typeface="Aptos"/>
-                <a:cs typeface="Aptos"/>
-              </a:rPr>
-              <a:t>Evaluate performance, usability, and effectiveness in improving resource accessibility.</a:t>
+              <a:t>Proposed voice-interactive system</a:t>
             </a:r>
           </a:p>
         </p:txBody>
@@ -11420,7 +10736,7 @@
     </p:spTree>
     <p:extLst>
       <p:ext uri="{BB962C8B-B14F-4D97-AF65-F5344CB8AC3E}">
-        <p14:creationId xmlns:p14="http://schemas.microsoft.com/office/powerpoint/2010/main" val="1013608383"/>
+        <p14:creationId xmlns:p14="http://schemas.microsoft.com/office/powerpoint/2010/main" val="821699511"/>
       </p:ext>
     </p:extLst>
   </p:cSld>
@@ -11451,7 +10767,7 @@
           <p:cNvPr id="1" name="">
             <a:extLst xmlns:a="http://schemas.openxmlformats.org/drawingml/2006/main">
               <a:ext uri="{FF2B5EF4-FFF2-40B4-BE49-F238E27FC236}">
-                <a16:creationId xmlns:a16="http://schemas.microsoft.com/office/drawing/2014/main" id="{EACB803D-AEC8-4D95-84A8-1E8DA061BC02}"/>
+                <a16:creationId xmlns:a16="http://schemas.microsoft.com/office/drawing/2014/main" id="{00EBE755-01E9-4546-A17E-31F7DDE4FDE4}"/>
               </a:ext>
             </a:extLst>
           </p:cNvPr>
@@ -11484,7 +10800,7 @@
           <p:cNvPr id="2" name="">
             <a:extLst xmlns:a="http://schemas.openxmlformats.org/drawingml/2006/main">
               <a:ext uri="{FF2B5EF4-FFF2-40B4-BE49-F238E27FC236}">
-                <a16:creationId xmlns:a16="http://schemas.microsoft.com/office/drawing/2014/main" id="{E38913C2-043B-4FAB-9B2C-6F69928F0102}"/>
+                <a16:creationId xmlns:a16="http://schemas.microsoft.com/office/drawing/2014/main" id="{72330AC0-9CA0-474F-9E37-EE1E8A7B45C2}"/>
               </a:ext>
             </a:extLst>
           </p:cNvPr>
@@ -11517,7 +10833,7 @@
           <p:cNvPr id="3" name="">
             <a:extLst xmlns:a="http://schemas.openxmlformats.org/drawingml/2006/main">
               <a:ext uri="{FF2B5EF4-FFF2-40B4-BE49-F238E27FC236}">
-                <a16:creationId xmlns:a16="http://schemas.microsoft.com/office/drawing/2014/main" id="{48BA7DFB-FB40-48AB-B129-9892F7CBD5E9}"/>
+                <a16:creationId xmlns:a16="http://schemas.microsoft.com/office/drawing/2014/main" id="{29FEE751-A25D-43D2-AC8A-4595F8F14548}"/>
               </a:ext>
             </a:extLst>
           </p:cNvPr>
@@ -11573,7 +10889,7 @@
           <p:cNvPr id="4" name="">
             <a:extLst xmlns:a="http://schemas.openxmlformats.org/drawingml/2006/main">
               <a:ext uri="{FF2B5EF4-FFF2-40B4-BE49-F238E27FC236}">
-                <a16:creationId xmlns:a16="http://schemas.microsoft.com/office/drawing/2014/main" id="{284D03F9-0458-4817-9740-B10C845A3245}"/>
+                <a16:creationId xmlns:a16="http://schemas.microsoft.com/office/drawing/2014/main" id="{9AD8C54F-9B99-4811-BAC9-D1A3101FC03E}"/>
               </a:ext>
             </a:extLst>
           </p:cNvPr>
@@ -11629,7 +10945,7 @@
           <p:cNvPr id="5" name="">
             <a:extLst xmlns:a="http://schemas.openxmlformats.org/drawingml/2006/main">
               <a:ext uri="{FF2B5EF4-FFF2-40B4-BE49-F238E27FC236}">
-                <a16:creationId xmlns:a16="http://schemas.microsoft.com/office/drawing/2014/main" id="{6F8313B9-58BF-45A2-9650-F135A294C61A}"/>
+                <a16:creationId xmlns:a16="http://schemas.microsoft.com/office/drawing/2014/main" id="{AA4090FB-6CF5-436F-B25A-5C026767B7EE}"/>
               </a:ext>
             </a:extLst>
           </p:cNvPr>
@@ -11664,7 +10980,7 @@
           <p:nvPr/>
         </p:nvPicPr>
         <p:blipFill>
-          <a:blip xmlns:r="http://schemas.openxmlformats.org/officeDocument/2006/relationships" xmlns:a="http://schemas.openxmlformats.org/drawingml/2006/main" r:embed="R9827ed82ab574eb3"/>
+          <a:blip xmlns:r="http://schemas.openxmlformats.org/officeDocument/2006/relationships" xmlns:a="http://schemas.openxmlformats.org/drawingml/2006/main" r:embed="Ra49d6e5a7aa64251"/>
           <a:stretch xmlns:a="http://schemas.openxmlformats.org/drawingml/2006/main"/>
         </p:blipFill>
         <p:spPr>
@@ -11682,7 +10998,7 @@
           <p:cNvPr id="7" name="">
             <a:extLst xmlns:a="http://schemas.openxmlformats.org/drawingml/2006/main">
               <a:ext uri="{FF2B5EF4-FFF2-40B4-BE49-F238E27FC236}">
-                <a16:creationId xmlns:a16="http://schemas.microsoft.com/office/drawing/2014/main" id="{91797DF8-F819-429A-8D31-EF4C73B71B0A}"/>
+                <a16:creationId xmlns:a16="http://schemas.microsoft.com/office/drawing/2014/main" id="{93237F01-36C3-4CC4-B3FF-DD32C1E17B12}"/>
               </a:ext>
             </a:extLst>
           </p:cNvPr>
@@ -11728,7 +11044,7 @@
                 <a:ea typeface="Aptos"/>
                 <a:cs typeface="Aptos"/>
               </a:rPr>
-              <a:t>Agile development flow</a:t>
+              <a:t>Project stages</a:t>
             </a:r>
           </a:p>
         </p:txBody>
@@ -11738,23 +11054,23 @@
           <p:cNvPr id="8" name="">
             <a:extLst xmlns:a="http://schemas.openxmlformats.org/drawingml/2006/main">
               <a:ext uri="{FF2B5EF4-FFF2-40B4-BE49-F238E27FC236}">
-                <a16:creationId xmlns:a16="http://schemas.microsoft.com/office/drawing/2014/main" id="{A2BBD831-7ABC-4392-B361-8865F530EA5C}"/>
-              </a:ext>
-            </a:extLst>
-          </p:cNvPr>
-          <p:cNvSpPr>
-            <a:spLocks xmlns:a="http://schemas.openxmlformats.org/drawingml/2006/main" noGrp="1"/>
-          </p:cNvSpPr>
-          <p:nvPr/>
-        </p:nvSpPr>
-        <p:spPr>
-          <a:xfrm xmlns:a="http://schemas.openxmlformats.org/drawingml/2006/main">
-            <a:off x="876300" y="2152650"/>
-            <a:ext cx="1428750" cy="990600"/>
+                <a16:creationId xmlns:a16="http://schemas.microsoft.com/office/drawing/2014/main" id="{370B6C6D-53A1-4AD1-96AC-43CCB6571832}"/>
+              </a:ext>
+            </a:extLst>
+          </p:cNvPr>
+          <p:cNvSpPr>
+            <a:spLocks xmlns:a="http://schemas.openxmlformats.org/drawingml/2006/main" noGrp="1"/>
+          </p:cNvSpPr>
+          <p:nvPr/>
+        </p:nvSpPr>
+        <p:spPr>
+          <a:xfrm xmlns:a="http://schemas.openxmlformats.org/drawingml/2006/main">
+            <a:off x="876300" y="2171700"/>
+            <a:ext cx="1524000" cy="1104900"/>
           </a:xfrm>
           <a:prstGeom xmlns:a="http://schemas.openxmlformats.org/drawingml/2006/main" prst="roundRect">
             <a:avLst>
-              <a:gd name="adj" fmla="val 7692"/>
+              <a:gd name="adj" fmla="val 6897"/>
             </a:avLst>
           </a:prstGeom>
           <a:solidFill xmlns:a="http://schemas.openxmlformats.org/drawingml/2006/main">
@@ -11773,19 +11089,19 @@
           <p:cNvPr id="9" name="">
             <a:extLst xmlns:a="http://schemas.openxmlformats.org/drawingml/2006/main">
               <a:ext uri="{FF2B5EF4-FFF2-40B4-BE49-F238E27FC236}">
-                <a16:creationId xmlns:a16="http://schemas.microsoft.com/office/drawing/2014/main" id="{BC3D0545-3599-4CCB-858C-E72D765D0978}"/>
-              </a:ext>
-            </a:extLst>
-          </p:cNvPr>
-          <p:cNvSpPr>
-            <a:spLocks xmlns:a="http://schemas.openxmlformats.org/drawingml/2006/main" noGrp="1"/>
-          </p:cNvSpPr>
-          <p:nvPr/>
-        </p:nvSpPr>
-        <p:spPr>
-          <a:xfrm xmlns:a="http://schemas.openxmlformats.org/drawingml/2006/main">
-            <a:off x="1085850" y="2343150"/>
-            <a:ext cx="342900" cy="323850"/>
+                <a16:creationId xmlns:a16="http://schemas.microsoft.com/office/drawing/2014/main" id="{DFA230DC-D6AD-44D8-9EF8-505A5E02B259}"/>
+              </a:ext>
+            </a:extLst>
+          </p:cNvPr>
+          <p:cNvSpPr>
+            <a:spLocks xmlns:a="http://schemas.openxmlformats.org/drawingml/2006/main" noGrp="1"/>
+          </p:cNvSpPr>
+          <p:nvPr/>
+        </p:nvSpPr>
+        <p:spPr>
+          <a:xfrm xmlns:a="http://schemas.openxmlformats.org/drawingml/2006/main">
+            <a:off x="1447800" y="2362200"/>
+            <a:ext cx="361950" cy="323850"/>
           </a:xfrm>
           <a:prstGeom xmlns:a="http://schemas.openxmlformats.org/drawingml/2006/main" prst="rect">
             <a:avLst/>
@@ -11829,19 +11145,19 @@
           <p:cNvPr id="10" name="">
             <a:extLst xmlns:a="http://schemas.openxmlformats.org/drawingml/2006/main">
               <a:ext uri="{FF2B5EF4-FFF2-40B4-BE49-F238E27FC236}">
-                <a16:creationId xmlns:a16="http://schemas.microsoft.com/office/drawing/2014/main" id="{F2944BA4-FFBF-401C-85F4-FEC22CF43B2C}"/>
-              </a:ext>
-            </a:extLst>
-          </p:cNvPr>
-          <p:cNvSpPr>
-            <a:spLocks xmlns:a="http://schemas.openxmlformats.org/drawingml/2006/main" noGrp="1"/>
-          </p:cNvSpPr>
-          <p:nvPr/>
-        </p:nvSpPr>
-        <p:spPr>
-          <a:xfrm xmlns:a="http://schemas.openxmlformats.org/drawingml/2006/main">
-            <a:off x="1085850" y="2781300"/>
-            <a:ext cx="952500" cy="247650"/>
+                <a16:creationId xmlns:a16="http://schemas.microsoft.com/office/drawing/2014/main" id="{745193F3-B854-4A8C-8FD4-26D168F718EA}"/>
+              </a:ext>
+            </a:extLst>
+          </p:cNvPr>
+          <p:cNvSpPr>
+            <a:spLocks xmlns:a="http://schemas.openxmlformats.org/drawingml/2006/main" noGrp="1"/>
+          </p:cNvSpPr>
+          <p:nvPr/>
+        </p:nvSpPr>
+        <p:spPr>
+          <a:xfrm xmlns:a="http://schemas.openxmlformats.org/drawingml/2006/main">
+            <a:off x="1028700" y="2819400"/>
+            <a:ext cx="1219200" cy="304800"/>
           </a:xfrm>
           <a:prstGeom xmlns:a="http://schemas.openxmlformats.org/drawingml/2006/main" prst="rect">
             <a:avLst/>
@@ -11857,7 +11173,7 @@
           <a:lstStyle xmlns:a="http://schemas.openxmlformats.org/drawingml/2006/main"/>
           <a:p xmlns:a="http://schemas.openxmlformats.org/drawingml/2006/main">
             <a:pPr>
-              <a:defRPr sz="1575" b="1">
+              <a:defRPr sz="1350" b="1">
                 <a:solidFill>
                   <a:srgbClr val="FFFFFF"/>
                 </a:solidFill>
@@ -11867,7 +11183,7 @@
               </a:defRPr>
             </a:pPr>
             <a:r>
-              <a:rPr sz="1575" b="1">
+              <a:rPr sz="1350" b="1">
                 <a:solidFill>
                   <a:srgbClr val="FFFFFF"/>
                 </a:solidFill>
@@ -11875,7 +11191,7 @@
                 <a:ea typeface="Aptos"/>
                 <a:cs typeface="Aptos"/>
               </a:rPr>
-              <a:t>Collect</a:t>
+              <a:t>Study problem</a:t>
             </a:r>
           </a:p>
         </p:txBody>
@@ -11885,19 +11201,19 @@
           <p:cNvPr id="11" name="">
             <a:extLst xmlns:a="http://schemas.openxmlformats.org/drawingml/2006/main">
               <a:ext uri="{FF2B5EF4-FFF2-40B4-BE49-F238E27FC236}">
-                <a16:creationId xmlns:a16="http://schemas.microsoft.com/office/drawing/2014/main" id="{9B87B2F4-D15A-4B81-AF89-F277574E150E}"/>
-              </a:ext>
-            </a:extLst>
-          </p:cNvPr>
-          <p:cNvSpPr>
-            <a:spLocks xmlns:a="http://schemas.openxmlformats.org/drawingml/2006/main" noGrp="1"/>
-          </p:cNvSpPr>
-          <p:nvPr/>
-        </p:nvSpPr>
-        <p:spPr>
-          <a:xfrm xmlns:a="http://schemas.openxmlformats.org/drawingml/2006/main">
-            <a:off x="2352675" y="2647950"/>
-            <a:ext cx="438150" cy="0"/>
+                <a16:creationId xmlns:a16="http://schemas.microsoft.com/office/drawing/2014/main" id="{CDD1D3A4-1743-4EBE-9086-D9896032BE6B}"/>
+              </a:ext>
+            </a:extLst>
+          </p:cNvPr>
+          <p:cNvSpPr>
+            <a:spLocks xmlns:a="http://schemas.openxmlformats.org/drawingml/2006/main" noGrp="1"/>
+          </p:cNvSpPr>
+          <p:nvPr/>
+        </p:nvSpPr>
+        <p:spPr>
+          <a:xfrm xmlns:a="http://schemas.openxmlformats.org/drawingml/2006/main">
+            <a:off x="2438400" y="2724150"/>
+            <a:ext cx="342900" cy="0"/>
           </a:xfrm>
           <a:prstGeom xmlns:a="http://schemas.openxmlformats.org/drawingml/2006/main" prst="line">
             <a:avLst/>
@@ -11916,23 +11232,23 @@
           <p:cNvPr id="12" name="">
             <a:extLst xmlns:a="http://schemas.openxmlformats.org/drawingml/2006/main">
               <a:ext uri="{FF2B5EF4-FFF2-40B4-BE49-F238E27FC236}">
-                <a16:creationId xmlns:a16="http://schemas.microsoft.com/office/drawing/2014/main" id="{D6A53932-42D2-4DBF-ACD6-C14FF05E7641}"/>
-              </a:ext>
-            </a:extLst>
-          </p:cNvPr>
-          <p:cNvSpPr>
-            <a:spLocks xmlns:a="http://schemas.openxmlformats.org/drawingml/2006/main" noGrp="1"/>
-          </p:cNvSpPr>
-          <p:nvPr/>
-        </p:nvSpPr>
-        <p:spPr>
-          <a:xfrm xmlns:a="http://schemas.openxmlformats.org/drawingml/2006/main">
-            <a:off x="2828925" y="2152650"/>
-            <a:ext cx="1428750" cy="990600"/>
+                <a16:creationId xmlns:a16="http://schemas.microsoft.com/office/drawing/2014/main" id="{AB168967-8384-4CD2-B9EF-9ECBF92006A0}"/>
+              </a:ext>
+            </a:extLst>
+          </p:cNvPr>
+          <p:cNvSpPr>
+            <a:spLocks xmlns:a="http://schemas.openxmlformats.org/drawingml/2006/main" noGrp="1"/>
+          </p:cNvSpPr>
+          <p:nvPr/>
+        </p:nvSpPr>
+        <p:spPr>
+          <a:xfrm xmlns:a="http://schemas.openxmlformats.org/drawingml/2006/main">
+            <a:off x="2828925" y="2171700"/>
+            <a:ext cx="1524000" cy="1104900"/>
           </a:xfrm>
           <a:prstGeom xmlns:a="http://schemas.openxmlformats.org/drawingml/2006/main" prst="roundRect">
             <a:avLst>
-              <a:gd name="adj" fmla="val 7692"/>
+              <a:gd name="adj" fmla="val 6897"/>
             </a:avLst>
           </a:prstGeom>
           <a:solidFill xmlns:a="http://schemas.openxmlformats.org/drawingml/2006/main">
@@ -11951,19 +11267,19 @@
           <p:cNvPr id="13" name="">
             <a:extLst xmlns:a="http://schemas.openxmlformats.org/drawingml/2006/main">
               <a:ext uri="{FF2B5EF4-FFF2-40B4-BE49-F238E27FC236}">
-                <a16:creationId xmlns:a16="http://schemas.microsoft.com/office/drawing/2014/main" id="{FAF1D3C6-392C-43DE-88F4-F85B2C0ADD3E}"/>
-              </a:ext>
-            </a:extLst>
-          </p:cNvPr>
-          <p:cNvSpPr>
-            <a:spLocks xmlns:a="http://schemas.openxmlformats.org/drawingml/2006/main" noGrp="1"/>
-          </p:cNvSpPr>
-          <p:nvPr/>
-        </p:nvSpPr>
-        <p:spPr>
-          <a:xfrm xmlns:a="http://schemas.openxmlformats.org/drawingml/2006/main">
-            <a:off x="3038475" y="2343150"/>
-            <a:ext cx="342900" cy="323850"/>
+                <a16:creationId xmlns:a16="http://schemas.microsoft.com/office/drawing/2014/main" id="{07366FC2-7478-46FE-B687-00A38BB32F22}"/>
+              </a:ext>
+            </a:extLst>
+          </p:cNvPr>
+          <p:cNvSpPr>
+            <a:spLocks xmlns:a="http://schemas.openxmlformats.org/drawingml/2006/main" noGrp="1"/>
+          </p:cNvSpPr>
+          <p:nvPr/>
+        </p:nvSpPr>
+        <p:spPr>
+          <a:xfrm xmlns:a="http://schemas.openxmlformats.org/drawingml/2006/main">
+            <a:off x="3400425" y="2362200"/>
+            <a:ext cx="361950" cy="323850"/>
           </a:xfrm>
           <a:prstGeom xmlns:a="http://schemas.openxmlformats.org/drawingml/2006/main" prst="rect">
             <a:avLst/>
@@ -12007,19 +11323,19 @@
           <p:cNvPr id="14" name="">
             <a:extLst xmlns:a="http://schemas.openxmlformats.org/drawingml/2006/main">
               <a:ext uri="{FF2B5EF4-FFF2-40B4-BE49-F238E27FC236}">
-                <a16:creationId xmlns:a16="http://schemas.microsoft.com/office/drawing/2014/main" id="{61A4DE4A-815F-43FB-B02E-C80464E510D5}"/>
-              </a:ext>
-            </a:extLst>
-          </p:cNvPr>
-          <p:cNvSpPr>
-            <a:spLocks xmlns:a="http://schemas.openxmlformats.org/drawingml/2006/main" noGrp="1"/>
-          </p:cNvSpPr>
-          <p:nvPr/>
-        </p:nvSpPr>
-        <p:spPr>
-          <a:xfrm xmlns:a="http://schemas.openxmlformats.org/drawingml/2006/main">
-            <a:off x="3038475" y="2781300"/>
-            <a:ext cx="952500" cy="247650"/>
+                <a16:creationId xmlns:a16="http://schemas.microsoft.com/office/drawing/2014/main" id="{7E4399AF-FF0D-4CCE-BF55-15FCFE6A36F9}"/>
+              </a:ext>
+            </a:extLst>
+          </p:cNvPr>
+          <p:cNvSpPr>
+            <a:spLocks xmlns:a="http://schemas.openxmlformats.org/drawingml/2006/main" noGrp="1"/>
+          </p:cNvSpPr>
+          <p:nvPr/>
+        </p:nvSpPr>
+        <p:spPr>
+          <a:xfrm xmlns:a="http://schemas.openxmlformats.org/drawingml/2006/main">
+            <a:off x="2981325" y="2819400"/>
+            <a:ext cx="1219200" cy="304800"/>
           </a:xfrm>
           <a:prstGeom xmlns:a="http://schemas.openxmlformats.org/drawingml/2006/main" prst="rect">
             <a:avLst/>
@@ -12035,7 +11351,7 @@
           <a:lstStyle xmlns:a="http://schemas.openxmlformats.org/drawingml/2006/main"/>
           <a:p xmlns:a="http://schemas.openxmlformats.org/drawingml/2006/main">
             <a:pPr>
-              <a:defRPr sz="1575" b="1">
+              <a:defRPr sz="1350" b="1">
                 <a:solidFill>
                   <a:srgbClr val="18211F"/>
                 </a:solidFill>
@@ -12045,7 +11361,7 @@
               </a:defRPr>
             </a:pPr>
             <a:r>
-              <a:rPr sz="1575" b="1">
+              <a:rPr sz="1350" b="1">
                 <a:solidFill>
                   <a:srgbClr val="18211F"/>
                 </a:solidFill>
@@ -12053,7 +11369,7 @@
                 <a:ea typeface="Aptos"/>
                 <a:cs typeface="Aptos"/>
               </a:rPr>
-              <a:t>Plan</a:t>
+              <a:t>Collect needs</a:t>
             </a:r>
           </a:p>
         </p:txBody>
@@ -12063,19 +11379,19 @@
           <p:cNvPr id="15" name="">
             <a:extLst xmlns:a="http://schemas.openxmlformats.org/drawingml/2006/main">
               <a:ext uri="{FF2B5EF4-FFF2-40B4-BE49-F238E27FC236}">
-                <a16:creationId xmlns:a16="http://schemas.microsoft.com/office/drawing/2014/main" id="{8DA40FEC-12AE-4A10-8EDD-0B4131B963B4}"/>
-              </a:ext>
-            </a:extLst>
-          </p:cNvPr>
-          <p:cNvSpPr>
-            <a:spLocks xmlns:a="http://schemas.openxmlformats.org/drawingml/2006/main" noGrp="1"/>
-          </p:cNvSpPr>
-          <p:nvPr/>
-        </p:nvSpPr>
-        <p:spPr>
-          <a:xfrm xmlns:a="http://schemas.openxmlformats.org/drawingml/2006/main">
-            <a:off x="4305300" y="2647950"/>
-            <a:ext cx="438150" cy="0"/>
+                <a16:creationId xmlns:a16="http://schemas.microsoft.com/office/drawing/2014/main" id="{B720165D-E116-49C6-BB57-9BCA5DB2F10E}"/>
+              </a:ext>
+            </a:extLst>
+          </p:cNvPr>
+          <p:cNvSpPr>
+            <a:spLocks xmlns:a="http://schemas.openxmlformats.org/drawingml/2006/main" noGrp="1"/>
+          </p:cNvSpPr>
+          <p:nvPr/>
+        </p:nvSpPr>
+        <p:spPr>
+          <a:xfrm xmlns:a="http://schemas.openxmlformats.org/drawingml/2006/main">
+            <a:off x="4391025" y="2724150"/>
+            <a:ext cx="342900" cy="0"/>
           </a:xfrm>
           <a:prstGeom xmlns:a="http://schemas.openxmlformats.org/drawingml/2006/main" prst="line">
             <a:avLst/>
@@ -12094,23 +11410,23 @@
           <p:cNvPr id="16" name="">
             <a:extLst xmlns:a="http://schemas.openxmlformats.org/drawingml/2006/main">
               <a:ext uri="{FF2B5EF4-FFF2-40B4-BE49-F238E27FC236}">
-                <a16:creationId xmlns:a16="http://schemas.microsoft.com/office/drawing/2014/main" id="{132A8DD3-EA83-4472-A5F7-628CA8B6F238}"/>
-              </a:ext>
-            </a:extLst>
-          </p:cNvPr>
-          <p:cNvSpPr>
-            <a:spLocks xmlns:a="http://schemas.openxmlformats.org/drawingml/2006/main" noGrp="1"/>
-          </p:cNvSpPr>
-          <p:nvPr/>
-        </p:nvSpPr>
-        <p:spPr>
-          <a:xfrm xmlns:a="http://schemas.openxmlformats.org/drawingml/2006/main">
-            <a:off x="4781550" y="2152650"/>
-            <a:ext cx="1428750" cy="990600"/>
+                <a16:creationId xmlns:a16="http://schemas.microsoft.com/office/drawing/2014/main" id="{1F7637F1-8096-4001-ACB8-0D3253F27DA1}"/>
+              </a:ext>
+            </a:extLst>
+          </p:cNvPr>
+          <p:cNvSpPr>
+            <a:spLocks xmlns:a="http://schemas.openxmlformats.org/drawingml/2006/main" noGrp="1"/>
+          </p:cNvSpPr>
+          <p:nvPr/>
+        </p:nvSpPr>
+        <p:spPr>
+          <a:xfrm xmlns:a="http://schemas.openxmlformats.org/drawingml/2006/main">
+            <a:off x="4781550" y="2171700"/>
+            <a:ext cx="1524000" cy="1104900"/>
           </a:xfrm>
           <a:prstGeom xmlns:a="http://schemas.openxmlformats.org/drawingml/2006/main" prst="roundRect">
             <a:avLst>
-              <a:gd name="adj" fmla="val 7692"/>
+              <a:gd name="adj" fmla="val 6897"/>
             </a:avLst>
           </a:prstGeom>
           <a:solidFill xmlns:a="http://schemas.openxmlformats.org/drawingml/2006/main">
@@ -12129,19 +11445,19 @@
           <p:cNvPr id="17" name="">
             <a:extLst xmlns:a="http://schemas.openxmlformats.org/drawingml/2006/main">
               <a:ext uri="{FF2B5EF4-FFF2-40B4-BE49-F238E27FC236}">
-                <a16:creationId xmlns:a16="http://schemas.microsoft.com/office/drawing/2014/main" id="{A7DFE378-FF92-43A0-A626-07188326B846}"/>
-              </a:ext>
-            </a:extLst>
-          </p:cNvPr>
-          <p:cNvSpPr>
-            <a:spLocks xmlns:a="http://schemas.openxmlformats.org/drawingml/2006/main" noGrp="1"/>
-          </p:cNvSpPr>
-          <p:nvPr/>
-        </p:nvSpPr>
-        <p:spPr>
-          <a:xfrm xmlns:a="http://schemas.openxmlformats.org/drawingml/2006/main">
-            <a:off x="4991100" y="2343150"/>
-            <a:ext cx="342900" cy="323850"/>
+                <a16:creationId xmlns:a16="http://schemas.microsoft.com/office/drawing/2014/main" id="{D6C852C9-33F3-46E1-B2E8-1D3A58E8B599}"/>
+              </a:ext>
+            </a:extLst>
+          </p:cNvPr>
+          <p:cNvSpPr>
+            <a:spLocks xmlns:a="http://schemas.openxmlformats.org/drawingml/2006/main" noGrp="1"/>
+          </p:cNvSpPr>
+          <p:nvPr/>
+        </p:nvSpPr>
+        <p:spPr>
+          <a:xfrm xmlns:a="http://schemas.openxmlformats.org/drawingml/2006/main">
+            <a:off x="5353050" y="2362200"/>
+            <a:ext cx="361950" cy="323850"/>
           </a:xfrm>
           <a:prstGeom xmlns:a="http://schemas.openxmlformats.org/drawingml/2006/main" prst="rect">
             <a:avLst/>
@@ -12185,19 +11501,19 @@
           <p:cNvPr id="18" name="">
             <a:extLst xmlns:a="http://schemas.openxmlformats.org/drawingml/2006/main">
               <a:ext uri="{FF2B5EF4-FFF2-40B4-BE49-F238E27FC236}">
-                <a16:creationId xmlns:a16="http://schemas.microsoft.com/office/drawing/2014/main" id="{0AB98801-72FE-47A5-93E5-CC9A8CE35829}"/>
-              </a:ext>
-            </a:extLst>
-          </p:cNvPr>
-          <p:cNvSpPr>
-            <a:spLocks xmlns:a="http://schemas.openxmlformats.org/drawingml/2006/main" noGrp="1"/>
-          </p:cNvSpPr>
-          <p:nvPr/>
-        </p:nvSpPr>
-        <p:spPr>
-          <a:xfrm xmlns:a="http://schemas.openxmlformats.org/drawingml/2006/main">
-            <a:off x="4991100" y="2781300"/>
-            <a:ext cx="952500" cy="247650"/>
+                <a16:creationId xmlns:a16="http://schemas.microsoft.com/office/drawing/2014/main" id="{95D2B03C-9E24-4435-B705-53CEB7F179F1}"/>
+              </a:ext>
+            </a:extLst>
+          </p:cNvPr>
+          <p:cNvSpPr>
+            <a:spLocks xmlns:a="http://schemas.openxmlformats.org/drawingml/2006/main" noGrp="1"/>
+          </p:cNvSpPr>
+          <p:nvPr/>
+        </p:nvSpPr>
+        <p:spPr>
+          <a:xfrm xmlns:a="http://schemas.openxmlformats.org/drawingml/2006/main">
+            <a:off x="4933950" y="2819400"/>
+            <a:ext cx="1219200" cy="304800"/>
           </a:xfrm>
           <a:prstGeom xmlns:a="http://schemas.openxmlformats.org/drawingml/2006/main" prst="rect">
             <a:avLst/>
@@ -12213,7 +11529,7 @@
           <a:lstStyle xmlns:a="http://schemas.openxmlformats.org/drawingml/2006/main"/>
           <a:p xmlns:a="http://schemas.openxmlformats.org/drawingml/2006/main">
             <a:pPr>
-              <a:defRPr sz="1575" b="1">
+              <a:defRPr sz="1350" b="1">
                 <a:solidFill>
                   <a:srgbClr val="18211F"/>
                 </a:solidFill>
@@ -12223,7 +11539,7 @@
               </a:defRPr>
             </a:pPr>
             <a:r>
-              <a:rPr sz="1575" b="1">
+              <a:rPr sz="1350" b="1">
                 <a:solidFill>
                   <a:srgbClr val="18211F"/>
                 </a:solidFill>
@@ -12231,7 +11547,7 @@
                 <a:ea typeface="Aptos"/>
                 <a:cs typeface="Aptos"/>
               </a:rPr>
-              <a:t>Design</a:t>
+              <a:t>Design system</a:t>
             </a:r>
           </a:p>
         </p:txBody>
@@ -12241,19 +11557,19 @@
           <p:cNvPr id="19" name="">
             <a:extLst xmlns:a="http://schemas.openxmlformats.org/drawingml/2006/main">
               <a:ext uri="{FF2B5EF4-FFF2-40B4-BE49-F238E27FC236}">
-                <a16:creationId xmlns:a16="http://schemas.microsoft.com/office/drawing/2014/main" id="{E785C231-F67C-4493-9860-16DD11C1818C}"/>
-              </a:ext>
-            </a:extLst>
-          </p:cNvPr>
-          <p:cNvSpPr>
-            <a:spLocks xmlns:a="http://schemas.openxmlformats.org/drawingml/2006/main" noGrp="1"/>
-          </p:cNvSpPr>
-          <p:nvPr/>
-        </p:nvSpPr>
-        <p:spPr>
-          <a:xfrm xmlns:a="http://schemas.openxmlformats.org/drawingml/2006/main">
-            <a:off x="6257925" y="2647950"/>
-            <a:ext cx="438150" cy="0"/>
+                <a16:creationId xmlns:a16="http://schemas.microsoft.com/office/drawing/2014/main" id="{A6C64AE7-AECF-44A6-B8CB-6B5424A50026}"/>
+              </a:ext>
+            </a:extLst>
+          </p:cNvPr>
+          <p:cNvSpPr>
+            <a:spLocks xmlns:a="http://schemas.openxmlformats.org/drawingml/2006/main" noGrp="1"/>
+          </p:cNvSpPr>
+          <p:nvPr/>
+        </p:nvSpPr>
+        <p:spPr>
+          <a:xfrm xmlns:a="http://schemas.openxmlformats.org/drawingml/2006/main">
+            <a:off x="6343650" y="2724150"/>
+            <a:ext cx="342900" cy="0"/>
           </a:xfrm>
           <a:prstGeom xmlns:a="http://schemas.openxmlformats.org/drawingml/2006/main" prst="line">
             <a:avLst/>
@@ -12272,23 +11588,23 @@
           <p:cNvPr id="20" name="">
             <a:extLst xmlns:a="http://schemas.openxmlformats.org/drawingml/2006/main">
               <a:ext uri="{FF2B5EF4-FFF2-40B4-BE49-F238E27FC236}">
-                <a16:creationId xmlns:a16="http://schemas.microsoft.com/office/drawing/2014/main" id="{83BD163E-2BD0-45ED-AD64-873630103B46}"/>
-              </a:ext>
-            </a:extLst>
-          </p:cNvPr>
-          <p:cNvSpPr>
-            <a:spLocks xmlns:a="http://schemas.openxmlformats.org/drawingml/2006/main" noGrp="1"/>
-          </p:cNvSpPr>
-          <p:nvPr/>
-        </p:nvSpPr>
-        <p:spPr>
-          <a:xfrm xmlns:a="http://schemas.openxmlformats.org/drawingml/2006/main">
-            <a:off x="6734175" y="2152650"/>
-            <a:ext cx="1428750" cy="990600"/>
+                <a16:creationId xmlns:a16="http://schemas.microsoft.com/office/drawing/2014/main" id="{91B67084-6C82-49E7-8E5D-CC1E6E535B0C}"/>
+              </a:ext>
+            </a:extLst>
+          </p:cNvPr>
+          <p:cNvSpPr>
+            <a:spLocks xmlns:a="http://schemas.openxmlformats.org/drawingml/2006/main" noGrp="1"/>
+          </p:cNvSpPr>
+          <p:nvPr/>
+        </p:nvSpPr>
+        <p:spPr>
+          <a:xfrm xmlns:a="http://schemas.openxmlformats.org/drawingml/2006/main">
+            <a:off x="6734175" y="2171700"/>
+            <a:ext cx="1524000" cy="1104900"/>
           </a:xfrm>
           <a:prstGeom xmlns:a="http://schemas.openxmlformats.org/drawingml/2006/main" prst="roundRect">
             <a:avLst>
-              <a:gd name="adj" fmla="val 7692"/>
+              <a:gd name="adj" fmla="val 6897"/>
             </a:avLst>
           </a:prstGeom>
           <a:solidFill xmlns:a="http://schemas.openxmlformats.org/drawingml/2006/main">
@@ -12307,19 +11623,19 @@
           <p:cNvPr id="21" name="">
             <a:extLst xmlns:a="http://schemas.openxmlformats.org/drawingml/2006/main">
               <a:ext uri="{FF2B5EF4-FFF2-40B4-BE49-F238E27FC236}">
-                <a16:creationId xmlns:a16="http://schemas.microsoft.com/office/drawing/2014/main" id="{FA716CB1-A8E2-486A-BA1F-ED440D5CAD6C}"/>
-              </a:ext>
-            </a:extLst>
-          </p:cNvPr>
-          <p:cNvSpPr>
-            <a:spLocks xmlns:a="http://schemas.openxmlformats.org/drawingml/2006/main" noGrp="1"/>
-          </p:cNvSpPr>
-          <p:nvPr/>
-        </p:nvSpPr>
-        <p:spPr>
-          <a:xfrm xmlns:a="http://schemas.openxmlformats.org/drawingml/2006/main">
-            <a:off x="6943725" y="2343150"/>
-            <a:ext cx="342900" cy="323850"/>
+                <a16:creationId xmlns:a16="http://schemas.microsoft.com/office/drawing/2014/main" id="{7606748C-2EF1-417B-B7B9-DE29E326AA4D}"/>
+              </a:ext>
+            </a:extLst>
+          </p:cNvPr>
+          <p:cNvSpPr>
+            <a:spLocks xmlns:a="http://schemas.openxmlformats.org/drawingml/2006/main" noGrp="1"/>
+          </p:cNvSpPr>
+          <p:nvPr/>
+        </p:nvSpPr>
+        <p:spPr>
+          <a:xfrm xmlns:a="http://schemas.openxmlformats.org/drawingml/2006/main">
+            <a:off x="7305675" y="2362200"/>
+            <a:ext cx="361950" cy="323850"/>
           </a:xfrm>
           <a:prstGeom xmlns:a="http://schemas.openxmlformats.org/drawingml/2006/main" prst="rect">
             <a:avLst/>
@@ -12363,19 +11679,19 @@
           <p:cNvPr id="22" name="">
             <a:extLst xmlns:a="http://schemas.openxmlformats.org/drawingml/2006/main">
               <a:ext uri="{FF2B5EF4-FFF2-40B4-BE49-F238E27FC236}">
-                <a16:creationId xmlns:a16="http://schemas.microsoft.com/office/drawing/2014/main" id="{4AEACF82-FFE5-4352-AB0D-A92007C68EC9}"/>
-              </a:ext>
-            </a:extLst>
-          </p:cNvPr>
-          <p:cNvSpPr>
-            <a:spLocks xmlns:a="http://schemas.openxmlformats.org/drawingml/2006/main" noGrp="1"/>
-          </p:cNvSpPr>
-          <p:nvPr/>
-        </p:nvSpPr>
-        <p:spPr>
-          <a:xfrm xmlns:a="http://schemas.openxmlformats.org/drawingml/2006/main">
-            <a:off x="6943725" y="2781300"/>
-            <a:ext cx="952500" cy="247650"/>
+                <a16:creationId xmlns:a16="http://schemas.microsoft.com/office/drawing/2014/main" id="{39B0A68B-2DE7-4438-AEE3-9785BE5E75F4}"/>
+              </a:ext>
+            </a:extLst>
+          </p:cNvPr>
+          <p:cNvSpPr>
+            <a:spLocks xmlns:a="http://schemas.openxmlformats.org/drawingml/2006/main" noGrp="1"/>
+          </p:cNvSpPr>
+          <p:nvPr/>
+        </p:nvSpPr>
+        <p:spPr>
+          <a:xfrm xmlns:a="http://schemas.openxmlformats.org/drawingml/2006/main">
+            <a:off x="6886575" y="2819400"/>
+            <a:ext cx="1219200" cy="304800"/>
           </a:xfrm>
           <a:prstGeom xmlns:a="http://schemas.openxmlformats.org/drawingml/2006/main" prst="rect">
             <a:avLst/>
@@ -12391,7 +11707,7 @@
           <a:lstStyle xmlns:a="http://schemas.openxmlformats.org/drawingml/2006/main"/>
           <a:p xmlns:a="http://schemas.openxmlformats.org/drawingml/2006/main">
             <a:pPr>
-              <a:defRPr sz="1575" b="1">
+              <a:defRPr sz="1350" b="1">
                 <a:solidFill>
                   <a:srgbClr val="18211F"/>
                 </a:solidFill>
@@ -12401,7 +11717,7 @@
               </a:defRPr>
             </a:pPr>
             <a:r>
-              <a:rPr sz="1575" b="1">
+              <a:rPr sz="1350" b="1">
                 <a:solidFill>
                   <a:srgbClr val="18211F"/>
                 </a:solidFill>
@@ -12409,7 +11725,7 @@
                 <a:ea typeface="Aptos"/>
                 <a:cs typeface="Aptos"/>
               </a:rPr>
-              <a:t>Develop</a:t>
+              <a:t>Build system</a:t>
             </a:r>
           </a:p>
         </p:txBody>
@@ -12419,19 +11735,19 @@
           <p:cNvPr id="23" name="">
             <a:extLst xmlns:a="http://schemas.openxmlformats.org/drawingml/2006/main">
               <a:ext uri="{FF2B5EF4-FFF2-40B4-BE49-F238E27FC236}">
-                <a16:creationId xmlns:a16="http://schemas.microsoft.com/office/drawing/2014/main" id="{222F07E0-B93D-427F-BF4E-01FBA8A42C57}"/>
-              </a:ext>
-            </a:extLst>
-          </p:cNvPr>
-          <p:cNvSpPr>
-            <a:spLocks xmlns:a="http://schemas.openxmlformats.org/drawingml/2006/main" noGrp="1"/>
-          </p:cNvSpPr>
-          <p:nvPr/>
-        </p:nvSpPr>
-        <p:spPr>
-          <a:xfrm xmlns:a="http://schemas.openxmlformats.org/drawingml/2006/main">
-            <a:off x="8210550" y="2647950"/>
-            <a:ext cx="438150" cy="0"/>
+                <a16:creationId xmlns:a16="http://schemas.microsoft.com/office/drawing/2014/main" id="{CCC40F70-7839-4A33-89F0-E2A309512BEC}"/>
+              </a:ext>
+            </a:extLst>
+          </p:cNvPr>
+          <p:cNvSpPr>
+            <a:spLocks xmlns:a="http://schemas.openxmlformats.org/drawingml/2006/main" noGrp="1"/>
+          </p:cNvSpPr>
+          <p:nvPr/>
+        </p:nvSpPr>
+        <p:spPr>
+          <a:xfrm xmlns:a="http://schemas.openxmlformats.org/drawingml/2006/main">
+            <a:off x="8296275" y="2724150"/>
+            <a:ext cx="342900" cy="0"/>
           </a:xfrm>
           <a:prstGeom xmlns:a="http://schemas.openxmlformats.org/drawingml/2006/main" prst="line">
             <a:avLst/>
@@ -12450,23 +11766,23 @@
           <p:cNvPr id="24" name="">
             <a:extLst xmlns:a="http://schemas.openxmlformats.org/drawingml/2006/main">
               <a:ext uri="{FF2B5EF4-FFF2-40B4-BE49-F238E27FC236}">
-                <a16:creationId xmlns:a16="http://schemas.microsoft.com/office/drawing/2014/main" id="{07A6ADDA-092B-4FE9-A410-6553553598D0}"/>
-              </a:ext>
-            </a:extLst>
-          </p:cNvPr>
-          <p:cNvSpPr>
-            <a:spLocks xmlns:a="http://schemas.openxmlformats.org/drawingml/2006/main" noGrp="1"/>
-          </p:cNvSpPr>
-          <p:nvPr/>
-        </p:nvSpPr>
-        <p:spPr>
-          <a:xfrm xmlns:a="http://schemas.openxmlformats.org/drawingml/2006/main">
-            <a:off x="8686800" y="2152650"/>
-            <a:ext cx="1428750" cy="990600"/>
+                <a16:creationId xmlns:a16="http://schemas.microsoft.com/office/drawing/2014/main" id="{CF8DC2DF-1368-41C5-A670-58A700EB91BC}"/>
+              </a:ext>
+            </a:extLst>
+          </p:cNvPr>
+          <p:cNvSpPr>
+            <a:spLocks xmlns:a="http://schemas.openxmlformats.org/drawingml/2006/main" noGrp="1"/>
+          </p:cNvSpPr>
+          <p:nvPr/>
+        </p:nvSpPr>
+        <p:spPr>
+          <a:xfrm xmlns:a="http://schemas.openxmlformats.org/drawingml/2006/main">
+            <a:off x="8686800" y="2171700"/>
+            <a:ext cx="1524000" cy="1104900"/>
           </a:xfrm>
           <a:prstGeom xmlns:a="http://schemas.openxmlformats.org/drawingml/2006/main" prst="roundRect">
             <a:avLst>
-              <a:gd name="adj" fmla="val 7692"/>
+              <a:gd name="adj" fmla="val 6897"/>
             </a:avLst>
           </a:prstGeom>
           <a:solidFill xmlns:a="http://schemas.openxmlformats.org/drawingml/2006/main">
@@ -12485,19 +11801,19 @@
           <p:cNvPr id="25" name="">
             <a:extLst xmlns:a="http://schemas.openxmlformats.org/drawingml/2006/main">
               <a:ext uri="{FF2B5EF4-FFF2-40B4-BE49-F238E27FC236}">
-                <a16:creationId xmlns:a16="http://schemas.microsoft.com/office/drawing/2014/main" id="{9E8863CA-197B-4643-94B4-0CC92BF69766}"/>
-              </a:ext>
-            </a:extLst>
-          </p:cNvPr>
-          <p:cNvSpPr>
-            <a:spLocks xmlns:a="http://schemas.openxmlformats.org/drawingml/2006/main" noGrp="1"/>
-          </p:cNvSpPr>
-          <p:nvPr/>
-        </p:nvSpPr>
-        <p:spPr>
-          <a:xfrm xmlns:a="http://schemas.openxmlformats.org/drawingml/2006/main">
-            <a:off x="8896350" y="2343150"/>
-            <a:ext cx="342900" cy="323850"/>
+                <a16:creationId xmlns:a16="http://schemas.microsoft.com/office/drawing/2014/main" id="{3FF0E3C8-EEA9-47A2-BB7E-6FB992A78F47}"/>
+              </a:ext>
+            </a:extLst>
+          </p:cNvPr>
+          <p:cNvSpPr>
+            <a:spLocks xmlns:a="http://schemas.openxmlformats.org/drawingml/2006/main" noGrp="1"/>
+          </p:cNvSpPr>
+          <p:nvPr/>
+        </p:nvSpPr>
+        <p:spPr>
+          <a:xfrm xmlns:a="http://schemas.openxmlformats.org/drawingml/2006/main">
+            <a:off x="9258300" y="2362200"/>
+            <a:ext cx="361950" cy="323850"/>
           </a:xfrm>
           <a:prstGeom xmlns:a="http://schemas.openxmlformats.org/drawingml/2006/main" prst="rect">
             <a:avLst/>
@@ -12541,19 +11857,19 @@
           <p:cNvPr id="26" name="">
             <a:extLst xmlns:a="http://schemas.openxmlformats.org/drawingml/2006/main">
               <a:ext uri="{FF2B5EF4-FFF2-40B4-BE49-F238E27FC236}">
-                <a16:creationId xmlns:a16="http://schemas.microsoft.com/office/drawing/2014/main" id="{99402A47-3186-4C35-85CC-1E305B919872}"/>
-              </a:ext>
-            </a:extLst>
-          </p:cNvPr>
-          <p:cNvSpPr>
-            <a:spLocks xmlns:a="http://schemas.openxmlformats.org/drawingml/2006/main" noGrp="1"/>
-          </p:cNvSpPr>
-          <p:nvPr/>
-        </p:nvSpPr>
-        <p:spPr>
-          <a:xfrm xmlns:a="http://schemas.openxmlformats.org/drawingml/2006/main">
-            <a:off x="8896350" y="2781300"/>
-            <a:ext cx="952500" cy="247650"/>
+                <a16:creationId xmlns:a16="http://schemas.microsoft.com/office/drawing/2014/main" id="{25B110B6-890A-470A-A008-060A9C7ED31B}"/>
+              </a:ext>
+            </a:extLst>
+          </p:cNvPr>
+          <p:cNvSpPr>
+            <a:spLocks xmlns:a="http://schemas.openxmlformats.org/drawingml/2006/main" noGrp="1"/>
+          </p:cNvSpPr>
+          <p:nvPr/>
+        </p:nvSpPr>
+        <p:spPr>
+          <a:xfrm xmlns:a="http://schemas.openxmlformats.org/drawingml/2006/main">
+            <a:off x="8839200" y="2819400"/>
+            <a:ext cx="1219200" cy="304800"/>
           </a:xfrm>
           <a:prstGeom xmlns:a="http://schemas.openxmlformats.org/drawingml/2006/main" prst="rect">
             <a:avLst/>
@@ -12569,7 +11885,7 @@
           <a:lstStyle xmlns:a="http://schemas.openxmlformats.org/drawingml/2006/main"/>
           <a:p xmlns:a="http://schemas.openxmlformats.org/drawingml/2006/main">
             <a:pPr>
-              <a:defRPr sz="1575" b="1">
+              <a:defRPr sz="1350" b="1">
                 <a:solidFill>
                   <a:srgbClr val="18211F"/>
                 </a:solidFill>
@@ -12579,7 +11895,7 @@
               </a:defRPr>
             </a:pPr>
             <a:r>
-              <a:rPr sz="1575" b="1">
+              <a:rPr sz="1350" b="1">
                 <a:solidFill>
                   <a:srgbClr val="18211F"/>
                 </a:solidFill>
@@ -12587,7 +11903,7 @@
                 <a:ea typeface="Aptos"/>
                 <a:cs typeface="Aptos"/>
               </a:rPr>
-              <a:t>Test</a:t>
+              <a:t>Test system</a:t>
             </a:r>
           </a:p>
         </p:txBody>
@@ -12597,7 +11913,7 @@
           <p:cNvPr id="27" name="">
             <a:extLst xmlns:a="http://schemas.openxmlformats.org/drawingml/2006/main">
               <a:ext uri="{FF2B5EF4-FFF2-40B4-BE49-F238E27FC236}">
-                <a16:creationId xmlns:a16="http://schemas.microsoft.com/office/drawing/2014/main" id="{0BBEA0F3-6962-48AB-A5DC-93C66E2EF38D}"/>
+                <a16:creationId xmlns:a16="http://schemas.microsoft.com/office/drawing/2014/main" id="{EE4FBDC2-1A35-4D5C-A640-8C61379C3952}"/>
               </a:ext>
             </a:extLst>
           </p:cNvPr>
@@ -12632,7 +11948,7 @@
           <p:cNvPr id="28" name="">
             <a:extLst xmlns:a="http://schemas.openxmlformats.org/drawingml/2006/main">
               <a:ext uri="{FF2B5EF4-FFF2-40B4-BE49-F238E27FC236}">
-                <a16:creationId xmlns:a16="http://schemas.microsoft.com/office/drawing/2014/main" id="{6D35743E-0E5A-4F20-A588-8A669E2A839F}"/>
+                <a16:creationId xmlns:a16="http://schemas.microsoft.com/office/drawing/2014/main" id="{125899F1-E453-4318-9D12-423616FB4B90}"/>
               </a:ext>
             </a:extLst>
           </p:cNvPr>
@@ -12678,7 +11994,7 @@
                 <a:ea typeface="Aptos"/>
                 <a:cs typeface="Aptos"/>
               </a:rPr>
-              <a:t>Data collection in Chapter 3</a:t>
+              <a:t>Data collection</a:t>
             </a:r>
           </a:p>
         </p:txBody>
@@ -12688,7 +12004,7 @@
           <p:cNvPr id="29" name="">
             <a:extLst xmlns:a="http://schemas.openxmlformats.org/drawingml/2006/main">
               <a:ext uri="{FF2B5EF4-FFF2-40B4-BE49-F238E27FC236}">
-                <a16:creationId xmlns:a16="http://schemas.microsoft.com/office/drawing/2014/main" id="{6F0A84E5-A355-4FBB-8B99-67C289C78770}"/>
+                <a16:creationId xmlns:a16="http://schemas.microsoft.com/office/drawing/2014/main" id="{E563A026-167D-4F6C-8F97-16EA7F8CA106}"/>
               </a:ext>
             </a:extLst>
           </p:cNvPr>
@@ -12734,7 +12050,7 @@
                 <a:ea typeface="Aptos"/>
                 <a:cs typeface="Aptos"/>
               </a:rPr>
-              <a:t>Used for requirements gathering: observation, document review, and user needs. Results belong in Chapter 4 only if real responses were collected.</a:t>
+              <a:t>Used to understand library needs, user challenges, and required system features.</a:t>
             </a:r>
           </a:p>
         </p:txBody>
@@ -12744,7 +12060,7 @@
           <p:cNvPr id="30" name="">
             <a:extLst xmlns:a="http://schemas.openxmlformats.org/drawingml/2006/main">
               <a:ext uri="{FF2B5EF4-FFF2-40B4-BE49-F238E27FC236}">
-                <a16:creationId xmlns:a16="http://schemas.microsoft.com/office/drawing/2014/main" id="{0E591CF5-C051-4DDF-96EC-5BA89284FEC5}"/>
+                <a16:creationId xmlns:a16="http://schemas.microsoft.com/office/drawing/2014/main" id="{96AEE24C-14E1-4E88-9DD2-8B81D92BA013}"/>
               </a:ext>
             </a:extLst>
           </p:cNvPr>
@@ -12779,7 +12095,7 @@
           <p:cNvPr id="31" name="">
             <a:extLst xmlns:a="http://schemas.openxmlformats.org/drawingml/2006/main">
               <a:ext uri="{FF2B5EF4-FFF2-40B4-BE49-F238E27FC236}">
-                <a16:creationId xmlns:a16="http://schemas.microsoft.com/office/drawing/2014/main" id="{4CFC2AD1-2D86-45BE-BE40-D300C0AD0081}"/>
+                <a16:creationId xmlns:a16="http://schemas.microsoft.com/office/drawing/2014/main" id="{9DEF81E1-6079-4016-9C13-94BE7C471E3F}"/>
               </a:ext>
             </a:extLst>
           </p:cNvPr>
@@ -12809,7 +12125,7 @@
             <a:pPr>
               <a:defRPr sz="1725" b="1">
                 <a:solidFill>
-                  <a:srgbClr val="A94D43"/>
+                  <a:srgbClr val="0D3D2D"/>
                 </a:solidFill>
                 <a:latin typeface="Aptos"/>
                 <a:ea typeface="Aptos"/>
@@ -12819,13 +12135,13 @@
             <a:r>
               <a:rPr sz="1725" b="1">
                 <a:solidFill>
-                  <a:srgbClr val="A94D43"/>
+                  <a:srgbClr val="0D3D2D"/>
                 </a:solidFill>
                 <a:latin typeface="Aptos"/>
                 <a:ea typeface="Aptos"/>
                 <a:cs typeface="Aptos"/>
               </a:rPr>
-              <a:t>Validation scope</a:t>
+              <a:t>Testing</a:t>
             </a:r>
           </a:p>
         </p:txBody>
@@ -12835,7 +12151,7 @@
           <p:cNvPr id="32" name="">
             <a:extLst xmlns:a="http://schemas.openxmlformats.org/drawingml/2006/main">
               <a:ext uri="{FF2B5EF4-FFF2-40B4-BE49-F238E27FC236}">
-                <a16:creationId xmlns:a16="http://schemas.microsoft.com/office/drawing/2014/main" id="{89B3DB33-A330-49DE-9C4A-9CF6E21875DB}"/>
+                <a16:creationId xmlns:a16="http://schemas.microsoft.com/office/drawing/2014/main" id="{EAD6D73B-3187-44B8-97A6-5E911662D3A9}"/>
               </a:ext>
             </a:extLst>
           </p:cNvPr>
@@ -12881,7 +12197,7 @@
                 <a:ea typeface="Aptos"/>
                 <a:cs typeface="Aptos"/>
               </a:rPr>
-              <a:t>System testing and live acceptance testing are the verified results. Do not claim survey results without questionnaire/interview evidence.</a:t>
+              <a:t>Used to check login, search, book reading, database, speech-to-text, and text-to-speech.</a:t>
             </a:r>
           </a:p>
         </p:txBody>
@@ -12889,7 +12205,7 @@
     </p:spTree>
     <p:extLst>
       <p:ext uri="{BB962C8B-B14F-4D97-AF65-F5344CB8AC3E}">
-        <p14:creationId xmlns:p14="http://schemas.microsoft.com/office/powerpoint/2010/main" val="1800023819"/>
+        <p14:creationId xmlns:p14="http://schemas.microsoft.com/office/powerpoint/2010/main" val="1760383124"/>
       </p:ext>
     </p:extLst>
   </p:cSld>
@@ -12920,7 +12236,7 @@
           <p:cNvPr id="1" name="">
             <a:extLst xmlns:a="http://schemas.openxmlformats.org/drawingml/2006/main">
               <a:ext uri="{FF2B5EF4-FFF2-40B4-BE49-F238E27FC236}">
-                <a16:creationId xmlns:a16="http://schemas.microsoft.com/office/drawing/2014/main" id="{DC13F981-972E-426A-8643-74AADFA83BB5}"/>
+                <a16:creationId xmlns:a16="http://schemas.microsoft.com/office/drawing/2014/main" id="{0566641A-813C-41CA-8966-C0812BE02F57}"/>
               </a:ext>
             </a:extLst>
           </p:cNvPr>
@@ -12953,7 +12269,7 @@
           <p:cNvPr id="2" name="">
             <a:extLst xmlns:a="http://schemas.openxmlformats.org/drawingml/2006/main">
               <a:ext uri="{FF2B5EF4-FFF2-40B4-BE49-F238E27FC236}">
-                <a16:creationId xmlns:a16="http://schemas.microsoft.com/office/drawing/2014/main" id="{09CB03BE-4957-48F4-BCC3-98D84B9366AA}"/>
+                <a16:creationId xmlns:a16="http://schemas.microsoft.com/office/drawing/2014/main" id="{2F77F713-A089-4483-BE86-2FC3974A0DD8}"/>
               </a:ext>
             </a:extLst>
           </p:cNvPr>
@@ -12986,7 +12302,7 @@
           <p:cNvPr id="3" name="">
             <a:extLst xmlns:a="http://schemas.openxmlformats.org/drawingml/2006/main">
               <a:ext uri="{FF2B5EF4-FFF2-40B4-BE49-F238E27FC236}">
-                <a16:creationId xmlns:a16="http://schemas.microsoft.com/office/drawing/2014/main" id="{40AC25AD-39E2-46E7-BCD9-98940357259F}"/>
+                <a16:creationId xmlns:a16="http://schemas.microsoft.com/office/drawing/2014/main" id="{240BABB3-061C-445B-A1F3-1D2036AEA55B}"/>
               </a:ext>
             </a:extLst>
           </p:cNvPr>
@@ -13042,7 +12358,7 @@
           <p:cNvPr id="4" name="">
             <a:extLst xmlns:a="http://schemas.openxmlformats.org/drawingml/2006/main">
               <a:ext uri="{FF2B5EF4-FFF2-40B4-BE49-F238E27FC236}">
-                <a16:creationId xmlns:a16="http://schemas.microsoft.com/office/drawing/2014/main" id="{E00714A8-D437-4F08-8AD5-EC3B7D59888F}"/>
+                <a16:creationId xmlns:a16="http://schemas.microsoft.com/office/drawing/2014/main" id="{E05E9437-43A3-43B7-9F2B-00A3EC207349}"/>
               </a:ext>
             </a:extLst>
           </p:cNvPr>
@@ -13098,7 +12414,7 @@
           <p:cNvPr id="5" name="">
             <a:extLst xmlns:a="http://schemas.openxmlformats.org/drawingml/2006/main">
               <a:ext uri="{FF2B5EF4-FFF2-40B4-BE49-F238E27FC236}">
-                <a16:creationId xmlns:a16="http://schemas.microsoft.com/office/drawing/2014/main" id="{AF73B55B-05CA-46CE-8EF9-9B9B1B6E2625}"/>
+                <a16:creationId xmlns:a16="http://schemas.microsoft.com/office/drawing/2014/main" id="{16199D87-CE24-43F4-90AF-971623677D8D}"/>
               </a:ext>
             </a:extLst>
           </p:cNvPr>
@@ -13133,7 +12449,7 @@
           <p:nvPr/>
         </p:nvPicPr>
         <p:blipFill>
-          <a:blip xmlns:r="http://schemas.openxmlformats.org/officeDocument/2006/relationships" xmlns:a="http://schemas.openxmlformats.org/drawingml/2006/main" r:embed="R235dcfff634e4d0a"/>
+          <a:blip xmlns:r="http://schemas.openxmlformats.org/officeDocument/2006/relationships" xmlns:a="http://schemas.openxmlformats.org/drawingml/2006/main" r:embed="R0fe5611e8af14af7"/>
           <a:stretch xmlns:a="http://schemas.openxmlformats.org/drawingml/2006/main"/>
         </p:blipFill>
         <p:spPr>
@@ -13151,7 +12467,7 @@
           <p:cNvPr id="7" name="">
             <a:extLst xmlns:a="http://schemas.openxmlformats.org/drawingml/2006/main">
               <a:ext uri="{FF2B5EF4-FFF2-40B4-BE49-F238E27FC236}">
-                <a16:creationId xmlns:a16="http://schemas.microsoft.com/office/drawing/2014/main" id="{FA185122-A592-431B-9882-9A3C26D85F05}"/>
+                <a16:creationId xmlns:a16="http://schemas.microsoft.com/office/drawing/2014/main" id="{143B6FA1-A112-490F-9AD7-6F345AD898C5}"/>
               </a:ext>
             </a:extLst>
           </p:cNvPr>
@@ -13184,7 +12500,7 @@
           <p:cNvPr id="8" name="">
             <a:extLst xmlns:a="http://schemas.openxmlformats.org/drawingml/2006/main">
               <a:ext uri="{FF2B5EF4-FFF2-40B4-BE49-F238E27FC236}">
-                <a16:creationId xmlns:a16="http://schemas.microsoft.com/office/drawing/2014/main" id="{9CD0D6DF-E945-4F9C-874A-2DD64DB4622E}"/>
+                <a16:creationId xmlns:a16="http://schemas.microsoft.com/office/drawing/2014/main" id="{C26D3068-95C5-4A60-8C13-B8E7A7C74D3F}"/>
               </a:ext>
             </a:extLst>
           </p:cNvPr>
@@ -13240,7 +12556,7 @@
           <p:cNvPr id="9" name="">
             <a:extLst xmlns:a="http://schemas.openxmlformats.org/drawingml/2006/main">
               <a:ext uri="{FF2B5EF4-FFF2-40B4-BE49-F238E27FC236}">
-                <a16:creationId xmlns:a16="http://schemas.microsoft.com/office/drawing/2014/main" id="{AB5220AA-86EE-43CD-9BF4-D64442C19CF4}"/>
+                <a16:creationId xmlns:a16="http://schemas.microsoft.com/office/drawing/2014/main" id="{02DB5B7D-008E-40C5-B2EB-E67CEF943203}"/>
               </a:ext>
             </a:extLst>
           </p:cNvPr>
@@ -13273,7 +12589,7 @@
           <p:cNvPr id="10" name="">
             <a:extLst xmlns:a="http://schemas.openxmlformats.org/drawingml/2006/main">
               <a:ext uri="{FF2B5EF4-FFF2-40B4-BE49-F238E27FC236}">
-                <a16:creationId xmlns:a16="http://schemas.microsoft.com/office/drawing/2014/main" id="{B5ACF1A8-000F-4FC4-B01E-2863E5AEEB48}"/>
+                <a16:creationId xmlns:a16="http://schemas.microsoft.com/office/drawing/2014/main" id="{D9A1C7AF-EBA0-408A-A6BC-E5CEB11DD985}"/>
               </a:ext>
             </a:extLst>
           </p:cNvPr>
@@ -13329,7 +12645,7 @@
           <p:cNvPr id="11" name="">
             <a:extLst xmlns:a="http://schemas.openxmlformats.org/drawingml/2006/main">
               <a:ext uri="{FF2B5EF4-FFF2-40B4-BE49-F238E27FC236}">
-                <a16:creationId xmlns:a16="http://schemas.microsoft.com/office/drawing/2014/main" id="{5EB38A8F-6259-4C3E-B381-0892CA9E98D5}"/>
+                <a16:creationId xmlns:a16="http://schemas.microsoft.com/office/drawing/2014/main" id="{5FA89DEE-E2A2-4EF8-91B7-B6F23CF78898}"/>
               </a:ext>
             </a:extLst>
           </p:cNvPr>
@@ -13362,7 +12678,7 @@
           <p:cNvPr id="12" name="">
             <a:extLst xmlns:a="http://schemas.openxmlformats.org/drawingml/2006/main">
               <a:ext uri="{FF2B5EF4-FFF2-40B4-BE49-F238E27FC236}">
-                <a16:creationId xmlns:a16="http://schemas.microsoft.com/office/drawing/2014/main" id="{905A695C-AEDD-4B78-AE02-862F49207314}"/>
+                <a16:creationId xmlns:a16="http://schemas.microsoft.com/office/drawing/2014/main" id="{9FC51B65-CF25-43A4-877A-6FA723DD9B36}"/>
               </a:ext>
             </a:extLst>
           </p:cNvPr>
@@ -13418,7 +12734,7 @@
           <p:cNvPr id="13" name="">
             <a:extLst xmlns:a="http://schemas.openxmlformats.org/drawingml/2006/main">
               <a:ext uri="{FF2B5EF4-FFF2-40B4-BE49-F238E27FC236}">
-                <a16:creationId xmlns:a16="http://schemas.microsoft.com/office/drawing/2014/main" id="{009BA028-683D-453E-BBB2-20C97DF39598}"/>
+                <a16:creationId xmlns:a16="http://schemas.microsoft.com/office/drawing/2014/main" id="{91D06E78-869C-4B71-A0F7-0DF3C13C5A26}"/>
               </a:ext>
             </a:extLst>
           </p:cNvPr>
@@ -13451,7 +12767,7 @@
           <p:cNvPr id="14" name="">
             <a:extLst xmlns:a="http://schemas.openxmlformats.org/drawingml/2006/main">
               <a:ext uri="{FF2B5EF4-FFF2-40B4-BE49-F238E27FC236}">
-                <a16:creationId xmlns:a16="http://schemas.microsoft.com/office/drawing/2014/main" id="{49208E18-1441-46BA-BEF1-AC9ED90466FC}"/>
+                <a16:creationId xmlns:a16="http://schemas.microsoft.com/office/drawing/2014/main" id="{9019D402-1857-4046-AA42-C5F393CCB935}"/>
               </a:ext>
             </a:extLst>
           </p:cNvPr>
@@ -13507,7 +12823,7 @@
           <p:cNvPr id="15" name="">
             <a:extLst xmlns:a="http://schemas.openxmlformats.org/drawingml/2006/main">
               <a:ext uri="{FF2B5EF4-FFF2-40B4-BE49-F238E27FC236}">
-                <a16:creationId xmlns:a16="http://schemas.microsoft.com/office/drawing/2014/main" id="{7D004BD0-5D86-4A07-9447-D455E2972E43}"/>
+                <a16:creationId xmlns:a16="http://schemas.microsoft.com/office/drawing/2014/main" id="{590FD27E-0CBA-4CD0-94C1-91CAB8F90619}"/>
               </a:ext>
             </a:extLst>
           </p:cNvPr>
@@ -13540,7 +12856,7 @@
           <p:cNvPr id="16" name="">
             <a:extLst xmlns:a="http://schemas.openxmlformats.org/drawingml/2006/main">
               <a:ext uri="{FF2B5EF4-FFF2-40B4-BE49-F238E27FC236}">
-                <a16:creationId xmlns:a16="http://schemas.microsoft.com/office/drawing/2014/main" id="{618F2FBC-A965-402F-9281-B353A84D8483}"/>
+                <a16:creationId xmlns:a16="http://schemas.microsoft.com/office/drawing/2014/main" id="{64807EB3-568A-49BE-B25C-9B0244DA8D20}"/>
               </a:ext>
             </a:extLst>
           </p:cNvPr>
@@ -13596,7 +12912,7 @@
           <p:cNvPr id="17" name="">
             <a:extLst xmlns:a="http://schemas.openxmlformats.org/drawingml/2006/main">
               <a:ext uri="{FF2B5EF4-FFF2-40B4-BE49-F238E27FC236}">
-                <a16:creationId xmlns:a16="http://schemas.microsoft.com/office/drawing/2014/main" id="{E30A2851-8C03-4107-8343-08E8AAC90FE5}"/>
+                <a16:creationId xmlns:a16="http://schemas.microsoft.com/office/drawing/2014/main" id="{74EC4D72-1E22-4061-AC3E-0DFFE2F20780}"/>
               </a:ext>
             </a:extLst>
           </p:cNvPr>
@@ -13631,7 +12947,7 @@
           <p:cNvPr id="18" name="">
             <a:extLst xmlns:a="http://schemas.openxmlformats.org/drawingml/2006/main">
               <a:ext uri="{FF2B5EF4-FFF2-40B4-BE49-F238E27FC236}">
-                <a16:creationId xmlns:a16="http://schemas.microsoft.com/office/drawing/2014/main" id="{3C791A69-D8BF-4D82-ABDC-B4F8BB24E2AB}"/>
+                <a16:creationId xmlns:a16="http://schemas.microsoft.com/office/drawing/2014/main" id="{AF0FD95E-436C-49C1-BE62-B8D5541096A7}"/>
               </a:ext>
             </a:extLst>
           </p:cNvPr>
@@ -13687,7 +13003,7 @@
           <p:cNvPr id="19" name="">
             <a:extLst xmlns:a="http://schemas.openxmlformats.org/drawingml/2006/main">
               <a:ext uri="{FF2B5EF4-FFF2-40B4-BE49-F238E27FC236}">
-                <a16:creationId xmlns:a16="http://schemas.microsoft.com/office/drawing/2014/main" id="{1BFD65B9-529E-4400-897A-66966E9E42A9}"/>
+                <a16:creationId xmlns:a16="http://schemas.microsoft.com/office/drawing/2014/main" id="{7DFA5643-C232-462F-9A31-E735BB3786DA}"/>
               </a:ext>
             </a:extLst>
           </p:cNvPr>
@@ -13741,7 +13057,7 @@
     </p:spTree>
     <p:extLst>
       <p:ext uri="{BB962C8B-B14F-4D97-AF65-F5344CB8AC3E}">
-        <p14:creationId xmlns:p14="http://schemas.microsoft.com/office/powerpoint/2010/main" val="835963341"/>
+        <p14:creationId xmlns:p14="http://schemas.microsoft.com/office/powerpoint/2010/main" val="697888482"/>
       </p:ext>
     </p:extLst>
   </p:cSld>
@@ -13772,7 +13088,7 @@
           <p:cNvPr id="1" name="">
             <a:extLst xmlns:a="http://schemas.openxmlformats.org/drawingml/2006/main">
               <a:ext uri="{FF2B5EF4-FFF2-40B4-BE49-F238E27FC236}">
-                <a16:creationId xmlns:a16="http://schemas.microsoft.com/office/drawing/2014/main" id="{227ED18F-AD9A-4045-A0CB-A3A0BF92C228}"/>
+                <a16:creationId xmlns:a16="http://schemas.microsoft.com/office/drawing/2014/main" id="{F7E63015-EFCD-4E5D-A4F0-A0A7A01F5C7D}"/>
               </a:ext>
             </a:extLst>
           </p:cNvPr>
@@ -13805,7 +13121,7 @@
           <p:cNvPr id="2" name="">
             <a:extLst xmlns:a="http://schemas.openxmlformats.org/drawingml/2006/main">
               <a:ext uri="{FF2B5EF4-FFF2-40B4-BE49-F238E27FC236}">
-                <a16:creationId xmlns:a16="http://schemas.microsoft.com/office/drawing/2014/main" id="{A1D40775-EF0D-466A-85EE-61C08D58EE0B}"/>
+                <a16:creationId xmlns:a16="http://schemas.microsoft.com/office/drawing/2014/main" id="{A0175367-759F-4628-A64F-945EA0A0450F}"/>
               </a:ext>
             </a:extLst>
           </p:cNvPr>
@@ -13838,7 +13154,7 @@
           <p:cNvPr id="3" name="">
             <a:extLst xmlns:a="http://schemas.openxmlformats.org/drawingml/2006/main">
               <a:ext uri="{FF2B5EF4-FFF2-40B4-BE49-F238E27FC236}">
-                <a16:creationId xmlns:a16="http://schemas.microsoft.com/office/drawing/2014/main" id="{272FD247-A2D4-4B99-A9A4-1E9C5337D313}"/>
+                <a16:creationId xmlns:a16="http://schemas.microsoft.com/office/drawing/2014/main" id="{815D5DA5-D7DD-4D4B-B097-A9FBA5C8C9E6}"/>
               </a:ext>
             </a:extLst>
           </p:cNvPr>
@@ -13894,7 +13210,7 @@
           <p:cNvPr id="4" name="">
             <a:extLst xmlns:a="http://schemas.openxmlformats.org/drawingml/2006/main">
               <a:ext uri="{FF2B5EF4-FFF2-40B4-BE49-F238E27FC236}">
-                <a16:creationId xmlns:a16="http://schemas.microsoft.com/office/drawing/2014/main" id="{72B779FD-A176-40AF-8E84-52E2363C1C8F}"/>
+                <a16:creationId xmlns:a16="http://schemas.microsoft.com/office/drawing/2014/main" id="{8A04EA88-B207-4897-852C-762E06F02D12}"/>
               </a:ext>
             </a:extLst>
           </p:cNvPr>
@@ -13950,7 +13266,7 @@
           <p:cNvPr id="5" name="">
             <a:extLst xmlns:a="http://schemas.openxmlformats.org/drawingml/2006/main">
               <a:ext uri="{FF2B5EF4-FFF2-40B4-BE49-F238E27FC236}">
-                <a16:creationId xmlns:a16="http://schemas.microsoft.com/office/drawing/2014/main" id="{5A9D87E3-88D5-4DB9-B8CF-054E68827FC2}"/>
+                <a16:creationId xmlns:a16="http://schemas.microsoft.com/office/drawing/2014/main" id="{E6905B60-A093-43A2-960B-696C075CAEA9}"/>
               </a:ext>
             </a:extLst>
           </p:cNvPr>
@@ -13985,7 +13301,7 @@
           <p:nvPr/>
         </p:nvPicPr>
         <p:blipFill>
-          <a:blip xmlns:r="http://schemas.openxmlformats.org/officeDocument/2006/relationships" xmlns:a="http://schemas.openxmlformats.org/drawingml/2006/main" r:embed="R5ac23d559ddc4e0d"/>
+          <a:blip xmlns:r="http://schemas.openxmlformats.org/officeDocument/2006/relationships" xmlns:a="http://schemas.openxmlformats.org/drawingml/2006/main" r:embed="Rc23e82952a334b2b"/>
           <a:stretch xmlns:a="http://schemas.openxmlformats.org/drawingml/2006/main"/>
         </p:blipFill>
         <p:spPr>
@@ -14003,7 +13319,7 @@
           <p:cNvPr id="7" name="">
             <a:extLst xmlns:a="http://schemas.openxmlformats.org/drawingml/2006/main">
               <a:ext uri="{FF2B5EF4-FFF2-40B4-BE49-F238E27FC236}">
-                <a16:creationId xmlns:a16="http://schemas.microsoft.com/office/drawing/2014/main" id="{CCA4E74C-E5FF-43BC-8057-324A5CEE5F01}"/>
+                <a16:creationId xmlns:a16="http://schemas.microsoft.com/office/drawing/2014/main" id="{DAAA3C19-1CE2-4E07-A731-1C388801BF23}"/>
               </a:ext>
             </a:extLst>
           </p:cNvPr>
@@ -14038,7 +13354,7 @@
           <p:cNvPr id="8" name="">
             <a:extLst xmlns:a="http://schemas.openxmlformats.org/drawingml/2006/main">
               <a:ext uri="{FF2B5EF4-FFF2-40B4-BE49-F238E27FC236}">
-                <a16:creationId xmlns:a16="http://schemas.microsoft.com/office/drawing/2014/main" id="{10EFE7BF-3B00-4CED-ACA4-52F94908E14F}"/>
+                <a16:creationId xmlns:a16="http://schemas.microsoft.com/office/drawing/2014/main" id="{CE99096D-BC77-4F8F-AD80-12A69E175B90}"/>
               </a:ext>
             </a:extLst>
           </p:cNvPr>
@@ -14094,7 +13410,7 @@
           <p:cNvPr id="9" name="">
             <a:extLst xmlns:a="http://schemas.openxmlformats.org/drawingml/2006/main">
               <a:ext uri="{FF2B5EF4-FFF2-40B4-BE49-F238E27FC236}">
-                <a16:creationId xmlns:a16="http://schemas.microsoft.com/office/drawing/2014/main" id="{C5222DCA-6500-445F-8ECC-C08CC52E9D29}"/>
+                <a16:creationId xmlns:a16="http://schemas.microsoft.com/office/drawing/2014/main" id="{AC9CD8B4-3448-4E16-828B-7F437D7EF800}"/>
               </a:ext>
             </a:extLst>
           </p:cNvPr>
@@ -14150,7 +13466,7 @@
           <p:cNvPr id="10" name="">
             <a:extLst xmlns:a="http://schemas.openxmlformats.org/drawingml/2006/main">
               <a:ext uri="{FF2B5EF4-FFF2-40B4-BE49-F238E27FC236}">
-                <a16:creationId xmlns:a16="http://schemas.microsoft.com/office/drawing/2014/main" id="{A481C747-526E-4E44-B4E3-DD2C9673EA0B}"/>
+                <a16:creationId xmlns:a16="http://schemas.microsoft.com/office/drawing/2014/main" id="{5C866DB2-9B83-4D9A-8505-03E2ADE91811}"/>
               </a:ext>
             </a:extLst>
           </p:cNvPr>
@@ -14181,7 +13497,7 @@
           <p:cNvPr id="11" name="">
             <a:extLst xmlns:a="http://schemas.openxmlformats.org/drawingml/2006/main">
               <a:ext uri="{FF2B5EF4-FFF2-40B4-BE49-F238E27FC236}">
-                <a16:creationId xmlns:a16="http://schemas.microsoft.com/office/drawing/2014/main" id="{5CCF954C-3A03-41F2-8144-3A3445960149}"/>
+                <a16:creationId xmlns:a16="http://schemas.microsoft.com/office/drawing/2014/main" id="{66234744-29B5-4C0D-818A-BBC9D0E724B6}"/>
               </a:ext>
             </a:extLst>
           </p:cNvPr>
@@ -14216,7 +13532,7 @@
           <p:cNvPr id="12" name="">
             <a:extLst xmlns:a="http://schemas.openxmlformats.org/drawingml/2006/main">
               <a:ext uri="{FF2B5EF4-FFF2-40B4-BE49-F238E27FC236}">
-                <a16:creationId xmlns:a16="http://schemas.microsoft.com/office/drawing/2014/main" id="{93377E63-7C72-48C3-9630-EC95EDDA9D8D}"/>
+                <a16:creationId xmlns:a16="http://schemas.microsoft.com/office/drawing/2014/main" id="{E0721F78-D1B9-4EBE-AB8F-BC72B2D12065}"/>
               </a:ext>
             </a:extLst>
           </p:cNvPr>
@@ -14272,7 +13588,7 @@
           <p:cNvPr id="13" name="">
             <a:extLst xmlns:a="http://schemas.openxmlformats.org/drawingml/2006/main">
               <a:ext uri="{FF2B5EF4-FFF2-40B4-BE49-F238E27FC236}">
-                <a16:creationId xmlns:a16="http://schemas.microsoft.com/office/drawing/2014/main" id="{C900A104-6C88-4946-9FC1-FAC6861D1F33}"/>
+                <a16:creationId xmlns:a16="http://schemas.microsoft.com/office/drawing/2014/main" id="{4A07D2EC-590C-4C3B-B302-525142FFF18C}"/>
               </a:ext>
             </a:extLst>
           </p:cNvPr>
@@ -14328,7 +13644,7 @@
           <p:cNvPr id="14" name="">
             <a:extLst xmlns:a="http://schemas.openxmlformats.org/drawingml/2006/main">
               <a:ext uri="{FF2B5EF4-FFF2-40B4-BE49-F238E27FC236}">
-                <a16:creationId xmlns:a16="http://schemas.microsoft.com/office/drawing/2014/main" id="{BB95C5F5-30FB-44F9-A7D0-6816A767C13F}"/>
+                <a16:creationId xmlns:a16="http://schemas.microsoft.com/office/drawing/2014/main" id="{888CDC6E-77F4-4591-B521-0CA2BE7443FC}"/>
               </a:ext>
             </a:extLst>
           </p:cNvPr>
@@ -14359,7 +13675,7 @@
           <p:cNvPr id="15" name="">
             <a:extLst xmlns:a="http://schemas.openxmlformats.org/drawingml/2006/main">
               <a:ext uri="{FF2B5EF4-FFF2-40B4-BE49-F238E27FC236}">
-                <a16:creationId xmlns:a16="http://schemas.microsoft.com/office/drawing/2014/main" id="{B150E78C-8FC5-4BF6-BF1B-00A07B64CB6B}"/>
+                <a16:creationId xmlns:a16="http://schemas.microsoft.com/office/drawing/2014/main" id="{753D5020-3E6C-4DBF-AFD6-84442E985E6D}"/>
               </a:ext>
             </a:extLst>
           </p:cNvPr>
@@ -14394,7 +13710,7 @@
           <p:cNvPr id="16" name="">
             <a:extLst xmlns:a="http://schemas.openxmlformats.org/drawingml/2006/main">
               <a:ext uri="{FF2B5EF4-FFF2-40B4-BE49-F238E27FC236}">
-                <a16:creationId xmlns:a16="http://schemas.microsoft.com/office/drawing/2014/main" id="{0D186DDD-83AD-4552-B120-D9476D85D72C}"/>
+                <a16:creationId xmlns:a16="http://schemas.microsoft.com/office/drawing/2014/main" id="{ACB5F359-82FE-4F8A-BDCA-AEF9C56A6DB1}"/>
               </a:ext>
             </a:extLst>
           </p:cNvPr>
@@ -14450,7 +13766,7 @@
           <p:cNvPr id="17" name="">
             <a:extLst xmlns:a="http://schemas.openxmlformats.org/drawingml/2006/main">
               <a:ext uri="{FF2B5EF4-FFF2-40B4-BE49-F238E27FC236}">
-                <a16:creationId xmlns:a16="http://schemas.microsoft.com/office/drawing/2014/main" id="{4282B95D-3F2A-4E13-9916-7D74C378C204}"/>
+                <a16:creationId xmlns:a16="http://schemas.microsoft.com/office/drawing/2014/main" id="{BDFB3F4F-1DEA-4B28-8BC3-CF798FBF0E11}"/>
               </a:ext>
             </a:extLst>
           </p:cNvPr>
@@ -14506,7 +13822,7 @@
           <p:cNvPr id="18" name="">
             <a:extLst xmlns:a="http://schemas.openxmlformats.org/drawingml/2006/main">
               <a:ext uri="{FF2B5EF4-FFF2-40B4-BE49-F238E27FC236}">
-                <a16:creationId xmlns:a16="http://schemas.microsoft.com/office/drawing/2014/main" id="{424D15A9-8363-4960-8215-D120A7B53488}"/>
+                <a16:creationId xmlns:a16="http://schemas.microsoft.com/office/drawing/2014/main" id="{AE613F17-E766-4828-806A-48175265D54E}"/>
               </a:ext>
             </a:extLst>
           </p:cNvPr>
@@ -14537,7 +13853,7 @@
           <p:cNvPr id="19" name="">
             <a:extLst xmlns:a="http://schemas.openxmlformats.org/drawingml/2006/main">
               <a:ext uri="{FF2B5EF4-FFF2-40B4-BE49-F238E27FC236}">
-                <a16:creationId xmlns:a16="http://schemas.microsoft.com/office/drawing/2014/main" id="{0B88C41A-7C96-445C-8401-B316E382FABE}"/>
+                <a16:creationId xmlns:a16="http://schemas.microsoft.com/office/drawing/2014/main" id="{758C47AA-87DF-45EC-A06F-0743AF2BB448}"/>
               </a:ext>
             </a:extLst>
           </p:cNvPr>
@@ -14572,7 +13888,7 @@
           <p:cNvPr id="20" name="">
             <a:extLst xmlns:a="http://schemas.openxmlformats.org/drawingml/2006/main">
               <a:ext uri="{FF2B5EF4-FFF2-40B4-BE49-F238E27FC236}">
-                <a16:creationId xmlns:a16="http://schemas.microsoft.com/office/drawing/2014/main" id="{AD81DC99-FE3E-46C3-8BA5-E6156097A01F}"/>
+                <a16:creationId xmlns:a16="http://schemas.microsoft.com/office/drawing/2014/main" id="{BD872919-8536-44C9-9AE2-F351DA8D48EF}"/>
               </a:ext>
             </a:extLst>
           </p:cNvPr>
@@ -14628,7 +13944,7 @@
           <p:cNvPr id="21" name="">
             <a:extLst xmlns:a="http://schemas.openxmlformats.org/drawingml/2006/main">
               <a:ext uri="{FF2B5EF4-FFF2-40B4-BE49-F238E27FC236}">
-                <a16:creationId xmlns:a16="http://schemas.microsoft.com/office/drawing/2014/main" id="{B7AA1BD2-52F2-44DA-AD27-DB88B05B623A}"/>
+                <a16:creationId xmlns:a16="http://schemas.microsoft.com/office/drawing/2014/main" id="{BCF67075-3E46-458E-8E78-73C6711F8A58}"/>
               </a:ext>
             </a:extLst>
           </p:cNvPr>
@@ -14684,7 +14000,7 @@
           <p:cNvPr id="22" name="">
             <a:extLst xmlns:a="http://schemas.openxmlformats.org/drawingml/2006/main">
               <a:ext uri="{FF2B5EF4-FFF2-40B4-BE49-F238E27FC236}">
-                <a16:creationId xmlns:a16="http://schemas.microsoft.com/office/drawing/2014/main" id="{853E67B2-3B13-4CCC-8F9E-374BF30EC365}"/>
+                <a16:creationId xmlns:a16="http://schemas.microsoft.com/office/drawing/2014/main" id="{F5181E20-BE5A-4100-B325-EF392F553767}"/>
               </a:ext>
             </a:extLst>
           </p:cNvPr>
@@ -14715,7 +14031,7 @@
           <p:cNvPr id="23" name="">
             <a:extLst xmlns:a="http://schemas.openxmlformats.org/drawingml/2006/main">
               <a:ext uri="{FF2B5EF4-FFF2-40B4-BE49-F238E27FC236}">
-                <a16:creationId xmlns:a16="http://schemas.microsoft.com/office/drawing/2014/main" id="{32882E07-C26C-478E-8C7B-D891479B7F27}"/>
+                <a16:creationId xmlns:a16="http://schemas.microsoft.com/office/drawing/2014/main" id="{2A898827-BA65-4F7D-85E8-478CC87DCCFC}"/>
               </a:ext>
             </a:extLst>
           </p:cNvPr>
@@ -14750,7 +14066,7 @@
           <p:cNvPr id="24" name="">
             <a:extLst xmlns:a="http://schemas.openxmlformats.org/drawingml/2006/main">
               <a:ext uri="{FF2B5EF4-FFF2-40B4-BE49-F238E27FC236}">
-                <a16:creationId xmlns:a16="http://schemas.microsoft.com/office/drawing/2014/main" id="{B0B818F1-E7FC-46DA-B3CB-EF9433F038CD}"/>
+                <a16:creationId xmlns:a16="http://schemas.microsoft.com/office/drawing/2014/main" id="{09595873-6F22-4770-A363-6EAF65DB238D}"/>
               </a:ext>
             </a:extLst>
           </p:cNvPr>
@@ -14806,7 +14122,7 @@
           <p:cNvPr id="25" name="">
             <a:extLst xmlns:a="http://schemas.openxmlformats.org/drawingml/2006/main">
               <a:ext uri="{FF2B5EF4-FFF2-40B4-BE49-F238E27FC236}">
-                <a16:creationId xmlns:a16="http://schemas.microsoft.com/office/drawing/2014/main" id="{6823AAAA-E27A-4826-839F-2E2A1632972A}"/>
+                <a16:creationId xmlns:a16="http://schemas.microsoft.com/office/drawing/2014/main" id="{1C5F53EE-DA3B-4AEE-AD93-831742210E02}"/>
               </a:ext>
             </a:extLst>
           </p:cNvPr>
@@ -14862,7 +14178,7 @@
           <p:cNvPr id="26" name="">
             <a:extLst xmlns:a="http://schemas.openxmlformats.org/drawingml/2006/main">
               <a:ext uri="{FF2B5EF4-FFF2-40B4-BE49-F238E27FC236}">
-                <a16:creationId xmlns:a16="http://schemas.microsoft.com/office/drawing/2014/main" id="{CFAC40ED-98C6-4DA4-A7BF-EAA7D4C6040F}"/>
+                <a16:creationId xmlns:a16="http://schemas.microsoft.com/office/drawing/2014/main" id="{4EE5B8F5-A31C-4D21-9301-BF9F3E6EE82B}"/>
               </a:ext>
             </a:extLst>
           </p:cNvPr>
@@ -14916,7 +14232,7 @@
     </p:spTree>
     <p:extLst>
       <p:ext uri="{BB962C8B-B14F-4D97-AF65-F5344CB8AC3E}">
-        <p14:creationId xmlns:p14="http://schemas.microsoft.com/office/powerpoint/2010/main" val="1691259259"/>
+        <p14:creationId xmlns:p14="http://schemas.microsoft.com/office/powerpoint/2010/main" val="2126369918"/>
       </p:ext>
     </p:extLst>
   </p:cSld>
